--- a/Lectures/PublicKeyLite.pptx
+++ b/Lectures/PublicKeyLite.pptx
@@ -5,7 +5,7 @@
     <p:sldMasterId id="2147483648" r:id="rId1"/>
   </p:sldMasterIdLst>
   <p:notesMasterIdLst>
-    <p:notesMasterId r:id="rId24"/>
+    <p:notesMasterId r:id="rId25"/>
   </p:notesMasterIdLst>
   <p:sldIdLst>
     <p:sldId id="296" r:id="rId2"/>
@@ -15,21 +15,22 @@
     <p:sldId id="591" r:id="rId6"/>
     <p:sldId id="592" r:id="rId7"/>
     <p:sldId id="594" r:id="rId8"/>
-    <p:sldId id="593" r:id="rId9"/>
-    <p:sldId id="595" r:id="rId10"/>
-    <p:sldId id="596" r:id="rId11"/>
-    <p:sldId id="597" r:id="rId12"/>
-    <p:sldId id="598" r:id="rId13"/>
-    <p:sldId id="604" r:id="rId14"/>
-    <p:sldId id="605" r:id="rId15"/>
-    <p:sldId id="600" r:id="rId16"/>
-    <p:sldId id="601" r:id="rId17"/>
-    <p:sldId id="606" r:id="rId18"/>
-    <p:sldId id="607" r:id="rId19"/>
-    <p:sldId id="603" r:id="rId20"/>
-    <p:sldId id="608" r:id="rId21"/>
-    <p:sldId id="609" r:id="rId22"/>
-    <p:sldId id="610" r:id="rId23"/>
+    <p:sldId id="611" r:id="rId9"/>
+    <p:sldId id="593" r:id="rId10"/>
+    <p:sldId id="595" r:id="rId11"/>
+    <p:sldId id="596" r:id="rId12"/>
+    <p:sldId id="597" r:id="rId13"/>
+    <p:sldId id="598" r:id="rId14"/>
+    <p:sldId id="604" r:id="rId15"/>
+    <p:sldId id="605" r:id="rId16"/>
+    <p:sldId id="600" r:id="rId17"/>
+    <p:sldId id="601" r:id="rId18"/>
+    <p:sldId id="606" r:id="rId19"/>
+    <p:sldId id="607" r:id="rId20"/>
+    <p:sldId id="603" r:id="rId21"/>
+    <p:sldId id="608" r:id="rId22"/>
+    <p:sldId id="609" r:id="rId23"/>
+    <p:sldId id="610" r:id="rId24"/>
   </p:sldIdLst>
   <p:sldSz cx="12192000" cy="6858000"/>
   <p:notesSz cx="6858000" cy="9144000"/>
@@ -323,7 +324,7 @@
           <a:p>
             <a:fld id="{CBA08D16-15DC-4E25-BDC3-F25146157B16}" type="datetimeFigureOut">
               <a:rPr lang="ru-RU" smtClean="0"/>
-              <a:t>18.04.2024</a:t>
+              <a:t>22.05.2026</a:t>
             </a:fld>
             <a:endParaRPr lang="ru-RU"/>
           </a:p>
@@ -387,38 +388,37 @@
           <a:p>
             <a:pPr lvl="0"/>
             <a:r>
-              <a:rPr lang="ru-RU" smtClean="0"/>
+              <a:rPr lang="ru-RU"/>
               <a:t>Образец текста</a:t>
             </a:r>
           </a:p>
           <a:p>
             <a:pPr lvl="1"/>
             <a:r>
-              <a:rPr lang="ru-RU" smtClean="0"/>
+              <a:rPr lang="ru-RU"/>
               <a:t>Второй уровень</a:t>
             </a:r>
           </a:p>
           <a:p>
             <a:pPr lvl="2"/>
             <a:r>
-              <a:rPr lang="ru-RU" smtClean="0"/>
+              <a:rPr lang="ru-RU"/>
               <a:t>Третий уровень</a:t>
             </a:r>
           </a:p>
           <a:p>
             <a:pPr lvl="3"/>
             <a:r>
-              <a:rPr lang="ru-RU" smtClean="0"/>
+              <a:rPr lang="ru-RU"/>
               <a:t>Четвертый уровень</a:t>
             </a:r>
           </a:p>
           <a:p>
             <a:pPr lvl="4"/>
             <a:r>
-              <a:rPr lang="ru-RU" smtClean="0"/>
+              <a:rPr lang="ru-RU"/>
               <a:t>Пятый уровень</a:t>
             </a:r>
-            <a:endParaRPr lang="ru-RU"/>
           </a:p>
         </p:txBody>
       </p:sp>
@@ -636,29 +636,28 @@
           <a:lstStyle/>
           <a:p>
             <a:r>
-              <a:rPr lang="en-US" dirty="0" smtClean="0"/>
+              <a:rPr lang="en-US" dirty="0"/>
               <a:t>OAEP:   explain</a:t>
             </a:r>
             <a:r>
-              <a:rPr lang="en-US" baseline="0" dirty="0" smtClean="0"/>
+              <a:rPr lang="en-US" baseline="0" dirty="0"/>
               <a:t> why O stands for Optimal.</a:t>
             </a:r>
-            <a:endParaRPr lang="en-US" dirty="0" smtClean="0"/>
-          </a:p>
-          <a:p>
-            <a:r>
-              <a:rPr lang="en-US" dirty="0" smtClean="0"/>
+            <a:endParaRPr lang="en-US" dirty="0"/>
+          </a:p>
+          <a:p>
+            <a:r>
+              <a:rPr lang="en-US" dirty="0"/>
               <a:t>Fujisaki, Okamoto, </a:t>
             </a:r>
             <a:r>
-              <a:rPr lang="en-US" dirty="0" err="1" smtClean="0"/>
+              <a:rPr lang="en-US" dirty="0" err="1"/>
               <a:t>Pointcheval</a:t>
             </a:r>
             <a:r>
-              <a:rPr lang="en-US" dirty="0" smtClean="0"/>
+              <a:rPr lang="en-US" dirty="0"/>
               <a:t> and Stern</a:t>
             </a:r>
-            <a:endParaRPr lang="en-US" dirty="0"/>
           </a:p>
         </p:txBody>
       </p:sp>
@@ -680,7 +679,7 @@
             <a:fld id="{8FF38DAD-5F37-4EA5-A798-26ED1E453939}" type="slidenum">
               <a:rPr lang="en-US" smtClean="0"/>
               <a:pPr/>
-              <a:t>13</a:t>
+              <a:t>14</a:t>
             </a:fld>
             <a:endParaRPr lang="en-US" dirty="0"/>
           </a:p>
@@ -741,10 +740,9 @@
           </a:lstStyle>
           <a:p>
             <a:r>
-              <a:rPr lang="ru-RU" smtClean="0"/>
+              <a:rPr lang="ru-RU"/>
               <a:t>Образец заголовка</a:t>
             </a:r>
-            <a:endParaRPr lang="ru-RU"/>
           </a:p>
         </p:txBody>
       </p:sp>
@@ -806,10 +804,9 @@
           </a:lstStyle>
           <a:p>
             <a:r>
-              <a:rPr lang="ru-RU" smtClean="0"/>
+              <a:rPr lang="ru-RU"/>
               <a:t>Образец подзаголовка</a:t>
             </a:r>
-            <a:endParaRPr lang="ru-RU"/>
           </a:p>
         </p:txBody>
       </p:sp>
@@ -830,7 +827,7 @@
           <a:p>
             <a:fld id="{FCEC8293-DB51-454A-BE81-EC8FCB31EBA2}" type="datetime1">
               <a:rPr lang="ru-RU" smtClean="0"/>
-              <a:t>18.04.2024</a:t>
+              <a:t>22.05.2026</a:t>
             </a:fld>
             <a:endParaRPr lang="ru-RU"/>
           </a:p>
@@ -852,10 +849,9 @@
           <a:lstStyle/>
           <a:p>
             <a:r>
-              <a:rPr lang="ru-RU" smtClean="0"/>
+              <a:rPr lang="ru-RU"/>
               <a:t>Артём Макаров</a:t>
             </a:r>
-            <a:endParaRPr lang="ru-RU"/>
           </a:p>
         </p:txBody>
       </p:sp>
@@ -928,10 +924,9 @@
           <a:lstStyle/>
           <a:p>
             <a:r>
-              <a:rPr lang="ru-RU" smtClean="0"/>
+              <a:rPr lang="ru-RU"/>
               <a:t>Образец заголовка</a:t>
             </a:r>
-            <a:endParaRPr lang="ru-RU"/>
           </a:p>
         </p:txBody>
       </p:sp>
@@ -952,38 +947,37 @@
           <a:p>
             <a:pPr lvl="0"/>
             <a:r>
-              <a:rPr lang="ru-RU" smtClean="0"/>
+              <a:rPr lang="ru-RU"/>
               <a:t>Образец текста</a:t>
             </a:r>
           </a:p>
           <a:p>
             <a:pPr lvl="1"/>
             <a:r>
-              <a:rPr lang="ru-RU" smtClean="0"/>
+              <a:rPr lang="ru-RU"/>
               <a:t>Второй уровень</a:t>
             </a:r>
           </a:p>
           <a:p>
             <a:pPr lvl="2"/>
             <a:r>
-              <a:rPr lang="ru-RU" smtClean="0"/>
+              <a:rPr lang="ru-RU"/>
               <a:t>Третий уровень</a:t>
             </a:r>
           </a:p>
           <a:p>
             <a:pPr lvl="3"/>
             <a:r>
-              <a:rPr lang="ru-RU" smtClean="0"/>
+              <a:rPr lang="ru-RU"/>
               <a:t>Четвертый уровень</a:t>
             </a:r>
           </a:p>
           <a:p>
             <a:pPr lvl="4"/>
             <a:r>
-              <a:rPr lang="ru-RU" smtClean="0"/>
+              <a:rPr lang="ru-RU"/>
               <a:t>Пятый уровень</a:t>
             </a:r>
-            <a:endParaRPr lang="ru-RU"/>
           </a:p>
         </p:txBody>
       </p:sp>
@@ -1004,7 +998,7 @@
           <a:p>
             <a:fld id="{241C87B1-1C35-4DBD-BC18-2BC72E776603}" type="datetime1">
               <a:rPr lang="ru-RU" smtClean="0"/>
-              <a:t>18.04.2024</a:t>
+              <a:t>22.05.2026</a:t>
             </a:fld>
             <a:endParaRPr lang="ru-RU"/>
           </a:p>
@@ -1026,10 +1020,9 @@
           <a:lstStyle/>
           <a:p>
             <a:r>
-              <a:rPr lang="ru-RU" smtClean="0"/>
+              <a:rPr lang="ru-RU"/>
               <a:t>Артём Макаров</a:t>
             </a:r>
-            <a:endParaRPr lang="ru-RU"/>
           </a:p>
         </p:txBody>
       </p:sp>
@@ -1107,10 +1100,9 @@
           <a:lstStyle/>
           <a:p>
             <a:r>
-              <a:rPr lang="ru-RU" smtClean="0"/>
+              <a:rPr lang="ru-RU"/>
               <a:t>Образец заголовка</a:t>
             </a:r>
-            <a:endParaRPr lang="ru-RU"/>
           </a:p>
         </p:txBody>
       </p:sp>
@@ -1136,38 +1128,37 @@
           <a:p>
             <a:pPr lvl="0"/>
             <a:r>
-              <a:rPr lang="ru-RU" smtClean="0"/>
+              <a:rPr lang="ru-RU"/>
               <a:t>Образец текста</a:t>
             </a:r>
           </a:p>
           <a:p>
             <a:pPr lvl="1"/>
             <a:r>
-              <a:rPr lang="ru-RU" smtClean="0"/>
+              <a:rPr lang="ru-RU"/>
               <a:t>Второй уровень</a:t>
             </a:r>
           </a:p>
           <a:p>
             <a:pPr lvl="2"/>
             <a:r>
-              <a:rPr lang="ru-RU" smtClean="0"/>
+              <a:rPr lang="ru-RU"/>
               <a:t>Третий уровень</a:t>
             </a:r>
           </a:p>
           <a:p>
             <a:pPr lvl="3"/>
             <a:r>
-              <a:rPr lang="ru-RU" smtClean="0"/>
+              <a:rPr lang="ru-RU"/>
               <a:t>Четвертый уровень</a:t>
             </a:r>
           </a:p>
           <a:p>
             <a:pPr lvl="4"/>
             <a:r>
-              <a:rPr lang="ru-RU" smtClean="0"/>
+              <a:rPr lang="ru-RU"/>
               <a:t>Пятый уровень</a:t>
             </a:r>
-            <a:endParaRPr lang="ru-RU"/>
           </a:p>
         </p:txBody>
       </p:sp>
@@ -1188,7 +1179,7 @@
           <a:p>
             <a:fld id="{3134C275-26C0-42CD-9111-9ADE65922AF9}" type="datetime1">
               <a:rPr lang="ru-RU" smtClean="0"/>
-              <a:t>18.04.2024</a:t>
+              <a:t>22.05.2026</a:t>
             </a:fld>
             <a:endParaRPr lang="ru-RU"/>
           </a:p>
@@ -1210,10 +1201,9 @@
           <a:lstStyle/>
           <a:p>
             <a:r>
-              <a:rPr lang="ru-RU" smtClean="0"/>
+              <a:rPr lang="ru-RU"/>
               <a:t>Артём Макаров</a:t>
             </a:r>
-            <a:endParaRPr lang="ru-RU"/>
           </a:p>
         </p:txBody>
       </p:sp>
@@ -1286,10 +1276,9 @@
           <a:lstStyle/>
           <a:p>
             <a:r>
-              <a:rPr lang="ru-RU" smtClean="0"/>
+              <a:rPr lang="ru-RU"/>
               <a:t>Образец заголовка</a:t>
             </a:r>
-            <a:endParaRPr lang="ru-RU"/>
           </a:p>
         </p:txBody>
       </p:sp>
@@ -1310,38 +1299,37 @@
           <a:p>
             <a:pPr lvl="0"/>
             <a:r>
-              <a:rPr lang="ru-RU" dirty="0" smtClean="0"/>
+              <a:rPr lang="ru-RU" dirty="0"/>
               <a:t>Образец текста</a:t>
             </a:r>
           </a:p>
           <a:p>
             <a:pPr lvl="1"/>
             <a:r>
-              <a:rPr lang="ru-RU" dirty="0" smtClean="0"/>
+              <a:rPr lang="ru-RU" dirty="0"/>
               <a:t>Второй уровень</a:t>
             </a:r>
           </a:p>
           <a:p>
             <a:pPr lvl="2"/>
             <a:r>
-              <a:rPr lang="ru-RU" dirty="0" smtClean="0"/>
+              <a:rPr lang="ru-RU" dirty="0"/>
               <a:t>Третий уровень</a:t>
             </a:r>
           </a:p>
           <a:p>
             <a:pPr lvl="3"/>
             <a:r>
-              <a:rPr lang="ru-RU" dirty="0" smtClean="0"/>
+              <a:rPr lang="ru-RU" dirty="0"/>
               <a:t>Четвертый уровень</a:t>
             </a:r>
           </a:p>
           <a:p>
             <a:pPr lvl="4"/>
             <a:r>
-              <a:rPr lang="ru-RU" dirty="0" smtClean="0"/>
+              <a:rPr lang="ru-RU" dirty="0"/>
               <a:t>Пятый уровень</a:t>
             </a:r>
-            <a:endParaRPr lang="ru-RU" dirty="0"/>
           </a:p>
         </p:txBody>
       </p:sp>
@@ -1362,7 +1350,7 @@
           <a:p>
             <a:fld id="{C1A9A50B-C350-45F5-8AAB-ADB9E670AF2E}" type="datetime1">
               <a:rPr lang="ru-RU" smtClean="0"/>
-              <a:t>18.04.2024</a:t>
+              <a:t>22.05.2026</a:t>
             </a:fld>
             <a:endParaRPr lang="ru-RU"/>
           </a:p>
@@ -1384,10 +1372,9 @@
           <a:lstStyle/>
           <a:p>
             <a:r>
-              <a:rPr lang="ru-RU" smtClean="0"/>
+              <a:rPr lang="ru-RU"/>
               <a:t>Артём Макаров</a:t>
             </a:r>
-            <a:endParaRPr lang="ru-RU"/>
           </a:p>
         </p:txBody>
       </p:sp>
@@ -1469,10 +1456,9 @@
           </a:lstStyle>
           <a:p>
             <a:r>
-              <a:rPr lang="ru-RU" smtClean="0"/>
+              <a:rPr lang="ru-RU"/>
               <a:t>Образец заголовка</a:t>
             </a:r>
-            <a:endParaRPr lang="ru-RU"/>
           </a:p>
         </p:txBody>
       </p:sp>
@@ -1589,7 +1575,7 @@
           <a:p>
             <a:pPr lvl="0"/>
             <a:r>
-              <a:rPr lang="ru-RU" smtClean="0"/>
+              <a:rPr lang="ru-RU"/>
               <a:t>Образец текста</a:t>
             </a:r>
           </a:p>
@@ -1612,7 +1598,7 @@
           <a:p>
             <a:fld id="{089688C9-348F-42F9-B6C0-5990DDE0C5B2}" type="datetime1">
               <a:rPr lang="ru-RU" smtClean="0"/>
-              <a:t>18.04.2024</a:t>
+              <a:t>22.05.2026</a:t>
             </a:fld>
             <a:endParaRPr lang="ru-RU"/>
           </a:p>
@@ -1634,10 +1620,9 @@
           <a:lstStyle/>
           <a:p>
             <a:r>
-              <a:rPr lang="ru-RU" smtClean="0"/>
+              <a:rPr lang="ru-RU"/>
               <a:t>Артём Макаров</a:t>
             </a:r>
-            <a:endParaRPr lang="ru-RU"/>
           </a:p>
         </p:txBody>
       </p:sp>
@@ -1710,10 +1695,9 @@
           <a:lstStyle/>
           <a:p>
             <a:r>
-              <a:rPr lang="ru-RU" smtClean="0"/>
+              <a:rPr lang="ru-RU"/>
               <a:t>Образец заголовка</a:t>
             </a:r>
-            <a:endParaRPr lang="ru-RU"/>
           </a:p>
         </p:txBody>
       </p:sp>
@@ -1739,38 +1723,37 @@
           <a:p>
             <a:pPr lvl="0"/>
             <a:r>
-              <a:rPr lang="ru-RU" smtClean="0"/>
+              <a:rPr lang="ru-RU"/>
               <a:t>Образец текста</a:t>
             </a:r>
           </a:p>
           <a:p>
             <a:pPr lvl="1"/>
             <a:r>
-              <a:rPr lang="ru-RU" smtClean="0"/>
+              <a:rPr lang="ru-RU"/>
               <a:t>Второй уровень</a:t>
             </a:r>
           </a:p>
           <a:p>
             <a:pPr lvl="2"/>
             <a:r>
-              <a:rPr lang="ru-RU" smtClean="0"/>
+              <a:rPr lang="ru-RU"/>
               <a:t>Третий уровень</a:t>
             </a:r>
           </a:p>
           <a:p>
             <a:pPr lvl="3"/>
             <a:r>
-              <a:rPr lang="ru-RU" smtClean="0"/>
+              <a:rPr lang="ru-RU"/>
               <a:t>Четвертый уровень</a:t>
             </a:r>
           </a:p>
           <a:p>
             <a:pPr lvl="4"/>
             <a:r>
-              <a:rPr lang="ru-RU" smtClean="0"/>
+              <a:rPr lang="ru-RU"/>
               <a:t>Пятый уровень</a:t>
             </a:r>
-            <a:endParaRPr lang="ru-RU"/>
           </a:p>
         </p:txBody>
       </p:sp>
@@ -1796,38 +1779,37 @@
           <a:p>
             <a:pPr lvl="0"/>
             <a:r>
-              <a:rPr lang="ru-RU" smtClean="0"/>
+              <a:rPr lang="ru-RU"/>
               <a:t>Образец текста</a:t>
             </a:r>
           </a:p>
           <a:p>
             <a:pPr lvl="1"/>
             <a:r>
-              <a:rPr lang="ru-RU" smtClean="0"/>
+              <a:rPr lang="ru-RU"/>
               <a:t>Второй уровень</a:t>
             </a:r>
           </a:p>
           <a:p>
             <a:pPr lvl="2"/>
             <a:r>
-              <a:rPr lang="ru-RU" smtClean="0"/>
+              <a:rPr lang="ru-RU"/>
               <a:t>Третий уровень</a:t>
             </a:r>
           </a:p>
           <a:p>
             <a:pPr lvl="3"/>
             <a:r>
-              <a:rPr lang="ru-RU" smtClean="0"/>
+              <a:rPr lang="ru-RU"/>
               <a:t>Четвертый уровень</a:t>
             </a:r>
           </a:p>
           <a:p>
             <a:pPr lvl="4"/>
             <a:r>
-              <a:rPr lang="ru-RU" smtClean="0"/>
+              <a:rPr lang="ru-RU"/>
               <a:t>Пятый уровень</a:t>
             </a:r>
-            <a:endParaRPr lang="ru-RU"/>
           </a:p>
         </p:txBody>
       </p:sp>
@@ -1848,7 +1830,7 @@
           <a:p>
             <a:fld id="{684AFD8F-6DD9-4AD3-A505-FDC3F5C5F3F6}" type="datetime1">
               <a:rPr lang="ru-RU" smtClean="0"/>
-              <a:t>18.04.2024</a:t>
+              <a:t>22.05.2026</a:t>
             </a:fld>
             <a:endParaRPr lang="ru-RU"/>
           </a:p>
@@ -1870,10 +1852,9 @@
           <a:lstStyle/>
           <a:p>
             <a:r>
-              <a:rPr lang="ru-RU" smtClean="0"/>
+              <a:rPr lang="ru-RU"/>
               <a:t>Артём Макаров</a:t>
             </a:r>
-            <a:endParaRPr lang="ru-RU"/>
           </a:p>
         </p:txBody>
       </p:sp>
@@ -1951,10 +1932,9 @@
           <a:lstStyle/>
           <a:p>
             <a:r>
-              <a:rPr lang="ru-RU" smtClean="0"/>
+              <a:rPr lang="ru-RU"/>
               <a:t>Образец заголовка</a:t>
             </a:r>
-            <a:endParaRPr lang="ru-RU"/>
           </a:p>
         </p:txBody>
       </p:sp>
@@ -2017,7 +1997,7 @@
           <a:p>
             <a:pPr lvl="0"/>
             <a:r>
-              <a:rPr lang="ru-RU" dirty="0" smtClean="0"/>
+              <a:rPr lang="ru-RU" dirty="0"/>
               <a:t>Образец текста</a:t>
             </a:r>
           </a:p>
@@ -2045,38 +2025,37 @@
           <a:p>
             <a:pPr lvl="0"/>
             <a:r>
-              <a:rPr lang="ru-RU" dirty="0" smtClean="0"/>
+              <a:rPr lang="ru-RU" dirty="0"/>
               <a:t>Образец текста</a:t>
             </a:r>
           </a:p>
           <a:p>
             <a:pPr lvl="1"/>
             <a:r>
-              <a:rPr lang="ru-RU" dirty="0" smtClean="0"/>
+              <a:rPr lang="ru-RU" dirty="0"/>
               <a:t>Второй уровень</a:t>
             </a:r>
           </a:p>
           <a:p>
             <a:pPr lvl="2"/>
             <a:r>
-              <a:rPr lang="ru-RU" dirty="0" smtClean="0"/>
+              <a:rPr lang="ru-RU" dirty="0"/>
               <a:t>Третий уровень</a:t>
             </a:r>
           </a:p>
           <a:p>
             <a:pPr lvl="3"/>
             <a:r>
-              <a:rPr lang="ru-RU" dirty="0" smtClean="0"/>
+              <a:rPr lang="ru-RU" dirty="0"/>
               <a:t>Четвертый уровень</a:t>
             </a:r>
           </a:p>
           <a:p>
             <a:pPr lvl="4"/>
             <a:r>
-              <a:rPr lang="ru-RU" dirty="0" smtClean="0"/>
+              <a:rPr lang="ru-RU" dirty="0"/>
               <a:t>Пятый уровень</a:t>
             </a:r>
-            <a:endParaRPr lang="ru-RU" dirty="0"/>
           </a:p>
         </p:txBody>
       </p:sp>
@@ -2139,7 +2118,7 @@
           <a:p>
             <a:pPr lvl="0"/>
             <a:r>
-              <a:rPr lang="ru-RU" smtClean="0"/>
+              <a:rPr lang="ru-RU"/>
               <a:t>Образец текста</a:t>
             </a:r>
           </a:p>
@@ -2167,38 +2146,37 @@
           <a:p>
             <a:pPr lvl="0"/>
             <a:r>
-              <a:rPr lang="ru-RU" smtClean="0"/>
+              <a:rPr lang="ru-RU"/>
               <a:t>Образец текста</a:t>
             </a:r>
           </a:p>
           <a:p>
             <a:pPr lvl="1"/>
             <a:r>
-              <a:rPr lang="ru-RU" smtClean="0"/>
+              <a:rPr lang="ru-RU"/>
               <a:t>Второй уровень</a:t>
             </a:r>
           </a:p>
           <a:p>
             <a:pPr lvl="2"/>
             <a:r>
-              <a:rPr lang="ru-RU" smtClean="0"/>
+              <a:rPr lang="ru-RU"/>
               <a:t>Третий уровень</a:t>
             </a:r>
           </a:p>
           <a:p>
             <a:pPr lvl="3"/>
             <a:r>
-              <a:rPr lang="ru-RU" smtClean="0"/>
+              <a:rPr lang="ru-RU"/>
               <a:t>Четвертый уровень</a:t>
             </a:r>
           </a:p>
           <a:p>
             <a:pPr lvl="4"/>
             <a:r>
-              <a:rPr lang="ru-RU" smtClean="0"/>
+              <a:rPr lang="ru-RU"/>
               <a:t>Пятый уровень</a:t>
             </a:r>
-            <a:endParaRPr lang="ru-RU"/>
           </a:p>
         </p:txBody>
       </p:sp>
@@ -2219,7 +2197,7 @@
           <a:p>
             <a:fld id="{63551EFE-4D02-45EB-A747-8B6F047B5AA0}" type="datetime1">
               <a:rPr lang="ru-RU" smtClean="0"/>
-              <a:t>18.04.2024</a:t>
+              <a:t>22.05.2026</a:t>
             </a:fld>
             <a:endParaRPr lang="ru-RU"/>
           </a:p>
@@ -2241,10 +2219,9 @@
           <a:lstStyle/>
           <a:p>
             <a:r>
-              <a:rPr lang="ru-RU" smtClean="0"/>
+              <a:rPr lang="ru-RU"/>
               <a:t>Артём Макаров</a:t>
             </a:r>
-            <a:endParaRPr lang="ru-RU"/>
           </a:p>
         </p:txBody>
       </p:sp>
@@ -2317,10 +2294,9 @@
           <a:lstStyle/>
           <a:p>
             <a:r>
-              <a:rPr lang="ru-RU" smtClean="0"/>
+              <a:rPr lang="ru-RU"/>
               <a:t>Образец заголовка</a:t>
             </a:r>
-            <a:endParaRPr lang="ru-RU"/>
           </a:p>
         </p:txBody>
       </p:sp>
@@ -2341,7 +2317,7 @@
           <a:p>
             <a:fld id="{813A9F34-E5CD-4B8F-AA9E-889C84372B20}" type="datetime1">
               <a:rPr lang="ru-RU" smtClean="0"/>
-              <a:t>18.04.2024</a:t>
+              <a:t>22.05.2026</a:t>
             </a:fld>
             <a:endParaRPr lang="ru-RU"/>
           </a:p>
@@ -2363,10 +2339,9 @@
           <a:lstStyle/>
           <a:p>
             <a:r>
-              <a:rPr lang="ru-RU" smtClean="0"/>
+              <a:rPr lang="ru-RU"/>
               <a:t>Артём Макаров</a:t>
             </a:r>
-            <a:endParaRPr lang="ru-RU"/>
           </a:p>
         </p:txBody>
       </p:sp>
@@ -2440,7 +2415,7 @@
           <a:p>
             <a:fld id="{51224D22-9B29-44A6-8E82-95FC492DEDC1}" type="datetime1">
               <a:rPr lang="ru-RU" smtClean="0"/>
-              <a:t>18.04.2024</a:t>
+              <a:t>22.05.2026</a:t>
             </a:fld>
             <a:endParaRPr lang="ru-RU"/>
           </a:p>
@@ -2462,10 +2437,9 @@
           <a:lstStyle/>
           <a:p>
             <a:r>
-              <a:rPr lang="ru-RU" smtClean="0"/>
+              <a:rPr lang="ru-RU"/>
               <a:t>Артём Макаров</a:t>
             </a:r>
-            <a:endParaRPr lang="ru-RU"/>
           </a:p>
         </p:txBody>
       </p:sp>
@@ -2547,10 +2521,9 @@
           </a:lstStyle>
           <a:p>
             <a:r>
-              <a:rPr lang="ru-RU" smtClean="0"/>
+              <a:rPr lang="ru-RU"/>
               <a:t>Образец заголовка</a:t>
             </a:r>
-            <a:endParaRPr lang="ru-RU"/>
           </a:p>
         </p:txBody>
       </p:sp>
@@ -2604,38 +2577,37 @@
           <a:p>
             <a:pPr lvl="0"/>
             <a:r>
-              <a:rPr lang="ru-RU" smtClean="0"/>
+              <a:rPr lang="ru-RU"/>
               <a:t>Образец текста</a:t>
             </a:r>
           </a:p>
           <a:p>
             <a:pPr lvl="1"/>
             <a:r>
-              <a:rPr lang="ru-RU" smtClean="0"/>
+              <a:rPr lang="ru-RU"/>
               <a:t>Второй уровень</a:t>
             </a:r>
           </a:p>
           <a:p>
             <a:pPr lvl="2"/>
             <a:r>
-              <a:rPr lang="ru-RU" smtClean="0"/>
+              <a:rPr lang="ru-RU"/>
               <a:t>Третий уровень</a:t>
             </a:r>
           </a:p>
           <a:p>
             <a:pPr lvl="3"/>
             <a:r>
-              <a:rPr lang="ru-RU" smtClean="0"/>
+              <a:rPr lang="ru-RU"/>
               <a:t>Четвертый уровень</a:t>
             </a:r>
           </a:p>
           <a:p>
             <a:pPr lvl="4"/>
             <a:r>
-              <a:rPr lang="ru-RU" smtClean="0"/>
+              <a:rPr lang="ru-RU"/>
               <a:t>Пятый уровень</a:t>
             </a:r>
-            <a:endParaRPr lang="ru-RU"/>
           </a:p>
         </p:txBody>
       </p:sp>
@@ -2698,7 +2670,7 @@
           <a:p>
             <a:pPr lvl="0"/>
             <a:r>
-              <a:rPr lang="ru-RU" smtClean="0"/>
+              <a:rPr lang="ru-RU"/>
               <a:t>Образец текста</a:t>
             </a:r>
           </a:p>
@@ -2721,7 +2693,7 @@
           <a:p>
             <a:fld id="{91D1034F-4441-48A1-BDC0-25EA1022324A}" type="datetime1">
               <a:rPr lang="ru-RU" smtClean="0"/>
-              <a:t>18.04.2024</a:t>
+              <a:t>22.05.2026</a:t>
             </a:fld>
             <a:endParaRPr lang="ru-RU"/>
           </a:p>
@@ -2743,10 +2715,9 @@
           <a:lstStyle/>
           <a:p>
             <a:r>
-              <a:rPr lang="ru-RU" smtClean="0"/>
+              <a:rPr lang="ru-RU"/>
               <a:t>Артём Макаров</a:t>
             </a:r>
-            <a:endParaRPr lang="ru-RU"/>
           </a:p>
         </p:txBody>
       </p:sp>
@@ -2828,10 +2799,9 @@
           </a:lstStyle>
           <a:p>
             <a:r>
-              <a:rPr lang="ru-RU" smtClean="0"/>
+              <a:rPr lang="ru-RU"/>
               <a:t>Образец заголовка</a:t>
             </a:r>
-            <a:endParaRPr lang="ru-RU"/>
           </a:p>
         </p:txBody>
       </p:sp>
@@ -2955,7 +2925,7 @@
           <a:p>
             <a:pPr lvl="0"/>
             <a:r>
-              <a:rPr lang="ru-RU" smtClean="0"/>
+              <a:rPr lang="ru-RU"/>
               <a:t>Образец текста</a:t>
             </a:r>
           </a:p>
@@ -2978,7 +2948,7 @@
           <a:p>
             <a:fld id="{B0FFDE79-B627-473B-AE17-4C65BD2495F7}" type="datetime1">
               <a:rPr lang="ru-RU" smtClean="0"/>
-              <a:t>18.04.2024</a:t>
+              <a:t>22.05.2026</a:t>
             </a:fld>
             <a:endParaRPr lang="ru-RU"/>
           </a:p>
@@ -3000,10 +2970,9 @@
           <a:lstStyle/>
           <a:p>
             <a:r>
-              <a:rPr lang="ru-RU" smtClean="0"/>
+              <a:rPr lang="ru-RU"/>
               <a:t>Артём Макаров</a:t>
             </a:r>
-            <a:endParaRPr lang="ru-RU"/>
           </a:p>
         </p:txBody>
       </p:sp>
@@ -3091,10 +3060,9 @@
           <a:lstStyle/>
           <a:p>
             <a:r>
-              <a:rPr lang="ru-RU" dirty="0" smtClean="0"/>
+              <a:rPr lang="ru-RU" dirty="0"/>
               <a:t>Образец заголовка</a:t>
             </a:r>
-            <a:endParaRPr lang="ru-RU" dirty="0"/>
           </a:p>
         </p:txBody>
       </p:sp>
@@ -3125,38 +3093,37 @@
           <a:p>
             <a:pPr lvl="0"/>
             <a:r>
-              <a:rPr lang="ru-RU" dirty="0" smtClean="0"/>
+              <a:rPr lang="ru-RU" dirty="0"/>
               <a:t>Образец текста</a:t>
             </a:r>
           </a:p>
           <a:p>
             <a:pPr lvl="1"/>
             <a:r>
-              <a:rPr lang="ru-RU" dirty="0" smtClean="0"/>
+              <a:rPr lang="ru-RU" dirty="0"/>
               <a:t>Второй уровень</a:t>
             </a:r>
           </a:p>
           <a:p>
             <a:pPr lvl="2"/>
             <a:r>
-              <a:rPr lang="ru-RU" dirty="0" smtClean="0"/>
+              <a:rPr lang="ru-RU" dirty="0"/>
               <a:t>Третий уровень</a:t>
             </a:r>
           </a:p>
           <a:p>
             <a:pPr lvl="3"/>
             <a:r>
-              <a:rPr lang="ru-RU" dirty="0" smtClean="0"/>
+              <a:rPr lang="ru-RU" dirty="0"/>
               <a:t>Четвертый уровень</a:t>
             </a:r>
           </a:p>
           <a:p>
             <a:pPr lvl="4"/>
             <a:r>
-              <a:rPr lang="ru-RU" dirty="0" smtClean="0"/>
+              <a:rPr lang="ru-RU" dirty="0"/>
               <a:t>Пятый уровень</a:t>
             </a:r>
-            <a:endParaRPr lang="ru-RU" dirty="0"/>
           </a:p>
         </p:txBody>
       </p:sp>
@@ -3195,7 +3162,7 @@
           <a:p>
             <a:fld id="{11CA537A-1B8C-47BA-9BA6-7CE3FAFDA8BE}" type="datetime1">
               <a:rPr lang="ru-RU" smtClean="0"/>
-              <a:t>18.04.2024</a:t>
+              <a:t>22.05.2026</a:t>
             </a:fld>
             <a:endParaRPr lang="ru-RU"/>
           </a:p>
@@ -3235,10 +3202,9 @@
           </a:lstStyle>
           <a:p>
             <a:r>
-              <a:rPr lang="ru-RU" smtClean="0"/>
+              <a:rPr lang="ru-RU"/>
               <a:t>Артём Макаров</a:t>
             </a:r>
-            <a:endParaRPr lang="ru-RU"/>
           </a:p>
         </p:txBody>
       </p:sp>
@@ -3627,22 +3593,17 @@
           </a:bodyPr>
           <a:lstStyle/>
           <a:p>
-            <a:r>
-              <a:rPr lang="en-US" dirty="0" smtClean="0"/>
-              <a:t/>
-            </a:r>
             <a:br>
-              <a:rPr lang="en-US" dirty="0" smtClean="0"/>
+              <a:rPr lang="en-US" dirty="0"/>
             </a:br>
             <a:r>
-              <a:rPr lang="en-US" dirty="0" smtClean="0"/>
+              <a:rPr lang="en-US" dirty="0"/>
               <a:t> </a:t>
             </a:r>
             <a:r>
-              <a:rPr lang="ru-RU" dirty="0" smtClean="0"/>
+              <a:rPr lang="ru-RU" dirty="0"/>
               <a:t>Асимметричная криптография</a:t>
             </a:r>
-            <a:endParaRPr lang="ru-RU" dirty="0"/>
           </a:p>
         </p:txBody>
       </p:sp>
@@ -3667,18 +3628,18 @@
           <a:lstStyle/>
           <a:p>
             <a:r>
-              <a:rPr lang="ru-RU" dirty="0" smtClean="0"/>
+              <a:rPr lang="ru-RU" dirty="0"/>
               <a:t>Макаров Артём </a:t>
             </a:r>
           </a:p>
           <a:p>
             <a:r>
-              <a:rPr lang="ru-RU" dirty="0" smtClean="0"/>
+              <a:rPr lang="ru-RU" dirty="0"/>
               <a:t>МИФИ </a:t>
             </a:r>
             <a:r>
-              <a:rPr lang="en-US" dirty="0" smtClean="0"/>
-              <a:t>2020</a:t>
+              <a:rPr lang="en-US" dirty="0"/>
+              <a:t>2026</a:t>
             </a:r>
             <a:endParaRPr lang="ru-RU" dirty="0"/>
           </a:p>
@@ -3694,13 +3655,6 @@
   <p:clrMapOvr>
     <a:masterClrMapping/>
   </p:clrMapOvr>
-  <p:timing>
-    <p:tnLst>
-      <p:par>
-        <p:cTn id="1" dur="indefinite" restart="never" nodeType="tmRoot"/>
-      </p:par>
-    </p:tnLst>
-  </p:timing>
 </p:sld>
 </file>
 
@@ -3737,10 +3691,699 @@
           <a:lstStyle/>
           <a:p>
             <a:r>
-              <a:rPr lang="ru-RU" dirty="0" smtClean="0"/>
+              <a:rPr lang="ru-RU" dirty="0"/>
+              <a:t>Стойкость</a:t>
+            </a:r>
+          </a:p>
+        </p:txBody>
+      </p:sp>
+      <mc:AlternateContent xmlns:mc="http://schemas.openxmlformats.org/markup-compatibility/2006">
+        <mc:Choice xmlns:a14="http://schemas.microsoft.com/office/drawing/2010/main" Requires="a14">
+          <p:sp>
+            <p:nvSpPr>
+              <p:cNvPr id="3" name="Объект 2"/>
+              <p:cNvSpPr>
+                <a:spLocks noGrp="1"/>
+              </p:cNvSpPr>
+              <p:nvPr>
+                <p:ph idx="1"/>
+              </p:nvPr>
+            </p:nvSpPr>
+            <p:spPr/>
+            <p:txBody>
+              <a:bodyPr/>
+              <a:lstStyle/>
+              <a:p>
+                <a:pPr marL="0" indent="0">
+                  <a:buNone/>
+                </a:pPr>
+                <a:r>
+                  <a:rPr lang="ru-RU" dirty="0"/>
+                  <a:t>Противник видит </a:t>
+                </a:r>
+                <a14:m>
+                  <m:oMath xmlns:m="http://schemas.openxmlformats.org/officeDocument/2006/math">
+                    <m:r>
+                      <a:rPr lang="en-US" b="0" i="1" smtClean="0">
+                        <a:latin typeface="Cambria Math" panose="02040503050406030204" pitchFamily="18" charset="0"/>
+                      </a:rPr>
+                      <m:t>𝑝</m:t>
+                    </m:r>
+                    <m:r>
+                      <a:rPr lang="en-US" b="0" i="1" smtClean="0">
+                        <a:latin typeface="Cambria Math" panose="02040503050406030204" pitchFamily="18" charset="0"/>
+                      </a:rPr>
+                      <m:t>, </m:t>
+                    </m:r>
+                    <m:r>
+                      <a:rPr lang="en-US" b="0" i="1" smtClean="0">
+                        <a:latin typeface="Cambria Math" panose="02040503050406030204" pitchFamily="18" charset="0"/>
+                      </a:rPr>
+                      <m:t>𝑔</m:t>
+                    </m:r>
+                    <m:r>
+                      <a:rPr lang="en-US" b="0" i="1" smtClean="0">
+                        <a:latin typeface="Cambria Math" panose="02040503050406030204" pitchFamily="18" charset="0"/>
+                      </a:rPr>
+                      <m:t>, </m:t>
+                    </m:r>
+                    <m:r>
+                      <a:rPr lang="en-US" b="0" i="1" smtClean="0">
+                        <a:latin typeface="Cambria Math" panose="02040503050406030204" pitchFamily="18" charset="0"/>
+                      </a:rPr>
+                      <m:t>𝐴</m:t>
+                    </m:r>
+                    <m:r>
+                      <a:rPr lang="en-US" b="0" i="1" smtClean="0">
+                        <a:latin typeface="Cambria Math" panose="02040503050406030204" pitchFamily="18" charset="0"/>
+                      </a:rPr>
+                      <m:t>=</m:t>
+                    </m:r>
+                    <m:sSup>
+                      <m:sSupPr>
+                        <m:ctrlPr>
+                          <a:rPr lang="en-US" b="0" i="1" smtClean="0">
+                            <a:latin typeface="Cambria Math" panose="02040503050406030204" pitchFamily="18" charset="0"/>
+                          </a:rPr>
+                        </m:ctrlPr>
+                      </m:sSupPr>
+                      <m:e>
+                        <m:r>
+                          <a:rPr lang="en-US" b="0" i="1" smtClean="0">
+                            <a:latin typeface="Cambria Math" panose="02040503050406030204" pitchFamily="18" charset="0"/>
+                          </a:rPr>
+                          <m:t>𝑔</m:t>
+                        </m:r>
+                      </m:e>
+                      <m:sup>
+                        <m:r>
+                          <a:rPr lang="en-US" b="0" i="1" smtClean="0">
+                            <a:latin typeface="Cambria Math" panose="02040503050406030204" pitchFamily="18" charset="0"/>
+                          </a:rPr>
+                          <m:t>𝑎</m:t>
+                        </m:r>
+                      </m:sup>
+                    </m:sSup>
+                    <m:d>
+                      <m:dPr>
+                        <m:ctrlPr>
+                          <a:rPr lang="en-US" b="0" i="1" smtClean="0">
+                            <a:latin typeface="Cambria Math" panose="02040503050406030204" pitchFamily="18" charset="0"/>
+                          </a:rPr>
+                        </m:ctrlPr>
+                      </m:dPr>
+                      <m:e>
+                        <m:r>
+                          <m:rPr>
+                            <m:sty m:val="p"/>
+                          </m:rPr>
+                          <a:rPr lang="en-US" b="0" i="0" smtClean="0">
+                            <a:latin typeface="Cambria Math" panose="02040503050406030204" pitchFamily="18" charset="0"/>
+                          </a:rPr>
+                          <m:t>mod</m:t>
+                        </m:r>
+                        <m:r>
+                          <a:rPr lang="en-US" b="0" i="1" smtClean="0">
+                            <a:latin typeface="Cambria Math" panose="02040503050406030204" pitchFamily="18" charset="0"/>
+                          </a:rPr>
+                          <m:t> </m:t>
+                        </m:r>
+                        <m:r>
+                          <a:rPr lang="en-US" b="0" i="1" smtClean="0">
+                            <a:latin typeface="Cambria Math" panose="02040503050406030204" pitchFamily="18" charset="0"/>
+                          </a:rPr>
+                          <m:t>𝑝</m:t>
+                        </m:r>
+                      </m:e>
+                    </m:d>
+                    <m:r>
+                      <a:rPr lang="en-US" b="0" i="1" smtClean="0">
+                        <a:latin typeface="Cambria Math" panose="02040503050406030204" pitchFamily="18" charset="0"/>
+                      </a:rPr>
+                      <m:t>, </m:t>
+                    </m:r>
+                    <m:r>
+                      <a:rPr lang="en-US" b="0" i="1" smtClean="0">
+                        <a:latin typeface="Cambria Math" panose="02040503050406030204" pitchFamily="18" charset="0"/>
+                      </a:rPr>
+                      <m:t>𝐵</m:t>
+                    </m:r>
+                    <m:r>
+                      <a:rPr lang="en-US" b="0" i="1" smtClean="0">
+                        <a:latin typeface="Cambria Math" panose="02040503050406030204" pitchFamily="18" charset="0"/>
+                      </a:rPr>
+                      <m:t>=</m:t>
+                    </m:r>
+                    <m:sSup>
+                      <m:sSupPr>
+                        <m:ctrlPr>
+                          <a:rPr lang="en-US" b="0" i="1" smtClean="0">
+                            <a:latin typeface="Cambria Math" panose="02040503050406030204" pitchFamily="18" charset="0"/>
+                          </a:rPr>
+                        </m:ctrlPr>
+                      </m:sSupPr>
+                      <m:e>
+                        <m:r>
+                          <a:rPr lang="en-US" b="0" i="1" smtClean="0">
+                            <a:latin typeface="Cambria Math" panose="02040503050406030204" pitchFamily="18" charset="0"/>
+                          </a:rPr>
+                          <m:t>𝑔</m:t>
+                        </m:r>
+                      </m:e>
+                      <m:sup>
+                        <m:r>
+                          <a:rPr lang="en-US" b="0" i="1" smtClean="0">
+                            <a:latin typeface="Cambria Math" panose="02040503050406030204" pitchFamily="18" charset="0"/>
+                          </a:rPr>
+                          <m:t>𝑏</m:t>
+                        </m:r>
+                      </m:sup>
+                    </m:sSup>
+                    <m:r>
+                      <a:rPr lang="en-US" b="0" i="1" smtClean="0">
+                        <a:latin typeface="Cambria Math" panose="02040503050406030204" pitchFamily="18" charset="0"/>
+                      </a:rPr>
+                      <m:t>(</m:t>
+                    </m:r>
+                    <m:r>
+                      <m:rPr>
+                        <m:sty m:val="p"/>
+                      </m:rPr>
+                      <a:rPr lang="en-US" b="0" i="0" smtClean="0">
+                        <a:latin typeface="Cambria Math" panose="02040503050406030204" pitchFamily="18" charset="0"/>
+                      </a:rPr>
+                      <m:t>mod</m:t>
+                    </m:r>
+                    <m:r>
+                      <a:rPr lang="en-US" b="0" i="1" smtClean="0">
+                        <a:latin typeface="Cambria Math" panose="02040503050406030204" pitchFamily="18" charset="0"/>
+                      </a:rPr>
+                      <m:t> </m:t>
+                    </m:r>
+                    <m:r>
+                      <a:rPr lang="en-US" b="0" i="1" smtClean="0">
+                        <a:latin typeface="Cambria Math" panose="02040503050406030204" pitchFamily="18" charset="0"/>
+                      </a:rPr>
+                      <m:t>𝑝</m:t>
+                    </m:r>
+                    <m:r>
+                      <a:rPr lang="en-US" b="0" i="1" smtClean="0">
+                        <a:latin typeface="Cambria Math" panose="02040503050406030204" pitchFamily="18" charset="0"/>
+                      </a:rPr>
+                      <m:t>)</m:t>
+                    </m:r>
+                  </m:oMath>
+                </a14:m>
+                <a:endParaRPr lang="ru-RU" dirty="0"/>
+              </a:p>
+              <a:p>
+                <a:pPr marL="0" indent="0">
+                  <a:buNone/>
+                </a:pPr>
+                <a:r>
+                  <a:rPr lang="ru-RU" dirty="0"/>
+                  <a:t>Противник хочет вычислить </a:t>
+                </a:r>
+                <a14:m>
+                  <m:oMath xmlns:m="http://schemas.openxmlformats.org/officeDocument/2006/math">
+                    <m:sSup>
+                      <m:sSupPr>
+                        <m:ctrlPr>
+                          <a:rPr lang="en-US" b="0" i="1" smtClean="0">
+                            <a:latin typeface="Cambria Math" panose="02040503050406030204" pitchFamily="18" charset="0"/>
+                          </a:rPr>
+                        </m:ctrlPr>
+                      </m:sSupPr>
+                      <m:e>
+                        <m:r>
+                          <a:rPr lang="en-US" b="0" i="1" smtClean="0">
+                            <a:latin typeface="Cambria Math" panose="02040503050406030204" pitchFamily="18" charset="0"/>
+                          </a:rPr>
+                          <m:t>𝑔</m:t>
+                        </m:r>
+                      </m:e>
+                      <m:sup>
+                        <m:r>
+                          <a:rPr lang="en-US" b="0" i="1" smtClean="0">
+                            <a:latin typeface="Cambria Math" panose="02040503050406030204" pitchFamily="18" charset="0"/>
+                          </a:rPr>
+                          <m:t>𝑎𝑏</m:t>
+                        </m:r>
+                      </m:sup>
+                    </m:sSup>
+                    <m:r>
+                      <a:rPr lang="en-US" b="0" i="1" smtClean="0">
+                        <a:latin typeface="Cambria Math" panose="02040503050406030204" pitchFamily="18" charset="0"/>
+                      </a:rPr>
+                      <m:t>(</m:t>
+                    </m:r>
+                    <m:r>
+                      <m:rPr>
+                        <m:sty m:val="p"/>
+                      </m:rPr>
+                      <a:rPr lang="en-US" b="0" i="0" smtClean="0">
+                        <a:latin typeface="Cambria Math" panose="02040503050406030204" pitchFamily="18" charset="0"/>
+                      </a:rPr>
+                      <m:t>mod</m:t>
+                    </m:r>
+                    <m:r>
+                      <a:rPr lang="en-US" b="0" i="1" smtClean="0">
+                        <a:latin typeface="Cambria Math" panose="02040503050406030204" pitchFamily="18" charset="0"/>
+                      </a:rPr>
+                      <m:t> </m:t>
+                    </m:r>
+                    <m:r>
+                      <a:rPr lang="en-US" b="0" i="1" smtClean="0">
+                        <a:latin typeface="Cambria Math" panose="02040503050406030204" pitchFamily="18" charset="0"/>
+                      </a:rPr>
+                      <m:t>𝑝</m:t>
+                    </m:r>
+                    <m:r>
+                      <a:rPr lang="en-US" b="0" i="1" smtClean="0">
+                        <a:latin typeface="Cambria Math" panose="02040503050406030204" pitchFamily="18" charset="0"/>
+                      </a:rPr>
+                      <m:t>)</m:t>
+                    </m:r>
+                  </m:oMath>
+                </a14:m>
+                <a:endParaRPr lang="ru-RU" dirty="0"/>
+              </a:p>
+              <a:p>
+                <a:pPr marL="0" indent="0">
+                  <a:buNone/>
+                </a:pPr>
+                <a:r>
+                  <a:rPr lang="ru-RU" dirty="0"/>
+                  <a:t>Пусть </a:t>
+                </a:r>
+                <a14:m>
+                  <m:oMath xmlns:m="http://schemas.openxmlformats.org/officeDocument/2006/math">
+                    <m:r>
+                      <a:rPr lang="en-US" b="0" i="1" smtClean="0">
+                        <a:latin typeface="Cambria Math" panose="02040503050406030204" pitchFamily="18" charset="0"/>
+                      </a:rPr>
+                      <m:t>𝐷</m:t>
+                    </m:r>
+                    <m:sSub>
+                      <m:sSubPr>
+                        <m:ctrlPr>
+                          <a:rPr lang="en-US" b="0" i="1" smtClean="0">
+                            <a:latin typeface="Cambria Math" panose="02040503050406030204" pitchFamily="18" charset="0"/>
+                          </a:rPr>
+                        </m:ctrlPr>
+                      </m:sSubPr>
+                      <m:e>
+                        <m:r>
+                          <a:rPr lang="en-US" b="0" i="1" smtClean="0">
+                            <a:latin typeface="Cambria Math" panose="02040503050406030204" pitchFamily="18" charset="0"/>
+                          </a:rPr>
+                          <m:t>𝐻</m:t>
+                        </m:r>
+                      </m:e>
+                      <m:sub>
+                        <m:r>
+                          <a:rPr lang="en-US" b="0" i="1" smtClean="0">
+                            <a:latin typeface="Cambria Math" panose="02040503050406030204" pitchFamily="18" charset="0"/>
+                          </a:rPr>
+                          <m:t>𝑔</m:t>
+                        </m:r>
+                      </m:sub>
+                    </m:sSub>
+                    <m:d>
+                      <m:dPr>
+                        <m:ctrlPr>
+                          <a:rPr lang="en-US" b="0" i="1" smtClean="0">
+                            <a:latin typeface="Cambria Math" panose="02040503050406030204" pitchFamily="18" charset="0"/>
+                          </a:rPr>
+                        </m:ctrlPr>
+                      </m:dPr>
+                      <m:e>
+                        <m:sSup>
+                          <m:sSupPr>
+                            <m:ctrlPr>
+                              <a:rPr lang="en-US" b="0" i="1" smtClean="0">
+                                <a:latin typeface="Cambria Math" panose="02040503050406030204" pitchFamily="18" charset="0"/>
+                              </a:rPr>
+                            </m:ctrlPr>
+                          </m:sSupPr>
+                          <m:e>
+                            <m:r>
+                              <a:rPr lang="en-US" b="0" i="1" smtClean="0">
+                                <a:latin typeface="Cambria Math" panose="02040503050406030204" pitchFamily="18" charset="0"/>
+                              </a:rPr>
+                              <m:t>𝑔</m:t>
+                            </m:r>
+                          </m:e>
+                          <m:sup>
+                            <m:r>
+                              <a:rPr lang="en-US" b="0" i="1" smtClean="0">
+                                <a:latin typeface="Cambria Math" panose="02040503050406030204" pitchFamily="18" charset="0"/>
+                              </a:rPr>
+                              <m:t>𝑎</m:t>
+                            </m:r>
+                          </m:sup>
+                        </m:sSup>
+                        <m:r>
+                          <a:rPr lang="en-US" b="0" i="1" smtClean="0">
+                            <a:latin typeface="Cambria Math" panose="02040503050406030204" pitchFamily="18" charset="0"/>
+                          </a:rPr>
+                          <m:t>,</m:t>
+                        </m:r>
+                        <m:sSup>
+                          <m:sSupPr>
+                            <m:ctrlPr>
+                              <a:rPr lang="en-US" b="0" i="1" smtClean="0">
+                                <a:latin typeface="Cambria Math" panose="02040503050406030204" pitchFamily="18" charset="0"/>
+                              </a:rPr>
+                            </m:ctrlPr>
+                          </m:sSupPr>
+                          <m:e>
+                            <m:r>
+                              <a:rPr lang="en-US" b="0" i="1" smtClean="0">
+                                <a:latin typeface="Cambria Math" panose="02040503050406030204" pitchFamily="18" charset="0"/>
+                              </a:rPr>
+                              <m:t>𝑔</m:t>
+                            </m:r>
+                          </m:e>
+                          <m:sup>
+                            <m:r>
+                              <a:rPr lang="en-US" b="0" i="1" smtClean="0">
+                                <a:latin typeface="Cambria Math" panose="02040503050406030204" pitchFamily="18" charset="0"/>
+                              </a:rPr>
+                              <m:t>𝑏</m:t>
+                            </m:r>
+                          </m:sup>
+                        </m:sSup>
+                      </m:e>
+                    </m:d>
+                    <m:r>
+                      <a:rPr lang="en-US" b="0" i="1" smtClean="0">
+                        <a:latin typeface="Cambria Math" panose="02040503050406030204" pitchFamily="18" charset="0"/>
+                      </a:rPr>
+                      <m:t>=</m:t>
+                    </m:r>
+                    <m:sSup>
+                      <m:sSupPr>
+                        <m:ctrlPr>
+                          <a:rPr lang="en-US" b="0" i="1" smtClean="0">
+                            <a:latin typeface="Cambria Math" panose="02040503050406030204" pitchFamily="18" charset="0"/>
+                          </a:rPr>
+                        </m:ctrlPr>
+                      </m:sSupPr>
+                      <m:e>
+                        <m:r>
+                          <a:rPr lang="en-US" b="0" i="1" smtClean="0">
+                            <a:latin typeface="Cambria Math" panose="02040503050406030204" pitchFamily="18" charset="0"/>
+                          </a:rPr>
+                          <m:t>𝑔</m:t>
+                        </m:r>
+                      </m:e>
+                      <m:sup>
+                        <m:r>
+                          <a:rPr lang="en-US" b="0" i="1" smtClean="0">
+                            <a:latin typeface="Cambria Math" panose="02040503050406030204" pitchFamily="18" charset="0"/>
+                          </a:rPr>
+                          <m:t>𝑎𝑏</m:t>
+                        </m:r>
+                      </m:sup>
+                    </m:sSup>
+                  </m:oMath>
+                </a14:m>
+                <a:r>
+                  <a:rPr lang="ru-RU" dirty="0"/>
+                  <a:t>. Насколько сложно вычисление </a:t>
+                </a:r>
+                <a14:m>
+                  <m:oMath xmlns:m="http://schemas.openxmlformats.org/officeDocument/2006/math">
+                    <m:r>
+                      <a:rPr lang="en-US" b="0" i="1" smtClean="0">
+                        <a:latin typeface="Cambria Math" panose="02040503050406030204" pitchFamily="18" charset="0"/>
+                      </a:rPr>
+                      <m:t>𝐷𝐻</m:t>
+                    </m:r>
+                    <m:r>
+                      <a:rPr lang="ru-RU" b="0" i="0" smtClean="0">
+                        <a:latin typeface="Cambria Math" panose="02040503050406030204" pitchFamily="18" charset="0"/>
+                      </a:rPr>
+                      <m:t>?</m:t>
+                    </m:r>
+                  </m:oMath>
+                </a14:m>
+                <a:endParaRPr lang="ru-RU" dirty="0"/>
+              </a:p>
+              <a:p>
+                <a:pPr marL="0" indent="0">
+                  <a:buNone/>
+                </a:pPr>
+                <a14:m>
+                  <m:oMath xmlns:m="http://schemas.openxmlformats.org/officeDocument/2006/math">
+                    <m:r>
+                      <a:rPr lang="en-US" b="0" i="1" smtClean="0">
+                        <a:latin typeface="Cambria Math" panose="02040503050406030204" pitchFamily="18" charset="0"/>
+                      </a:rPr>
+                      <m:t>𝑇</m:t>
+                    </m:r>
+                    <m:d>
+                      <m:dPr>
+                        <m:ctrlPr>
+                          <a:rPr lang="en-US" b="0" i="1" smtClean="0">
+                            <a:latin typeface="Cambria Math" panose="02040503050406030204" pitchFamily="18" charset="0"/>
+                          </a:rPr>
+                        </m:ctrlPr>
+                      </m:dPr>
+                      <m:e>
+                        <m:r>
+                          <a:rPr lang="en-US" b="0" i="1" smtClean="0">
+                            <a:latin typeface="Cambria Math" panose="02040503050406030204" pitchFamily="18" charset="0"/>
+                          </a:rPr>
+                          <m:t>𝐷𝐻</m:t>
+                        </m:r>
+                      </m:e>
+                    </m:d>
+                    <m:r>
+                      <a:rPr lang="en-US" b="0" i="1" smtClean="0">
+                        <a:latin typeface="Cambria Math" panose="02040503050406030204" pitchFamily="18" charset="0"/>
+                      </a:rPr>
+                      <m:t>=</m:t>
+                    </m:r>
+                    <m:r>
+                      <m:rPr>
+                        <m:sty m:val="p"/>
+                      </m:rPr>
+                      <a:rPr lang="en-US" b="0" i="0" smtClean="0">
+                        <a:latin typeface="Cambria Math" panose="02040503050406030204" pitchFamily="18" charset="0"/>
+                      </a:rPr>
+                      <m:t>exp</m:t>
+                    </m:r>
+                    <m:r>
+                      <a:rPr lang="en-US" b="0" i="1" smtClean="0">
+                        <a:latin typeface="Cambria Math" panose="02040503050406030204" pitchFamily="18" charset="0"/>
+                      </a:rPr>
+                      <m:t>⁡(</m:t>
+                    </m:r>
+                    <m:r>
+                      <a:rPr lang="en-US" b="0" i="1" smtClean="0">
+                        <a:latin typeface="Cambria Math" panose="02040503050406030204" pitchFamily="18" charset="0"/>
+                      </a:rPr>
+                      <m:t>𝑂</m:t>
+                    </m:r>
+                    <m:sSup>
+                      <m:sSupPr>
+                        <m:ctrlPr>
+                          <a:rPr lang="en-US" b="0" i="1" smtClean="0">
+                            <a:latin typeface="Cambria Math" panose="02040503050406030204" pitchFamily="18" charset="0"/>
+                          </a:rPr>
+                        </m:ctrlPr>
+                      </m:sSupPr>
+                      <m:e>
+                        <m:r>
+                          <a:rPr lang="en-US" b="0" i="1" smtClean="0">
+                            <a:latin typeface="Cambria Math" panose="02040503050406030204" pitchFamily="18" charset="0"/>
+                          </a:rPr>
+                          <m:t>(</m:t>
+                        </m:r>
+                        <m:r>
+                          <a:rPr lang="en-US" b="0" i="1" smtClean="0">
+                            <a:latin typeface="Cambria Math" panose="02040503050406030204" pitchFamily="18" charset="0"/>
+                          </a:rPr>
+                          <m:t>𝑛</m:t>
+                        </m:r>
+                      </m:e>
+                      <m:sup>
+                        <m:f>
+                          <m:fPr>
+                            <m:ctrlPr>
+                              <a:rPr lang="en-US" b="0" i="1" smtClean="0">
+                                <a:latin typeface="Cambria Math" panose="02040503050406030204" pitchFamily="18" charset="0"/>
+                              </a:rPr>
+                            </m:ctrlPr>
+                          </m:fPr>
+                          <m:num>
+                            <m:r>
+                              <a:rPr lang="en-US" b="0" i="1" smtClean="0">
+                                <a:latin typeface="Cambria Math" panose="02040503050406030204" pitchFamily="18" charset="0"/>
+                              </a:rPr>
+                              <m:t>1</m:t>
+                            </m:r>
+                          </m:num>
+                          <m:den>
+                            <m:r>
+                              <a:rPr lang="en-US" b="0" i="1" smtClean="0">
+                                <a:latin typeface="Cambria Math" panose="02040503050406030204" pitchFamily="18" charset="0"/>
+                              </a:rPr>
+                              <m:t>3</m:t>
+                            </m:r>
+                          </m:den>
+                        </m:f>
+                      </m:sup>
+                    </m:sSup>
+                    <m:r>
+                      <a:rPr lang="en-US" b="0" i="1" smtClean="0">
+                        <a:latin typeface="Cambria Math" panose="02040503050406030204" pitchFamily="18" charset="0"/>
+                      </a:rPr>
+                      <m:t>))</m:t>
+                    </m:r>
+                  </m:oMath>
+                </a14:m>
+                <a:r>
+                  <a:rPr lang="en-US" dirty="0"/>
+                  <a:t>.</a:t>
+                </a:r>
+                <a:endParaRPr lang="ru-RU" dirty="0"/>
+              </a:p>
+            </p:txBody>
+          </p:sp>
+        </mc:Choice>
+        <mc:Fallback>
+          <p:sp>
+            <p:nvSpPr>
+              <p:cNvPr id="3" name="Объект 2"/>
+              <p:cNvSpPr>
+                <a:spLocks noGrp="1" noRot="1" noChangeAspect="1" noMove="1" noResize="1" noEditPoints="1" noAdjustHandles="1" noChangeArrowheads="1" noChangeShapeType="1" noTextEdit="1"/>
+              </p:cNvSpPr>
+              <p:nvPr>
+                <p:ph idx="1"/>
+              </p:nvPr>
+            </p:nvSpPr>
+            <p:spPr>
+              <a:blipFill>
+                <a:blip r:embed="rId2"/>
+                <a:stretch>
+                  <a:fillRect l="-1043" t="-1821"/>
+                </a:stretch>
+              </a:blipFill>
+            </p:spPr>
+            <p:txBody>
+              <a:bodyPr/>
+              <a:lstStyle/>
+              <a:p>
+                <a:r>
+                  <a:rPr lang="ru-RU">
+                    <a:noFill/>
+                  </a:rPr>
+                  <a:t> </a:t>
+                </a:r>
+              </a:p>
+            </p:txBody>
+          </p:sp>
+        </mc:Fallback>
+      </mc:AlternateContent>
+      <p:sp>
+        <p:nvSpPr>
+          <p:cNvPr id="4" name="Номер слайда 3"/>
+          <p:cNvSpPr>
+            <a:spLocks noGrp="1"/>
+          </p:cNvSpPr>
+          <p:nvPr>
+            <p:ph type="sldNum" sz="quarter" idx="12"/>
+          </p:nvPr>
+        </p:nvSpPr>
+        <p:spPr/>
+        <p:txBody>
+          <a:bodyPr/>
+          <a:lstStyle/>
+          <a:p>
+            <a:fld id="{8253DDDB-F8F7-4D64-A7FD-3F3D61C1949F}" type="slidenum">
+              <a:rPr lang="ru-RU" smtClean="0"/>
+              <a:t>10</a:t>
+            </a:fld>
+            <a:endParaRPr lang="ru-RU"/>
+          </a:p>
+        </p:txBody>
+      </p:sp>
+      <p:pic>
+        <p:nvPicPr>
+          <p:cNvPr id="5" name="Рисунок 4"/>
+          <p:cNvPicPr>
+            <a:picLocks noChangeAspect="1"/>
+          </p:cNvPicPr>
+          <p:nvPr/>
+        </p:nvPicPr>
+        <p:blipFill>
+          <a:blip r:embed="rId3"/>
+          <a:stretch>
+            <a:fillRect/>
+          </a:stretch>
+        </p:blipFill>
+        <p:spPr>
+          <a:xfrm>
+            <a:off x="1778244" y="4001294"/>
+            <a:ext cx="8020050" cy="2647950"/>
+          </a:xfrm>
+          <a:prstGeom prst="rect">
+            <a:avLst/>
+          </a:prstGeom>
+        </p:spPr>
+      </p:pic>
+    </p:spTree>
+    <p:extLst>
+      <p:ext uri="{BB962C8B-B14F-4D97-AF65-F5344CB8AC3E}">
+        <p14:creationId xmlns:p14="http://schemas.microsoft.com/office/powerpoint/2010/main" val="2076431824"/>
+      </p:ext>
+    </p:extLst>
+  </p:cSld>
+  <p:clrMapOvr>
+    <a:masterClrMapping/>
+  </p:clrMapOvr>
+</p:sld>
+</file>
+
+<file path=ppt/slides/slide11.xml><?xml version="1.0" encoding="utf-8"?>
+<p:sld xmlns:a="http://schemas.openxmlformats.org/drawingml/2006/main" xmlns:r="http://schemas.openxmlformats.org/officeDocument/2006/relationships" xmlns:p="http://schemas.openxmlformats.org/presentationml/2006/main">
+  <p:cSld>
+    <p:spTree>
+      <p:nvGrpSpPr>
+        <p:cNvPr id="1" name=""/>
+        <p:cNvGrpSpPr/>
+        <p:nvPr/>
+      </p:nvGrpSpPr>
+      <p:grpSpPr>
+        <a:xfrm>
+          <a:off x="0" y="0"/>
+          <a:ext cx="0" cy="0"/>
+          <a:chOff x="0" y="0"/>
+          <a:chExt cx="0" cy="0"/>
+        </a:xfrm>
+      </p:grpSpPr>
+      <p:sp>
+        <p:nvSpPr>
+          <p:cNvPr id="2" name="Заголовок 1"/>
+          <p:cNvSpPr>
+            <a:spLocks noGrp="1"/>
+          </p:cNvSpPr>
+          <p:nvPr>
+            <p:ph type="title"/>
+          </p:nvPr>
+        </p:nvSpPr>
+        <p:spPr/>
+        <p:txBody>
+          <a:bodyPr/>
+          <a:lstStyle/>
+          <a:p>
+            <a:r>
+              <a:rPr lang="ru-RU" dirty="0"/>
               <a:t>Отсутствие стойкости против активных противников</a:t>
             </a:r>
-            <a:endParaRPr lang="ru-RU" dirty="0"/>
           </a:p>
         </p:txBody>
       </p:sp>
@@ -3765,21 +4408,21 @@
           <a:lstStyle/>
           <a:p>
             <a:r>
-              <a:rPr lang="ru-RU" dirty="0" smtClean="0"/>
+              <a:rPr lang="ru-RU" dirty="0"/>
               <a:t>Протокол не гарантирует аутентичности, т.е. вы не знаете, с кем согласовали ключ.</a:t>
             </a:r>
           </a:p>
           <a:p>
             <a:r>
-              <a:rPr lang="ru-RU" dirty="0" smtClean="0"/>
+              <a:rPr lang="ru-RU" dirty="0"/>
               <a:t>Возможны атаки типа человек в середине (</a:t>
             </a:r>
             <a:r>
-              <a:rPr lang="en-US" dirty="0" err="1" smtClean="0"/>
+              <a:rPr lang="en-US" dirty="0" err="1"/>
               <a:t>MiTM</a:t>
             </a:r>
             <a:r>
-              <a:rPr lang="en-US" dirty="0" smtClean="0"/>
+              <a:rPr lang="en-US" dirty="0"/>
               <a:t> – man in the middle)</a:t>
             </a:r>
             <a:endParaRPr lang="ru-RU" dirty="0"/>
@@ -3803,7 +4446,7 @@
           <a:p>
             <a:fld id="{8253DDDB-F8F7-4D64-A7FD-3F3D61C1949F}" type="slidenum">
               <a:rPr lang="ru-RU" smtClean="0"/>
-              <a:t>10</a:t>
+              <a:t>11</a:t>
             </a:fld>
             <a:endParaRPr lang="ru-RU"/>
           </a:p>
@@ -3852,10 +4495,9 @@
           <a:p>
             <a:pPr algn="ctr"/>
             <a:r>
-              <a:rPr lang="en-US" sz="2400" dirty="0" smtClean="0"/>
+              <a:rPr lang="en-US" sz="2400" dirty="0"/>
               <a:t>Eve</a:t>
             </a:r>
-            <a:endParaRPr lang="en-US" sz="2400" dirty="0"/>
           </a:p>
         </p:txBody>
       </p:sp>
@@ -3894,10 +4536,9 @@
           <a:p>
             <a:pPr algn="ctr"/>
             <a:r>
-              <a:rPr lang="en-US" sz="2400" dirty="0" smtClean="0"/>
+              <a:rPr lang="en-US" sz="2400" dirty="0"/>
               <a:t>Alice</a:t>
             </a:r>
-            <a:endParaRPr lang="en-US" sz="2400" dirty="0"/>
           </a:p>
         </p:txBody>
       </p:sp>
@@ -4005,10 +4646,9 @@
           <a:p>
             <a:pPr algn="ctr"/>
             <a:r>
-              <a:rPr lang="en-US" sz="2400" dirty="0" smtClean="0"/>
+              <a:rPr lang="en-US" sz="2400" dirty="0"/>
               <a:t>Bob</a:t>
             </a:r>
-            <a:endParaRPr lang="en-US" sz="2400" dirty="0"/>
           </a:p>
         </p:txBody>
       </p:sp>
@@ -4956,7 +5596,7 @@
                     </m:oMath>
                   </m:oMathPara>
                 </a14:m>
-                <a:endParaRPr lang="en-US" dirty="0" smtClean="0"/>
+                <a:endParaRPr lang="en-US" dirty="0"/>
               </a:p>
               <a:p>
                 <a:pPr/>
@@ -5543,17 +6183,10 @@
   <p:clrMapOvr>
     <a:masterClrMapping/>
   </p:clrMapOvr>
-  <p:timing>
-    <p:tnLst>
-      <p:par>
-        <p:cTn id="1" dur="indefinite" restart="never" nodeType="tmRoot"/>
-      </p:par>
-    </p:tnLst>
-  </p:timing>
 </p:sld>
 </file>
 
-<file path=ppt/slides/slide11.xml><?xml version="1.0" encoding="utf-8"?>
+<file path=ppt/slides/slide12.xml><?xml version="1.0" encoding="utf-8"?>
 <p:sld xmlns:a="http://schemas.openxmlformats.org/drawingml/2006/main" xmlns:r="http://schemas.openxmlformats.org/officeDocument/2006/relationships" xmlns:p="http://schemas.openxmlformats.org/presentationml/2006/main">
   <p:cSld>
     <p:spTree>
@@ -5586,10 +6219,9 @@
           <a:lstStyle/>
           <a:p>
             <a:r>
-              <a:rPr lang="ru-RU" dirty="0" smtClean="0"/>
+              <a:rPr lang="ru-RU" dirty="0"/>
               <a:t>Асимметричное шифрование (шифрование с открытым ключом)</a:t>
             </a:r>
-            <a:endParaRPr lang="ru-RU" dirty="0"/>
           </a:p>
         </p:txBody>
       </p:sp>
@@ -5616,7 +6248,7 @@
                   <a:buNone/>
                 </a:pPr>
                 <a:r>
-                  <a:rPr lang="ru-RU" dirty="0" smtClean="0"/>
+                  <a:rPr lang="ru-RU" dirty="0"/>
                   <a:t>Пусть </a:t>
                 </a:r>
                 <a14:m>
@@ -5675,7 +6307,7 @@
                   </m:oMath>
                 </a14:m>
                 <a:r>
-                  <a:rPr lang="ru-RU" dirty="0" smtClean="0"/>
+                  <a:rPr lang="ru-RU" dirty="0"/>
                   <a:t> на </a:t>
                 </a:r>
                 <a14:m>
@@ -5765,7 +6397,7 @@
                     </m:r>
                   </m:oMath>
                 </a14:m>
-                <a:endParaRPr lang="en-US" b="0" dirty="0" smtClean="0"/>
+                <a:endParaRPr lang="en-US" b="0" dirty="0"/>
               </a:p>
               <a:p>
                 <a14:m>
@@ -5935,10 +6567,10 @@
                   </m:oMath>
                 </a14:m>
                 <a:r>
-                  <a:rPr lang="ru-RU" dirty="0" smtClean="0"/>
+                  <a:rPr lang="ru-RU" dirty="0"/>
                   <a:t> – генерация ключей</a:t>
                 </a:r>
-                <a:endParaRPr lang="en-US" dirty="0" smtClean="0"/>
+                <a:endParaRPr lang="en-US" dirty="0"/>
               </a:p>
               <a:p>
                 <a14:m>
@@ -6010,14 +6642,14 @@
                   </m:oMath>
                 </a14:m>
                 <a:r>
-                  <a:rPr lang="ru-RU" dirty="0" smtClean="0"/>
+                  <a:rPr lang="ru-RU" dirty="0"/>
                   <a:t> – </a:t>
                 </a:r>
                 <a:r>
-                  <a:rPr lang="ru-RU" dirty="0" err="1" smtClean="0"/>
+                  <a:rPr lang="ru-RU" dirty="0" err="1"/>
                   <a:t>зашифрование</a:t>
                 </a:r>
-                <a:endParaRPr lang="ru-RU" dirty="0" smtClean="0"/>
+                <a:endParaRPr lang="ru-RU" dirty="0"/>
               </a:p>
               <a:p>
                 <a14:m>
@@ -6070,14 +6702,14 @@
                   </m:oMath>
                 </a14:m>
                 <a:r>
-                  <a:rPr lang="ru-RU" dirty="0" smtClean="0"/>
+                  <a:rPr lang="ru-RU" dirty="0"/>
                   <a:t> – </a:t>
                 </a:r>
                 <a:r>
-                  <a:rPr lang="ru-RU" dirty="0" err="1" smtClean="0"/>
+                  <a:rPr lang="ru-RU" dirty="0" err="1"/>
                   <a:t>расшифрование</a:t>
                 </a:r>
-                <a:endParaRPr lang="en-US" dirty="0" smtClean="0"/>
+                <a:endParaRPr lang="en-US" dirty="0"/>
               </a:p>
               <a:p>
                 <a:endParaRPr lang="en-US" dirty="0"/>
@@ -6100,7 +6732,7 @@
                   </m:oMath>
                 </a14:m>
                 <a:r>
-                  <a:rPr lang="ru-RU" dirty="0" smtClean="0"/>
+                  <a:rPr lang="ru-RU" dirty="0"/>
                   <a:t> – эффективно вычислим, выполняется свойство корректности.</a:t>
                 </a:r>
               </a:p>
@@ -6115,7 +6747,7 @@
                   <a:buNone/>
                 </a:pPr>
                 <a:r>
-                  <a:rPr lang="ru-RU" dirty="0" smtClean="0"/>
+                  <a:rPr lang="ru-RU" dirty="0"/>
                   <a:t>Для простоты примем </a:t>
                 </a:r>
                 <a14:m>
@@ -6132,30 +6764,29 @@
                   </m:oMath>
                 </a14:m>
                 <a:r>
-                  <a:rPr lang="en-US" dirty="0" smtClean="0"/>
+                  <a:rPr lang="en-US" dirty="0"/>
                   <a:t> – </a:t>
                 </a:r>
                 <a:r>
-                  <a:rPr lang="ru-RU" dirty="0" smtClean="0"/>
+                  <a:rPr lang="ru-RU" dirty="0"/>
                   <a:t>стойким, если противник, имея </a:t>
                 </a:r>
                 <a:r>
-                  <a:rPr lang="ru-RU" dirty="0" err="1" smtClean="0"/>
+                  <a:rPr lang="ru-RU" dirty="0" err="1"/>
                   <a:t>шифртекст</a:t>
                 </a:r>
                 <a:r>
-                  <a:rPr lang="ru-RU" dirty="0" smtClean="0"/>
+                  <a:rPr lang="ru-RU" dirty="0"/>
                   <a:t> и открытый ключ, а также пары открытый текст-</a:t>
                 </a:r>
                 <a:r>
-                  <a:rPr lang="ru-RU" dirty="0" err="1" smtClean="0"/>
+                  <a:rPr lang="ru-RU" dirty="0" err="1"/>
                   <a:t>шифртекст</a:t>
                 </a:r>
                 <a:r>
-                  <a:rPr lang="ru-RU" dirty="0" smtClean="0"/>
+                  <a:rPr lang="ru-RU" dirty="0"/>
                   <a:t> не может восстановить искомый открытый текст.</a:t>
                 </a:r>
-                <a:endParaRPr lang="ru-RU" dirty="0"/>
               </a:p>
             </p:txBody>
           </p:sp>
@@ -6211,7 +6842,7 @@
           <a:p>
             <a:fld id="{8253DDDB-F8F7-4D64-A7FD-3F3D61C1949F}" type="slidenum">
               <a:rPr lang="ru-RU" smtClean="0"/>
-              <a:t>11</a:t>
+              <a:t>12</a:t>
             </a:fld>
             <a:endParaRPr lang="ru-RU"/>
           </a:p>
@@ -6227,17 +6858,10 @@
   <p:clrMapOvr>
     <a:masterClrMapping/>
   </p:clrMapOvr>
-  <p:timing>
-    <p:tnLst>
-      <p:par>
-        <p:cTn id="1" dur="indefinite" restart="never" nodeType="tmRoot"/>
-      </p:par>
-    </p:tnLst>
-  </p:timing>
 </p:sld>
 </file>
 
-<file path=ppt/slides/slide12.xml><?xml version="1.0" encoding="utf-8"?>
+<file path=ppt/slides/slide13.xml><?xml version="1.0" encoding="utf-8"?>
 <p:sld xmlns:a="http://schemas.openxmlformats.org/drawingml/2006/main" xmlns:r="http://schemas.openxmlformats.org/officeDocument/2006/relationships" xmlns:p="http://schemas.openxmlformats.org/presentationml/2006/main">
   <p:cSld>
     <p:spTree>
@@ -6270,14 +6894,13 @@
           <a:lstStyle/>
           <a:p>
             <a:r>
-              <a:rPr lang="en-US" dirty="0" smtClean="0"/>
+              <a:rPr lang="en-US" dirty="0"/>
               <a:t>RSA</a:t>
             </a:r>
             <a:r>
-              <a:rPr lang="ru-RU" dirty="0" smtClean="0"/>
+              <a:rPr lang="ru-RU" dirty="0"/>
               <a:t> (упрощённо)</a:t>
             </a:r>
-            <a:endParaRPr lang="ru-RU" dirty="0"/>
           </a:p>
         </p:txBody>
       </p:sp>
@@ -6309,10 +6932,10 @@
                   <a:buNone/>
                 </a:pPr>
                 <a:r>
-                  <a:rPr lang="en-US" sz="2400" dirty="0" smtClean="0"/>
+                  <a:rPr lang="en-US" sz="2400" dirty="0"/>
                   <a:t>G: </a:t>
                 </a:r>
-                <a:endParaRPr lang="ru-RU" sz="2400" dirty="0" smtClean="0"/>
+                <a:endParaRPr lang="ru-RU" sz="2400" dirty="0"/>
               </a:p>
               <a:p>
                 <a:r>
@@ -6375,11 +6998,11 @@
                     </m:r>
                   </m:oMath>
                 </a14:m>
-                <a:endParaRPr lang="en-US" sz="2400" dirty="0" smtClean="0"/>
+                <a:endParaRPr lang="en-US" sz="2400" dirty="0"/>
               </a:p>
               <a:p>
                 <a:r>
-                  <a:rPr lang="ru-RU" sz="2400" dirty="0" smtClean="0"/>
+                  <a:rPr lang="ru-RU" sz="2400" dirty="0"/>
                   <a:t>Выбрать числа </a:t>
                 </a:r>
                 <a14:m>
@@ -6463,7 +7086,7 @@
                     </m:r>
                   </m:oMath>
                 </a14:m>
-                <a:endParaRPr lang="en-US" sz="2400" dirty="0" smtClean="0"/>
+                <a:endParaRPr lang="en-US" sz="2400" dirty="0"/>
               </a:p>
               <a:p>
                 <a14:m>
@@ -6553,16 +7176,16 @@
                     </m:r>
                   </m:oMath>
                 </a14:m>
-                <a:endParaRPr lang="en-US" sz="2400" dirty="0" smtClean="0"/>
+                <a:endParaRPr lang="en-US" sz="2400" dirty="0"/>
               </a:p>
               <a:p>
-                <a:endParaRPr lang="ru-RU" dirty="0" smtClean="0"/>
+                <a:endParaRPr lang="ru-RU" dirty="0"/>
               </a:p>
               <a:p>
                 <a:pPr marL="0" indent="0">
                   <a:buNone/>
                 </a:pPr>
-                <a:endParaRPr lang="en-US" b="0" i="1" dirty="0" smtClean="0">
+                <a:endParaRPr lang="en-US" b="0" i="1" dirty="0">
                   <a:latin typeface="Cambria Math" panose="02040503050406030204" pitchFamily="18" charset="0"/>
                 </a:endParaRPr>
               </a:p>
@@ -6627,14 +7250,14 @@
           <a:p>
             <a:fld id="{8253DDDB-F8F7-4D64-A7FD-3F3D61C1949F}" type="slidenum">
               <a:rPr lang="ru-RU" smtClean="0"/>
-              <a:t>12</a:t>
+              <a:t>13</a:t>
             </a:fld>
             <a:endParaRPr lang="ru-RU"/>
           </a:p>
         </p:txBody>
       </p:sp>
-      <mc:AlternateContent xmlns:mc="http://schemas.openxmlformats.org/markup-compatibility/2006" xmlns:a14="http://schemas.microsoft.com/office/drawing/2010/main">
-        <mc:Choice Requires="a14">
+      <mc:AlternateContent xmlns:mc="http://schemas.openxmlformats.org/markup-compatibility/2006">
+        <mc:Choice xmlns:a14="http://schemas.microsoft.com/office/drawing/2010/main" Requires="a14">
           <p:graphicFrame>
             <p:nvGraphicFramePr>
               <p:cNvPr id="5" name="Таблица 4"/>
@@ -6644,7 +7267,7 @@
               <p:nvPr>
                 <p:extLst>
                   <p:ext uri="{D42A27DB-BD31-4B8C-83A1-F6EECF244321}">
-                    <p14:modId xmlns:p14="http://schemas.microsoft.com/office/powerpoint/2010/main" val="28482499"/>
+                    <p14:modId xmlns:p14="http://schemas.microsoft.com/office/powerpoint/2010/main" val="3978160903"/>
                   </p:ext>
                 </p:extLst>
               </p:nvPr>
@@ -6738,7 +7361,7 @@
                               </m:oMath>
                             </m:oMathPara>
                           </a14:m>
-                          <a:endParaRPr lang="en-US" sz="2400" b="0" i="1" dirty="0" smtClean="0">
+                          <a:endParaRPr lang="en-US" sz="2400" b="0" i="1" dirty="0">
                             <a:latin typeface="Cambria Math" panose="02040503050406030204" pitchFamily="18" charset="0"/>
                           </a:endParaRPr>
                         </a:p>
@@ -6772,10 +7395,10 @@
                                 </m:sSubSupPr>
                                 <m:e>
                                   <m:r>
-                                    <a:rPr lang="en-US" sz="2400" b="0" i="1" smtClean="0">
+                                    <a:rPr lang="ru-RU" sz="2400" b="0" i="1" smtClean="0">
                                       <a:latin typeface="Cambria Math" panose="02040503050406030204" pitchFamily="18" charset="0"/>
                                     </a:rPr>
-                                    <m:t>𝑍</m:t>
+                                    <m:t>ℤ</m:t>
                                   </m:r>
                                 </m:e>
                                 <m:sub>
@@ -6811,10 +7434,10 @@
                                 </m:sSubSupPr>
                                 <m:e>
                                   <m:r>
-                                    <a:rPr lang="en-US" sz="2400" i="1">
+                                    <a:rPr lang="ru-RU" sz="2400" b="0" i="1" smtClean="0">
                                       <a:latin typeface="Cambria Math" panose="02040503050406030204" pitchFamily="18" charset="0"/>
                                     </a:rPr>
-                                    <m:t>𝑍</m:t>
+                                    <m:t>ℤ</m:t>
                                   </m:r>
                                 </m:e>
                                 <m:sub>
@@ -6915,7 +7538,7 @@
                             </m:oMath>
                           </a14:m>
                           <a:r>
-                            <a:rPr lang="en-US" sz="2400" b="0" i="1" dirty="0" smtClean="0">
+                            <a:rPr lang="en-US" sz="2400" b="0" i="1" dirty="0">
                               <a:latin typeface="Cambria Math" panose="02040503050406030204" pitchFamily="18" charset="0"/>
                             </a:rPr>
                             <a:t>.</a:t>
@@ -6965,7 +7588,7 @@
                             </m:oMath>
                           </a14:m>
                           <a:r>
-                            <a:rPr lang="en-US" sz="2400" b="0" i="0" dirty="0" smtClean="0">
+                            <a:rPr lang="en-US" sz="2400" b="0" i="0" dirty="0">
                               <a:latin typeface="Cambria Math" panose="02040503050406030204" pitchFamily="18" charset="0"/>
                             </a:rPr>
                             <a:t>:</a:t>
@@ -6987,10 +7610,10 @@
                                 </m:sSubSupPr>
                                 <m:e>
                                   <m:r>
-                                    <a:rPr lang="en-US" sz="2400" i="1">
+                                    <a:rPr lang="ru-RU" sz="2400" b="0" i="1" smtClean="0">
                                       <a:latin typeface="Cambria Math" panose="02040503050406030204" pitchFamily="18" charset="0"/>
                                     </a:rPr>
-                                    <m:t>𝑍</m:t>
+                                    <m:t>ℤ</m:t>
                                   </m:r>
                                 </m:e>
                                 <m:sub>
@@ -7026,10 +7649,10 @@
                                 </m:sSubSupPr>
                                 <m:e>
                                   <m:r>
-                                    <a:rPr lang="en-US" sz="2400" i="1">
+                                    <a:rPr lang="ru-RU" sz="2400" b="0" i="1" smtClean="0">
                                       <a:latin typeface="Cambria Math" panose="02040503050406030204" pitchFamily="18" charset="0"/>
                                     </a:rPr>
-                                    <m:t>𝑍</m:t>
+                                    <m:t>ℤ</m:t>
                                   </m:r>
                                 </m:e>
                                 <m:sub>
@@ -7227,7 +7850,7 @@
                             </m:oMath>
                           </a14:m>
                           <a:r>
-                            <a:rPr lang="en-US" sz="2400" b="0" i="1" dirty="0" smtClean="0">
+                            <a:rPr lang="en-US" sz="2400" b="0" i="1" dirty="0">
                               <a:latin typeface="Cambria Math" panose="02040503050406030204" pitchFamily="18" charset="0"/>
                             </a:rPr>
                             <a:t> </a:t>
@@ -7361,7 +7984,7 @@
                             </m:oMath>
                           </a14:m>
                           <a:r>
-                            <a:rPr lang="en-US" sz="2400" b="0" dirty="0" smtClean="0"/>
+                            <a:rPr lang="en-US" sz="2400" b="0" dirty="0"/>
                             <a:t>.</a:t>
                           </a:r>
                         </a:p>
@@ -7382,7 +8005,7 @@
             </a:graphic>
           </p:graphicFrame>
         </mc:Choice>
-        <mc:Fallback xmlns="">
+        <mc:Fallback>
           <p:graphicFrame>
             <p:nvGraphicFramePr>
               <p:cNvPr id="5" name="Таблица 4"/>
@@ -7392,7 +8015,7 @@
               <p:nvPr>
                 <p:extLst>
                   <p:ext uri="{D42A27DB-BD31-4B8C-83A1-F6EECF244321}">
-                    <p14:modId xmlns:p14="http://schemas.microsoft.com/office/powerpoint/2010/main" val="28482499"/>
+                    <p14:modId xmlns:p14="http://schemas.microsoft.com/office/powerpoint/2010/main" val="3978160903"/>
                   </p:ext>
                 </p:extLst>
               </p:nvPr>
@@ -7480,17 +8103,10 @@
   <p:clrMapOvr>
     <a:masterClrMapping/>
   </p:clrMapOvr>
-  <p:timing>
-    <p:tnLst>
-      <p:par>
-        <p:cTn id="1" dur="indefinite" restart="never" nodeType="tmRoot"/>
-      </p:par>
-    </p:tnLst>
-  </p:timing>
 </p:sld>
 </file>
 
-<file path=ppt/slides/slide13.xml><?xml version="1.0" encoding="utf-8"?>
+<file path=ppt/slides/slide14.xml><?xml version="1.0" encoding="utf-8"?>
 <p:sld xmlns:a="http://schemas.openxmlformats.org/drawingml/2006/main" xmlns:r="http://schemas.openxmlformats.org/officeDocument/2006/relationships" xmlns:p="http://schemas.openxmlformats.org/presentationml/2006/main">
   <p:cSld>
     <p:spTree>
@@ -7524,15 +8140,7 @@
           <a:p>
             <a:r>
               <a:rPr lang="en-US" dirty="0"/>
-              <a:t>PKCS1 </a:t>
-            </a:r>
-            <a:r>
-              <a:rPr lang="en-US" dirty="0" smtClean="0"/>
-              <a:t>v2.0:   </a:t>
-            </a:r>
-            <a:r>
-              <a:rPr lang="en-US" dirty="0"/>
-              <a:t>OAEP</a:t>
+              <a:t>PKCS1 v2.0:   OAEP</a:t>
             </a:r>
           </a:p>
         </p:txBody>
@@ -7563,27 +8171,23 @@
               <a:buNone/>
             </a:pPr>
             <a:r>
-              <a:rPr lang="ru-RU" dirty="0" smtClean="0"/>
+              <a:rPr lang="ru-RU" dirty="0"/>
               <a:t>Режим для шифрования </a:t>
             </a:r>
             <a:r>
-              <a:rPr lang="en-US" dirty="0" smtClean="0"/>
+              <a:rPr lang="en-US" dirty="0"/>
               <a:t>RSA:  OAEP</a:t>
             </a:r>
             <a:r>
-              <a:rPr lang="ru-RU" dirty="0" smtClean="0"/>
+              <a:rPr lang="ru-RU" dirty="0"/>
               <a:t> (</a:t>
             </a:r>
             <a:r>
               <a:rPr lang="en-US" dirty="0"/>
-              <a:t>Optimal Asymmetric Encryption </a:t>
-            </a:r>
-            <a:r>
-              <a:rPr lang="en-US" dirty="0" smtClean="0"/>
-              <a:t>Padding</a:t>
-            </a:r>
-            <a:r>
-              <a:rPr lang="ru-RU" dirty="0" smtClean="0"/>
+              <a:t>Optimal Asymmetric Encryption Padding</a:t>
+            </a:r>
+            <a:r>
+              <a:rPr lang="ru-RU" dirty="0"/>
               <a:t>)</a:t>
             </a:r>
           </a:p>
@@ -7659,11 +8263,11 @@
               <a:buNone/>
             </a:pPr>
             <a:r>
-              <a:rPr lang="en-US" b="1" dirty="0" err="1" smtClean="0"/>
+              <a:rPr lang="en-US" b="1" dirty="0" err="1"/>
               <a:t>Thm</a:t>
             </a:r>
             <a:r>
-              <a:rPr lang="en-US" dirty="0" smtClean="0"/>
+              <a:rPr lang="en-US" dirty="0"/>
               <a:t> </a:t>
             </a:r>
             <a:r>
@@ -7671,20 +8275,8 @@
               <a:t>[FOPS’01] </a:t>
             </a:r>
             <a:r>
-              <a:rPr lang="en-US" dirty="0" smtClean="0"/>
-              <a:t>: </a:t>
-            </a:r>
-            <a:r>
               <a:rPr lang="en-US" dirty="0"/>
-              <a:t>RSA is </a:t>
-            </a:r>
-            <a:r>
-              <a:rPr lang="en-US" dirty="0" smtClean="0"/>
-              <a:t>a trap</a:t>
-            </a:r>
-            <a:r>
-              <a:rPr lang="en-US" dirty="0"/>
-              <a:t>-door permutation  </a:t>
+              <a:t>: RSA is a trap-door permutation  </a:t>
             </a:r>
             <a:r>
               <a:rPr lang="en-US" dirty="0">
@@ -7692,41 +8284,23 @@
               </a:rPr>
               <a:t>   </a:t>
             </a:r>
-            <a:r>
-              <a:rPr lang="en-US" dirty="0" smtClean="0">
-                <a:sym typeface="Symbol" pitchFamily="18" charset="2"/>
-              </a:rPr>
-              <a:t/>
-            </a:r>
             <a:br>
-              <a:rPr lang="en-US" dirty="0" smtClean="0">
+              <a:rPr lang="en-US" dirty="0">
                 <a:sym typeface="Symbol" pitchFamily="18" charset="2"/>
               </a:rPr>
             </a:br>
             <a:r>
-              <a:rPr lang="en-US" dirty="0" smtClean="0">
+              <a:rPr lang="en-US" dirty="0">
                 <a:sym typeface="Symbol" pitchFamily="18" charset="2"/>
               </a:rPr>
               <a:t>	RSA-</a:t>
             </a:r>
             <a:r>
-              <a:rPr lang="en-US" dirty="0" smtClean="0"/>
-              <a:t>OAEP </a:t>
-            </a:r>
-            <a:r>
               <a:rPr lang="en-US" dirty="0"/>
-              <a:t>is </a:t>
-            </a:r>
-            <a:r>
-              <a:rPr lang="en-US" dirty="0" smtClean="0"/>
-              <a:t>CCA secure when  </a:t>
-            </a:r>
-            <a:r>
-              <a:rPr lang="en-US" dirty="0"/>
-              <a:t>H,G  are </a:t>
-            </a:r>
-            <a:r>
-              <a:rPr lang="en-US" i="1" dirty="0" smtClean="0"/>
+              <a:t>OAEP is CCA secure when  H,G  are </a:t>
+            </a:r>
+            <a:r>
+              <a:rPr lang="en-US" i="1" dirty="0"/>
               <a:t>random oracles</a:t>
             </a:r>
             <a:endParaRPr lang="en-US" dirty="0"/>
@@ -7742,42 +8316,37 @@
               <a:buNone/>
             </a:pPr>
             <a:r>
-              <a:rPr lang="ru-RU" dirty="0" smtClean="0"/>
+              <a:rPr lang="ru-RU" dirty="0"/>
               <a:t>На практике</a:t>
             </a:r>
             <a:r>
-              <a:rPr lang="en-US" dirty="0" smtClean="0"/>
+              <a:rPr lang="en-US" dirty="0"/>
               <a:t>:  </a:t>
             </a:r>
             <a:r>
-              <a:rPr lang="ru-RU" dirty="0" smtClean="0"/>
+              <a:rPr lang="ru-RU" dirty="0"/>
               <a:t>использование</a:t>
             </a:r>
             <a:r>
-              <a:rPr lang="en-US" dirty="0" smtClean="0"/>
+              <a:rPr lang="en-US" dirty="0"/>
               <a:t> SHA-256 </a:t>
             </a:r>
             <a:r>
-              <a:rPr lang="ru-RU" dirty="0" smtClean="0"/>
+              <a:rPr lang="ru-RU" dirty="0"/>
               <a:t>для</a:t>
             </a:r>
             <a:r>
-              <a:rPr lang="en-US" dirty="0" smtClean="0"/>
-              <a:t> </a:t>
-            </a:r>
-            <a:r>
               <a:rPr lang="en-US" dirty="0"/>
-              <a:t>H </a:t>
-            </a:r>
-            <a:r>
-              <a:rPr lang="ru-RU" dirty="0" smtClean="0"/>
+              <a:t> H </a:t>
+            </a:r>
+            <a:r>
+              <a:rPr lang="ru-RU" dirty="0"/>
               <a:t>и</a:t>
             </a:r>
             <a:r>
-              <a:rPr lang="en-US" dirty="0" smtClean="0"/>
+              <a:rPr lang="en-US" dirty="0"/>
               <a:t> G</a:t>
             </a:r>
-            <a:endParaRPr lang="en-US" dirty="0"/>
           </a:p>
         </p:txBody>
       </p:sp>
@@ -8638,7 +9207,7 @@
               </a:tabLst>
             </a:pPr>
             <a:r>
-              <a:rPr lang="ru-RU" sz="2667" dirty="0" smtClean="0"/>
+              <a:rPr lang="ru-RU" sz="2667" dirty="0"/>
               <a:t>Проверка дополнения</a:t>
             </a:r>
           </a:p>
@@ -8650,29 +9219,21 @@
             </a:pPr>
             <a:r>
               <a:rPr lang="ru-RU" sz="2667" dirty="0"/>
-              <a:t>п</a:t>
-            </a:r>
-            <a:r>
-              <a:rPr lang="ru-RU" sz="2667" dirty="0" smtClean="0"/>
-              <a:t>ри </a:t>
-            </a:r>
-            <a:r>
-              <a:rPr lang="ru-RU" sz="2667" dirty="0" err="1" smtClean="0"/>
+              <a:t>при </a:t>
+            </a:r>
+            <a:r>
+              <a:rPr lang="ru-RU" sz="2667" dirty="0" err="1"/>
               <a:t>расшифровании</a:t>
             </a:r>
             <a:r>
-              <a:rPr lang="en-US" sz="2667" dirty="0" smtClean="0"/>
+              <a:rPr lang="en-US" sz="2667" dirty="0"/>
               <a:t>.</a:t>
-            </a:r>
-            <a:r>
-              <a:rPr lang="en-US" sz="2667" dirty="0"/>
-              <a:t/>
             </a:r>
             <a:br>
               <a:rPr lang="en-US" sz="2667" dirty="0"/>
             </a:br>
             <a:r>
-              <a:rPr lang="ru-RU" sz="2667" dirty="0" smtClean="0"/>
+              <a:rPr lang="ru-RU" sz="2667" dirty="0"/>
               <a:t>Отклонение, </a:t>
             </a:r>
           </a:p>
@@ -8683,14 +9244,13 @@
               </a:tabLst>
             </a:pPr>
             <a:r>
-              <a:rPr lang="ru-RU" sz="2667" dirty="0" smtClean="0"/>
+              <a:rPr lang="ru-RU" sz="2667" dirty="0"/>
               <a:t>при несовпадении</a:t>
             </a:r>
             <a:r>
-              <a:rPr lang="en-US" sz="2667" dirty="0" smtClean="0"/>
+              <a:rPr lang="en-US" sz="2667" dirty="0"/>
               <a:t>.</a:t>
             </a:r>
-            <a:endParaRPr lang="en-US" sz="2667" dirty="0"/>
           </a:p>
         </p:txBody>
       </p:sp>
@@ -8759,17 +9319,10 @@
     <a:masterClrMapping/>
   </p:clrMapOvr>
   <p:transition/>
-  <p:timing>
-    <p:tnLst>
-      <p:par>
-        <p:cTn id="1" dur="indefinite" restart="never" nodeType="tmRoot"/>
-      </p:par>
-    </p:tnLst>
-  </p:timing>
 </p:sld>
 </file>
 
-<file path=ppt/slides/slide14.xml><?xml version="1.0" encoding="utf-8"?>
+<file path=ppt/slides/slide15.xml><?xml version="1.0" encoding="utf-8"?>
 <p:sld xmlns:a="http://schemas.openxmlformats.org/drawingml/2006/main" xmlns:r="http://schemas.openxmlformats.org/officeDocument/2006/relationships" xmlns:p="http://schemas.openxmlformats.org/presentationml/2006/main">
   <p:cSld>
     <p:spTree>
@@ -8802,23 +9355,22 @@
           <a:lstStyle/>
           <a:p>
             <a:r>
-              <a:rPr lang="ru-RU" dirty="0" smtClean="0"/>
+              <a:rPr lang="ru-RU" dirty="0"/>
               <a:t>Криптосистема Эль-</a:t>
             </a:r>
             <a:r>
-              <a:rPr lang="ru-RU" dirty="0" err="1" smtClean="0"/>
+              <a:rPr lang="ru-RU" dirty="0" err="1"/>
               <a:t>Гамаля</a:t>
             </a:r>
             <a:r>
-              <a:rPr lang="ru-RU" dirty="0" smtClean="0"/>
+              <a:rPr lang="ru-RU" dirty="0"/>
               <a:t> (упрощённо)</a:t>
             </a:r>
-            <a:endParaRPr lang="ru-RU" dirty="0"/>
           </a:p>
         </p:txBody>
       </p:sp>
-      <mc:AlternateContent xmlns:mc="http://schemas.openxmlformats.org/markup-compatibility/2006" xmlns:a14="http://schemas.microsoft.com/office/drawing/2010/main">
-        <mc:Choice Requires="a14">
+      <mc:AlternateContent xmlns:mc="http://schemas.openxmlformats.org/markup-compatibility/2006">
+        <mc:Choice xmlns:a14="http://schemas.microsoft.com/office/drawing/2010/main" Requires="a14">
           <p:sp>
             <p:nvSpPr>
               <p:cNvPr id="3" name="Объект 2"/>
@@ -8850,7 +9402,7 @@
                   </m:oMath>
                 </a14:m>
                 <a:r>
-                  <a:rPr lang="ru-RU" sz="2400" dirty="0" smtClean="0"/>
+                  <a:rPr lang="ru-RU" sz="2400" dirty="0"/>
                   <a:t> – циклическая группа порядка </a:t>
                 </a:r>
                 <a14:m>
@@ -8864,11 +9416,11 @@
                   </m:oMath>
                 </a14:m>
                 <a:r>
-                  <a:rPr lang="en-US" sz="2400" dirty="0" smtClean="0"/>
+                  <a:rPr lang="en-US" sz="2400" dirty="0"/>
                   <a:t> (</a:t>
                 </a:r>
                 <a:r>
-                  <a:rPr lang="ru-RU" sz="2400" dirty="0" smtClean="0"/>
+                  <a:rPr lang="ru-RU" sz="2400" dirty="0"/>
                   <a:t>например </a:t>
                 </a:r>
                 <a14:m>
@@ -8883,10 +9435,10 @@
                       </m:sSubSupPr>
                       <m:e>
                         <m:r>
-                          <a:rPr lang="en-US" sz="2400" b="0" i="1" smtClean="0">
-                            <a:latin typeface="Cambria Math" panose="02040503050406030204" pitchFamily="18" charset="0"/>
-                          </a:rPr>
-                          <m:t>𝑍</m:t>
+                          <a:rPr lang="ru-RU" sz="2400" i="1">
+                            <a:latin typeface="Cambria Math" panose="02040503050406030204" pitchFamily="18" charset="0"/>
+                          </a:rPr>
+                          <m:t>ℤ</m:t>
                         </m:r>
                       </m:e>
                       <m:sub>
@@ -8909,7 +9461,7 @@
                   </m:oMath>
                 </a14:m>
                 <a:r>
-                  <a:rPr lang="en-US" sz="2400" dirty="0" smtClean="0"/>
+                  <a:rPr lang="en-US" sz="2400" dirty="0"/>
                   <a:t>)</a:t>
                 </a:r>
               </a:p>
@@ -8989,11 +9541,11 @@
                   </m:oMath>
                 </a14:m>
                 <a:r>
-                  <a:rPr lang="en-US" sz="2400" dirty="0" smtClean="0"/>
+                  <a:rPr lang="en-US" sz="2400" dirty="0"/>
                   <a:t> </a:t>
                 </a:r>
                 <a:r>
-                  <a:rPr lang="ru-RU" sz="2400" dirty="0" smtClean="0"/>
+                  <a:rPr lang="ru-RU" sz="2400" dirty="0"/>
                   <a:t>- симметричный аутентифицированный шифр на </a:t>
                 </a:r>
                 <a14:m>
@@ -9042,7 +9594,7 @@
                     </m:r>
                   </m:oMath>
                 </a14:m>
-                <a:endParaRPr lang="ru-RU" sz="2400" dirty="0" smtClean="0"/>
+                <a:endParaRPr lang="ru-RU" sz="2400" dirty="0"/>
               </a:p>
               <a:p>
                 <a:pPr marL="0" indent="0">
@@ -9102,14 +9654,14 @@
                   </m:oMath>
                 </a14:m>
                 <a:r>
-                  <a:rPr lang="en-US" sz="2400" dirty="0" smtClean="0"/>
+                  <a:rPr lang="en-US" sz="2400" dirty="0"/>
                   <a:t> – </a:t>
                 </a:r>
                 <a:r>
-                  <a:rPr lang="ru-RU" sz="2400" dirty="0" smtClean="0"/>
+                  <a:rPr lang="ru-RU" sz="2400" dirty="0"/>
                   <a:t>хэш-функция.</a:t>
                 </a:r>
-                <a:endParaRPr lang="en-US" sz="2400" dirty="0" smtClean="0"/>
+                <a:endParaRPr lang="en-US" sz="2400" dirty="0"/>
               </a:p>
               <a:p>
                 <a:pPr marL="0" indent="0">
@@ -9204,10 +9756,10 @@
                         </m:sSubPr>
                         <m:e>
                           <m:r>
-                            <a:rPr lang="en-US" sz="2400" b="0" i="1" smtClean="0">
+                            <a:rPr lang="ru-RU" sz="2400" b="0" i="1" smtClean="0">
                               <a:latin typeface="Cambria Math" panose="02040503050406030204" pitchFamily="18" charset="0"/>
                             </a:rPr>
-                            <m:t>𝑍</m:t>
+                            <m:t>ℤ</m:t>
                           </m:r>
                         </m:e>
                         <m:sub>
@@ -9319,13 +9871,13 @@
                     </m:oMath>
                   </m:oMathPara>
                 </a14:m>
-                <a:endParaRPr lang="en-US" sz="2400" dirty="0" smtClean="0"/>
+                <a:endParaRPr lang="en-US" sz="2400" dirty="0"/>
               </a:p>
               <a:p>
                 <a:pPr marL="0" indent="0">
                   <a:buNone/>
                 </a:pPr>
-                <a:endParaRPr lang="ru-RU" dirty="0" smtClean="0"/>
+                <a:endParaRPr lang="ru-RU" dirty="0"/>
               </a:p>
               <a:p>
                 <a:pPr marL="0" indent="0">
@@ -9336,7 +9888,7 @@
             </p:txBody>
           </p:sp>
         </mc:Choice>
-        <mc:Fallback xmlns="">
+        <mc:Fallback>
           <p:sp>
             <p:nvSpPr>
               <p:cNvPr id="3" name="Объект 2"/>
@@ -9387,14 +9939,14 @@
           <a:p>
             <a:fld id="{8253DDDB-F8F7-4D64-A7FD-3F3D61C1949F}" type="slidenum">
               <a:rPr lang="ru-RU" smtClean="0"/>
-              <a:t>14</a:t>
+              <a:t>15</a:t>
             </a:fld>
             <a:endParaRPr lang="ru-RU"/>
           </a:p>
         </p:txBody>
       </p:sp>
-      <mc:AlternateContent xmlns:mc="http://schemas.openxmlformats.org/markup-compatibility/2006" xmlns:a14="http://schemas.microsoft.com/office/drawing/2010/main">
-        <mc:Choice Requires="a14">
+      <mc:AlternateContent xmlns:mc="http://schemas.openxmlformats.org/markup-compatibility/2006">
+        <mc:Choice xmlns:a14="http://schemas.microsoft.com/office/drawing/2010/main" Requires="a14">
           <p:graphicFrame>
             <p:nvGraphicFramePr>
               <p:cNvPr id="5" name="Таблица 4"/>
@@ -9404,7 +9956,7 @@
               <p:nvPr>
                 <p:extLst>
                   <p:ext uri="{D42A27DB-BD31-4B8C-83A1-F6EECF244321}">
-                    <p14:modId xmlns:p14="http://schemas.microsoft.com/office/powerpoint/2010/main" val="2917261467"/>
+                    <p14:modId xmlns:p14="http://schemas.microsoft.com/office/powerpoint/2010/main" val="1816073766"/>
                   </p:ext>
                 </p:extLst>
               </p:nvPr>
@@ -9529,7 +10081,7 @@
                               </m:oMath>
                             </m:oMathPara>
                           </a14:m>
-                          <a:endParaRPr lang="en-US" sz="2400" dirty="0" smtClean="0"/>
+                          <a:endParaRPr lang="en-US" sz="2400" dirty="0"/>
                         </a:p>
                         <a:p>
                           <a:pPr marL="0" indent="0">
@@ -9582,10 +10134,10 @@
                                   </m:sSubPr>
                                   <m:e>
                                     <m:r>
-                                      <a:rPr lang="en-US" sz="2400" smtClean="0">
+                                      <a:rPr lang="ru-RU" sz="2400" b="0" i="1" smtClean="0">
                                         <a:latin typeface="Cambria Math" panose="02040503050406030204" pitchFamily="18" charset="0"/>
                                       </a:rPr>
-                                      <m:t>𝑍</m:t>
+                                      <m:t>ℤ</m:t>
                                     </m:r>
                                   </m:e>
                                   <m:sub>
@@ -9686,7 +10238,7 @@
                               </m:oMath>
                             </m:oMathPara>
                           </a14:m>
-                          <a:endParaRPr lang="en-US" sz="2400" dirty="0" smtClean="0"/>
+                          <a:endParaRPr lang="en-US" sz="2400" dirty="0"/>
                         </a:p>
                         <a:p>
                           <a:pPr marL="0" indent="0">
@@ -9820,7 +10372,7 @@
                               </m:oMath>
                             </m:oMathPara>
                           </a14:m>
-                          <a:endParaRPr lang="en-US" sz="2400" dirty="0" smtClean="0"/>
+                          <a:endParaRPr lang="en-US" sz="2400" dirty="0"/>
                         </a:p>
                         <a:p>
                           <a:pPr marL="0" indent="0">
@@ -9871,7 +10423,7 @@
                               </m:oMath>
                             </m:oMathPara>
                           </a14:m>
-                          <a:endParaRPr lang="en-US" sz="2400" dirty="0" smtClean="0"/>
+                          <a:endParaRPr lang="en-US" sz="2400" dirty="0"/>
                         </a:p>
                         <a:p>
                           <a:endParaRPr lang="ru-RU" sz="2400" dirty="0"/>
@@ -9909,10 +10461,10 @@
                                   </m:dPr>
                                   <m:e>
                                     <m:r>
-                                      <a:rPr lang="en-US" sz="2400" smtClean="0">
+                                      <a:rPr lang="en-US" sz="2400" b="1" i="1" smtClean="0">
                                         <a:latin typeface="Cambria Math" panose="02040503050406030204" pitchFamily="18" charset="0"/>
                                       </a:rPr>
-                                      <m:t>𝒔𝒌</m:t>
+                                      <m:t>𝑺𝑲</m:t>
                                     </m:r>
                                     <m:r>
                                       <a:rPr lang="en-US" sz="2400" smtClean="0">
@@ -9972,7 +10524,7 @@
                               </m:oMath>
                             </m:oMathPara>
                           </a14:m>
-                          <a:endParaRPr lang="en-US" sz="2400" dirty="0" smtClean="0"/>
+                          <a:endParaRPr lang="en-US" sz="2400" dirty="0"/>
                         </a:p>
                         <a:p>
                           <a:pPr marL="0" indent="0">
@@ -10024,7 +10576,7 @@
                               </m:oMath>
                             </m:oMathPara>
                           </a14:m>
-                          <a:endParaRPr lang="en-US" sz="2400" dirty="0" smtClean="0"/>
+                          <a:endParaRPr lang="en-US" sz="2400" dirty="0"/>
                         </a:p>
                         <a:p>
                           <a:pPr marL="0" indent="0">
@@ -10174,7 +10726,7 @@
             </a:graphic>
           </p:graphicFrame>
         </mc:Choice>
-        <mc:Fallback xmlns="">
+        <mc:Fallback>
           <p:graphicFrame>
             <p:nvGraphicFramePr>
               <p:cNvPr id="5" name="Таблица 4"/>
@@ -10184,7 +10736,7 @@
               <p:nvPr>
                 <p:extLst>
                   <p:ext uri="{D42A27DB-BD31-4B8C-83A1-F6EECF244321}">
-                    <p14:modId xmlns:p14="http://schemas.microsoft.com/office/powerpoint/2010/main" val="2917261467"/>
+                    <p14:modId xmlns:p14="http://schemas.microsoft.com/office/powerpoint/2010/main" val="1816073766"/>
                   </p:ext>
                 </p:extLst>
               </p:nvPr>
@@ -10272,17 +10824,10 @@
   <p:clrMapOvr>
     <a:masterClrMapping/>
   </p:clrMapOvr>
-  <p:timing>
-    <p:tnLst>
-      <p:par>
-        <p:cTn id="1" dur="indefinite" restart="never" nodeType="tmRoot"/>
-      </p:par>
-    </p:tnLst>
-  </p:timing>
 </p:sld>
 </file>
 
-<file path=ppt/slides/slide15.xml><?xml version="1.0" encoding="utf-8"?>
+<file path=ppt/slides/slide16.xml><?xml version="1.0" encoding="utf-8"?>
 <p:sld xmlns:a="http://schemas.openxmlformats.org/drawingml/2006/main" xmlns:r="http://schemas.openxmlformats.org/officeDocument/2006/relationships" xmlns:p="http://schemas.openxmlformats.org/presentationml/2006/main">
   <p:cSld>
     <p:spTree>
@@ -10315,10 +10860,9 @@
           <a:lstStyle/>
           <a:p>
             <a:r>
-              <a:rPr lang="ru-RU" dirty="0" smtClean="0"/>
+              <a:rPr lang="ru-RU" dirty="0"/>
               <a:t>Электронные подписи</a:t>
             </a:r>
-            <a:endParaRPr lang="ru-RU" dirty="0"/>
           </a:p>
         </p:txBody>
       </p:sp>
@@ -10339,7 +10883,7 @@
           <a:p>
             <a:fld id="{8253DDDB-F8F7-4D64-A7FD-3F3D61C1949F}" type="slidenum">
               <a:rPr lang="ru-RU" smtClean="0"/>
-              <a:t>15</a:t>
+              <a:t>16</a:t>
             </a:fld>
             <a:endParaRPr lang="ru-RU"/>
           </a:p>
@@ -10373,7 +10917,7 @@
                   <a:buNone/>
                 </a:pPr>
                 <a:r>
-                  <a:rPr lang="ru-RU" dirty="0" smtClean="0"/>
+                  <a:rPr lang="ru-RU" dirty="0"/>
                   <a:t>Пусть </a:t>
                 </a:r>
                 <a14:m>
@@ -10435,7 +10979,7 @@
                   </m:oMath>
                 </a14:m>
                 <a:r>
-                  <a:rPr lang="ru-RU" dirty="0" smtClean="0"/>
+                  <a:rPr lang="ru-RU" dirty="0"/>
                   <a:t> на </a:t>
                 </a:r>
                 <a14:m>
@@ -10528,7 +11072,7 @@
                     </m:r>
                   </m:oMath>
                 </a14:m>
-                <a:endParaRPr lang="en-US" b="0" dirty="0" smtClean="0"/>
+                <a:endParaRPr lang="en-US" b="0" dirty="0"/>
               </a:p>
               <a:p>
                 <a14:m>
@@ -10698,7 +11242,7 @@
                   </m:oMath>
                 </a14:m>
                 <a:r>
-                  <a:rPr lang="ru-RU" dirty="0" smtClean="0"/>
+                  <a:rPr lang="ru-RU" dirty="0"/>
                   <a:t> – генерация ключей</a:t>
                 </a:r>
               </a:p>
@@ -10789,7 +11333,7 @@
                     </m:r>
                   </m:oMath>
                 </a14:m>
-                <a:endParaRPr lang="en-US" dirty="0" smtClean="0"/>
+                <a:endParaRPr lang="en-US" dirty="0"/>
               </a:p>
               <a:p>
                 <a14:m>
@@ -10873,7 +11417,7 @@
                   </m:oMath>
                 </a14:m>
                 <a:r>
-                  <a:rPr lang="ru-RU" dirty="0" smtClean="0"/>
+                  <a:rPr lang="ru-RU" dirty="0"/>
                   <a:t> – проверка подписи</a:t>
                 </a:r>
               </a:p>
@@ -10901,7 +11445,7 @@
                   </m:oMath>
                 </a14:m>
                 <a:r>
-                  <a:rPr lang="ru-RU" dirty="0" smtClean="0"/>
+                  <a:rPr lang="ru-RU" dirty="0"/>
                   <a:t> – эффективно вычислим, выполняется свойство корректности.</a:t>
                 </a:r>
               </a:p>
@@ -10916,7 +11460,7 @@
                   <a:buNone/>
                 </a:pPr>
                 <a:r>
-                  <a:rPr lang="ru-RU" dirty="0" smtClean="0"/>
+                  <a:rPr lang="ru-RU" dirty="0"/>
                   <a:t>Для простоты примем </a:t>
                 </a:r>
                 <a14:m>
@@ -10933,30 +11477,21 @@
                   </m:oMath>
                 </a14:m>
                 <a:r>
-                  <a:rPr lang="en-US" dirty="0" smtClean="0"/>
+                  <a:rPr lang="en-US" dirty="0"/>
                   <a:t> – </a:t>
                 </a:r>
                 <a:r>
-                  <a:rPr lang="ru-RU" dirty="0" smtClean="0"/>
+                  <a:rPr lang="ru-RU" dirty="0"/>
                   <a:t>стойким, если противник,</a:t>
                 </a:r>
                 <a:r>
-                  <a:rPr lang="en-US" dirty="0" smtClean="0"/>
+                  <a:rPr lang="en-US" dirty="0"/>
                   <a:t> </a:t>
                 </a:r>
                 <a:r>
-                  <a:rPr lang="ru-RU" dirty="0" smtClean="0"/>
-                  <a:t>имея </a:t>
+                  <a:rPr lang="ru-RU" dirty="0"/>
+                  <a:t>имея открытый ключ и пары сообщение-подпись не может сформировать новую подпись.</a:t>
                 </a:r>
-                <a:r>
-                  <a:rPr lang="ru-RU" smtClean="0"/>
-                  <a:t>открытый ключ и </a:t>
-                </a:r>
-                <a:r>
-                  <a:rPr lang="ru-RU" dirty="0" smtClean="0"/>
-                  <a:t>пары сообщение-подпись не может сформировать новую подпись.</a:t>
-                </a:r>
-                <a:endParaRPr lang="ru-RU" dirty="0"/>
               </a:p>
             </p:txBody>
           </p:sp>
@@ -11009,17 +11544,10 @@
   <p:clrMapOvr>
     <a:masterClrMapping/>
   </p:clrMapOvr>
-  <p:timing>
-    <p:tnLst>
-      <p:par>
-        <p:cTn id="1" dur="indefinite" restart="never" nodeType="tmRoot"/>
-      </p:par>
-    </p:tnLst>
-  </p:timing>
 </p:sld>
 </file>
 
-<file path=ppt/slides/slide16.xml><?xml version="1.0" encoding="utf-8"?>
+<file path=ppt/slides/slide17.xml><?xml version="1.0" encoding="utf-8"?>
 <p:sld xmlns:a="http://schemas.openxmlformats.org/drawingml/2006/main" xmlns:r="http://schemas.openxmlformats.org/officeDocument/2006/relationships" xmlns:p="http://schemas.openxmlformats.org/presentationml/2006/main">
   <p:cSld>
     <p:spTree>
@@ -11052,18 +11580,17 @@
           <a:lstStyle/>
           <a:p>
             <a:r>
-              <a:rPr lang="ru-RU" dirty="0" smtClean="0"/>
+              <a:rPr lang="ru-RU" dirty="0"/>
               <a:t>Подпись на основе </a:t>
             </a:r>
             <a:r>
-              <a:rPr lang="en-US" dirty="0" smtClean="0"/>
+              <a:rPr lang="en-US" dirty="0"/>
               <a:t>RSA</a:t>
             </a:r>
             <a:r>
-              <a:rPr lang="ru-RU" dirty="0" smtClean="0"/>
+              <a:rPr lang="ru-RU" dirty="0"/>
               <a:t> (упрощённо)</a:t>
             </a:r>
-            <a:endParaRPr lang="ru-RU" dirty="0"/>
           </a:p>
         </p:txBody>
       </p:sp>
@@ -11090,7 +11617,7 @@
                   <a:buNone/>
                 </a:pPr>
                 <a:r>
-                  <a:rPr lang="en-US" dirty="0" smtClean="0"/>
+                  <a:rPr lang="en-US" dirty="0"/>
                   <a:t>G: </a:t>
                 </a:r>
                 <a:endParaRPr lang="ru-RU" dirty="0"/>
@@ -11404,14 +11931,14 @@
           <a:p>
             <a:fld id="{8253DDDB-F8F7-4D64-A7FD-3F3D61C1949F}" type="slidenum">
               <a:rPr lang="ru-RU" smtClean="0"/>
-              <a:t>16</a:t>
+              <a:t>17</a:t>
             </a:fld>
             <a:endParaRPr lang="ru-RU"/>
           </a:p>
         </p:txBody>
       </p:sp>
-      <mc:AlternateContent xmlns:mc="http://schemas.openxmlformats.org/markup-compatibility/2006" xmlns:a14="http://schemas.microsoft.com/office/drawing/2010/main">
-        <mc:Choice Requires="a14">
+      <mc:AlternateContent xmlns:mc="http://schemas.openxmlformats.org/markup-compatibility/2006">
+        <mc:Choice xmlns:a14="http://schemas.microsoft.com/office/drawing/2010/main" Requires="a14">
           <p:graphicFrame>
             <p:nvGraphicFramePr>
               <p:cNvPr id="5" name="Таблица 4"/>
@@ -11421,7 +11948,7 @@
               <p:nvPr>
                 <p:extLst>
                   <p:ext uri="{D42A27DB-BD31-4B8C-83A1-F6EECF244321}">
-                    <p14:modId xmlns:p14="http://schemas.microsoft.com/office/powerpoint/2010/main" val="2823993076"/>
+                    <p14:modId xmlns:p14="http://schemas.microsoft.com/office/powerpoint/2010/main" val="641385235"/>
                   </p:ext>
                 </p:extLst>
               </p:nvPr>
@@ -11518,10 +12045,10 @@
                                 </m:sSubSupPr>
                                 <m:e>
                                   <m:r>
-                                    <a:rPr lang="en-US" sz="2400" i="1">
+                                    <a:rPr lang="ru-RU" sz="2400" b="0" i="1" smtClean="0">
                                       <a:latin typeface="Cambria Math" panose="02040503050406030204" pitchFamily="18" charset="0"/>
                                     </a:rPr>
-                                    <m:t>𝑍</m:t>
+                                    <m:t>ℤ</m:t>
                                   </m:r>
                                 </m:e>
                                 <m:sub>
@@ -11557,10 +12084,10 @@
                                 </m:sSubSupPr>
                                 <m:e>
                                   <m:r>
-                                    <a:rPr lang="en-US" sz="2400" i="1">
+                                    <a:rPr lang="ru-RU" sz="2400" b="0" i="1" smtClean="0">
                                       <a:latin typeface="Cambria Math" panose="02040503050406030204" pitchFamily="18" charset="0"/>
                                     </a:rPr>
-                                    <m:t>𝑍</m:t>
+                                    <m:t>ℤ</m:t>
                                   </m:r>
                                 </m:e>
                                 <m:sub>
@@ -11724,10 +12251,10 @@
                                     <m:t>:</m:t>
                                   </m:r>
                                   <m:r>
-                                    <a:rPr lang="en-US" sz="2400" i="1">
+                                    <a:rPr lang="ru-RU" sz="2400" b="0" i="1" smtClean="0">
                                       <a:latin typeface="Cambria Math" panose="02040503050406030204" pitchFamily="18" charset="0"/>
                                     </a:rPr>
-                                    <m:t>𝑍</m:t>
+                                    <m:t>ℤ</m:t>
                                   </m:r>
                                 </m:e>
                                 <m:sub>
@@ -11763,10 +12290,10 @@
                                 </m:sSubSupPr>
                                 <m:e>
                                   <m:r>
-                                    <a:rPr lang="en-US" sz="2400" i="1">
+                                    <a:rPr lang="ru-RU" sz="2400" b="0" i="1" smtClean="0">
                                       <a:latin typeface="Cambria Math" panose="02040503050406030204" pitchFamily="18" charset="0"/>
                                     </a:rPr>
-                                    <m:t>𝑍</m:t>
+                                    <m:t>ℤ</m:t>
                                   </m:r>
                                 </m:e>
                                 <m:sub>
@@ -11861,7 +12388,7 @@
                             </m:oMath>
                           </a14:m>
                           <a:r>
-                            <a:rPr lang="en-US" sz="2400" b="0" i="1" dirty="0" smtClean="0">
+                            <a:rPr lang="en-US" sz="2400" b="0" i="1" dirty="0">
                               <a:latin typeface="Cambria Math" panose="02040503050406030204" pitchFamily="18" charset="0"/>
                             </a:rPr>
                             <a:t>;</a:t>
@@ -12166,7 +12693,7 @@
             </a:graphic>
           </p:graphicFrame>
         </mc:Choice>
-        <mc:Fallback xmlns="">
+        <mc:Fallback>
           <p:graphicFrame>
             <p:nvGraphicFramePr>
               <p:cNvPr id="5" name="Таблица 4"/>
@@ -12176,7 +12703,7 @@
               <p:nvPr>
                 <p:extLst>
                   <p:ext uri="{D42A27DB-BD31-4B8C-83A1-F6EECF244321}">
-                    <p14:modId xmlns:p14="http://schemas.microsoft.com/office/powerpoint/2010/main" val="2823993076"/>
+                    <p14:modId xmlns:p14="http://schemas.microsoft.com/office/powerpoint/2010/main" val="641385235"/>
                   </p:ext>
                 </p:extLst>
               </p:nvPr>
@@ -12264,17 +12791,10 @@
   <p:clrMapOvr>
     <a:masterClrMapping/>
   </p:clrMapOvr>
-  <p:timing>
-    <p:tnLst>
-      <p:par>
-        <p:cTn id="1" dur="indefinite" restart="never" nodeType="tmRoot"/>
-      </p:par>
-    </p:tnLst>
-  </p:timing>
 </p:sld>
 </file>
 
-<file path=ppt/slides/slide17.xml><?xml version="1.0" encoding="utf-8"?>
+<file path=ppt/slides/slide18.xml><?xml version="1.0" encoding="utf-8"?>
 <p:sld xmlns:a="http://schemas.openxmlformats.org/drawingml/2006/main" xmlns:r="http://schemas.openxmlformats.org/officeDocument/2006/relationships" xmlns:p="http://schemas.openxmlformats.org/presentationml/2006/main">
   <p:cSld>
     <p:spTree>
@@ -12307,19 +12827,18 @@
           <a:lstStyle/>
           <a:p>
             <a:r>
-              <a:rPr lang="en-US" dirty="0" smtClean="0"/>
+              <a:rPr lang="en-US" dirty="0"/>
               <a:t>DSA (</a:t>
             </a:r>
             <a:r>
-              <a:rPr lang="ru-RU" dirty="0" smtClean="0"/>
+              <a:rPr lang="ru-RU" dirty="0"/>
               <a:t>упрощённо)</a:t>
             </a:r>
-            <a:endParaRPr lang="ru-RU" dirty="0"/>
           </a:p>
         </p:txBody>
       </p:sp>
-      <mc:AlternateContent xmlns:mc="http://schemas.openxmlformats.org/markup-compatibility/2006" xmlns:a14="http://schemas.microsoft.com/office/drawing/2010/main">
-        <mc:Choice Requires="a14">
+      <mc:AlternateContent xmlns:mc="http://schemas.openxmlformats.org/markup-compatibility/2006">
+        <mc:Choice xmlns:a14="http://schemas.microsoft.com/office/drawing/2010/main" Requires="a14">
           <p:sp>
             <p:nvSpPr>
               <p:cNvPr id="3" name="Объект 2"/>
@@ -12357,11 +12876,7 @@
                 </a14:m>
                 <a:r>
                   <a:rPr lang="ru-RU" sz="2400" dirty="0"/>
-                  <a:t> – циклическая группа </a:t>
-                </a:r>
-                <a:r>
-                  <a:rPr lang="ru-RU" sz="2400" dirty="0" smtClean="0"/>
-                  <a:t>порядка </a:t>
+                  <a:t> – циклическая группа порядка </a:t>
                 </a:r>
                 <a14:m>
                   <m:oMath xmlns:m="http://schemas.openxmlformats.org/officeDocument/2006/math">
@@ -12374,53 +12889,70 @@
                   </m:oMath>
                 </a14:m>
                 <a:r>
-                  <a:rPr lang="en-US" sz="2400" dirty="0"/>
-                  <a:t> (</a:t>
+                  <a:rPr lang="en-US" sz="2400" b="0" i="1" dirty="0">
+                    <a:latin typeface="Cambria Math" panose="02040503050406030204" pitchFamily="18" charset="0"/>
+                  </a:rPr>
+                  <a:t>: </a:t>
+                </a:r>
+                <a14:m>
+                  <m:oMath xmlns:m="http://schemas.openxmlformats.org/officeDocument/2006/math">
+                    <m:r>
+                      <a:rPr lang="en-US" sz="2400" b="0" i="1" smtClean="0">
+                        <a:latin typeface="Cambria Math" panose="02040503050406030204" pitchFamily="18" charset="0"/>
+                      </a:rPr>
+                      <m:t>𝑝</m:t>
+                    </m:r>
+                  </m:oMath>
+                </a14:m>
+                <a:r>
+                  <a:rPr lang="ru-RU" sz="2400" b="0" i="1" dirty="0"/>
+                  <a:t> </a:t>
+                </a:r>
+                <a:r>
+                  <a:rPr lang="ru-RU" sz="2400" b="0" dirty="0"/>
+                  <a:t>– простое</a:t>
                 </a:r>
                 <a:r>
                   <a:rPr lang="ru-RU" sz="2400" dirty="0"/>
-                  <a:t>например </a:t>
+                  <a:t>, </a:t>
                 </a:r>
                 <a14:m>
                   <m:oMath xmlns:m="http://schemas.openxmlformats.org/officeDocument/2006/math">
-                    <m:sSubSup>
-                      <m:sSubSupPr>
-                        <m:ctrlPr>
-                          <a:rPr lang="en-US" sz="2400" i="1">
-                            <a:latin typeface="Cambria Math" panose="02040503050406030204" pitchFamily="18" charset="0"/>
-                          </a:rPr>
-                        </m:ctrlPr>
-                      </m:sSubSupPr>
-                      <m:e>
-                        <m:r>
-                          <a:rPr lang="en-US" sz="2400" i="1">
-                            <a:latin typeface="Cambria Math" panose="02040503050406030204" pitchFamily="18" charset="0"/>
-                          </a:rPr>
-                          <m:t>𝑍</m:t>
-                        </m:r>
-                      </m:e>
-                      <m:sub>
-                        <m:r>
-                          <a:rPr lang="en-US" sz="2400" i="1">
-                            <a:latin typeface="Cambria Math" panose="02040503050406030204" pitchFamily="18" charset="0"/>
-                          </a:rPr>
-                          <m:t>𝑝</m:t>
-                        </m:r>
-                      </m:sub>
-                      <m:sup>
-                        <m:r>
-                          <a:rPr lang="en-US" sz="2400" i="1">
-                            <a:latin typeface="Cambria Math" panose="02040503050406030204" pitchFamily="18" charset="0"/>
-                          </a:rPr>
-                          <m:t>∗</m:t>
-                        </m:r>
-                      </m:sup>
-                    </m:sSubSup>
+                    <m:r>
+                      <a:rPr lang="en-US" sz="2400" b="0" i="1" smtClean="0">
+                        <a:latin typeface="Cambria Math" panose="02040503050406030204" pitchFamily="18" charset="0"/>
+                      </a:rPr>
+                      <m:t>𝑞</m:t>
+                    </m:r>
                   </m:oMath>
                 </a14:m>
                 <a:r>
-                  <a:rPr lang="en-US" sz="2400" dirty="0"/>
-                  <a:t>)</a:t>
+                  <a:rPr lang="ru-RU" sz="2400" b="0" dirty="0">
+                    <a:latin typeface="Cambria Math" panose="02040503050406030204" pitchFamily="18" charset="0"/>
+                  </a:rPr>
+                  <a:t> делит </a:t>
+                </a:r>
+                <a14:m>
+                  <m:oMath xmlns:m="http://schemas.openxmlformats.org/officeDocument/2006/math">
+                    <m:r>
+                      <a:rPr lang="en-US" sz="2400" b="0" i="1" smtClean="0">
+                        <a:latin typeface="Cambria Math" panose="02040503050406030204" pitchFamily="18" charset="0"/>
+                      </a:rPr>
+                      <m:t>𝑝</m:t>
+                    </m:r>
+                    <m:r>
+                      <a:rPr lang="en-US" sz="2400" b="0" i="1" smtClean="0">
+                        <a:latin typeface="Cambria Math" panose="02040503050406030204" pitchFamily="18" charset="0"/>
+                      </a:rPr>
+                      <m:t>−1</m:t>
+                    </m:r>
+                  </m:oMath>
+                </a14:m>
+                <a:r>
+                  <a:rPr lang="ru-RU" sz="2400" b="0" dirty="0">
+                    <a:latin typeface="Cambria Math" panose="02040503050406030204" pitchFamily="18" charset="0"/>
+                  </a:rPr>
+                  <a:t>.</a:t>
                 </a:r>
               </a:p>
               <a:p>
@@ -12435,59 +12967,20 @@
                       </a:rPr>
                       <m:t>𝐻</m:t>
                     </m:r>
-                    <m:r>
-                      <a:rPr lang="en-US" sz="2400" i="1">
-                        <a:latin typeface="Cambria Math" panose="02040503050406030204" pitchFamily="18" charset="0"/>
-                      </a:rPr>
-                      <m:t>:</m:t>
-                    </m:r>
-                    <m:sSup>
-                      <m:sSupPr>
-                        <m:ctrlPr>
-                          <a:rPr lang="en-US" sz="2400" i="1">
-                            <a:latin typeface="Cambria Math" panose="02040503050406030204" pitchFamily="18" charset="0"/>
-                          </a:rPr>
-                        </m:ctrlPr>
-                      </m:sSupPr>
-                      <m:e>
-                        <m:r>
-                          <a:rPr lang="en-US" sz="2400" i="1">
-                            <a:latin typeface="Cambria Math" panose="02040503050406030204" pitchFamily="18" charset="0"/>
-                          </a:rPr>
-                          <m:t>𝐺</m:t>
-                        </m:r>
-                      </m:e>
-                      <m:sup>
-                        <m:r>
-                          <a:rPr lang="en-US" sz="2400" i="1">
-                            <a:latin typeface="Cambria Math" panose="02040503050406030204" pitchFamily="18" charset="0"/>
-                          </a:rPr>
-                          <m:t>2</m:t>
-                        </m:r>
-                      </m:sup>
-                    </m:sSup>
-                    <m:r>
-                      <a:rPr lang="en-US" sz="2400" i="1">
-                        <a:latin typeface="Cambria Math" panose="02040503050406030204" pitchFamily="18" charset="0"/>
-                      </a:rPr>
-                      <m:t>→</m:t>
-                    </m:r>
-                    <m:r>
-                      <a:rPr lang="en-US" sz="2400" i="1">
-                        <a:latin typeface="Cambria Math" panose="02040503050406030204" pitchFamily="18" charset="0"/>
-                      </a:rPr>
-                      <m:t>𝐾</m:t>
-                    </m:r>
                   </m:oMath>
                 </a14:m>
                 <a:r>
-                  <a:rPr lang="en-US" sz="2400" dirty="0"/>
-                  <a:t> – </a:t>
+                  <a:rPr lang="ru-RU" sz="2400" dirty="0"/>
+                  <a:t> – хэш-функция</a:t>
                 </a:r>
-                <a:r>
-                  <a:rPr lang="ru-RU" sz="2400" dirty="0"/>
-                  <a:t>хэш-функция</a:t>
-                </a:r>
+              </a:p>
+              <a:p>
+                <a:pPr marL="0" indent="0">
+                  <a:buNone/>
+                </a:pPr>
+                <a:endParaRPr lang="ru-RU" sz="2400" b="1" i="1" dirty="0">
+                  <a:latin typeface="Cambria Math" panose="02040503050406030204" pitchFamily="18" charset="0"/>
+                </a:endParaRPr>
               </a:p>
               <a:p>
                 <a:pPr marL="0" indent="0">
@@ -12566,37 +13059,62 @@
                         </a:rPr>
                         <m:t>𝑎</m:t>
                       </m:r>
-                      <m:r>
-                        <a:rPr lang="en-US" sz="2400" i="1">
-                          <a:latin typeface="Cambria Math" panose="02040503050406030204" pitchFamily="18" charset="0"/>
-                        </a:rPr>
-                        <m:t>←</m:t>
-                      </m:r>
-                      <m:sSub>
-                        <m:sSubPr>
+                      <m:sSup>
+                        <m:sSupPr>
                           <m:ctrlPr>
                             <a:rPr lang="en-US" sz="2400" i="1">
                               <a:latin typeface="Cambria Math" panose="02040503050406030204" pitchFamily="18" charset="0"/>
                             </a:rPr>
                           </m:ctrlPr>
-                        </m:sSubPr>
+                        </m:sSupPr>
                         <m:e>
                           <m:r>
+                            <a:rPr lang="en-US" sz="2400">
+                              <a:latin typeface="Cambria Math" panose="02040503050406030204" pitchFamily="18" charset="0"/>
+                            </a:rPr>
+                            <m:t>←</m:t>
+                          </m:r>
+                        </m:e>
+                        <m:sup>
+                          <m:r>
+                            <a:rPr lang="en-US" sz="2400">
+                              <a:latin typeface="Cambria Math" panose="02040503050406030204" pitchFamily="18" charset="0"/>
+                            </a:rPr>
+                            <m:t>𝑅</m:t>
+                          </m:r>
+                        </m:sup>
+                      </m:sSup>
+                      <m:d>
+                        <m:dPr>
+                          <m:begChr m:val="{"/>
+                          <m:endChr m:val="}"/>
+                          <m:ctrlPr>
                             <a:rPr lang="en-US" sz="2400" i="1">
                               <a:latin typeface="Cambria Math" panose="02040503050406030204" pitchFamily="18" charset="0"/>
                             </a:rPr>
-                            <m:t>𝑍</m:t>
+                          </m:ctrlPr>
+                        </m:dPr>
+                        <m:e>
+                          <m:r>
+                            <a:rPr lang="en-US" sz="2400">
+                              <a:latin typeface="Cambria Math" panose="02040503050406030204" pitchFamily="18" charset="0"/>
+                            </a:rPr>
+                            <m:t>1..</m:t>
+                          </m:r>
+                          <m:r>
+                            <a:rPr lang="en-US" sz="2400">
+                              <a:latin typeface="Cambria Math" panose="02040503050406030204" pitchFamily="18" charset="0"/>
+                            </a:rPr>
+                            <m:t>𝑞</m:t>
+                          </m:r>
+                          <m:r>
+                            <a:rPr lang="en-US" sz="2400">
+                              <a:latin typeface="Cambria Math" panose="02040503050406030204" pitchFamily="18" charset="0"/>
+                            </a:rPr>
+                            <m:t>−1</m:t>
                           </m:r>
                         </m:e>
-                        <m:sub>
-                          <m:r>
-                            <a:rPr lang="en-US" sz="2400" i="1">
-                              <a:latin typeface="Cambria Math" panose="02040503050406030204" pitchFamily="18" charset="0"/>
-                            </a:rPr>
-                            <m:t>𝑛</m:t>
-                          </m:r>
-                        </m:sub>
-                      </m:sSub>
+                      </m:d>
                       <m:r>
                         <a:rPr lang="en-US" sz="2400" i="1">
                           <a:latin typeface="Cambria Math" panose="02040503050406030204" pitchFamily="18" charset="0"/>
@@ -12697,7 +13215,7 @@
                     </m:oMath>
                   </m:oMathPara>
                 </a14:m>
-                <a:endParaRPr lang="en-US" sz="2400" dirty="0" smtClean="0"/>
+                <a:endParaRPr lang="en-US" sz="2400" dirty="0"/>
               </a:p>
               <a:p>
                 <a:pPr marL="0" indent="0">
@@ -12708,7 +13226,7 @@
             </p:txBody>
           </p:sp>
         </mc:Choice>
-        <mc:Fallback xmlns="">
+        <mc:Fallback>
           <p:sp>
             <p:nvSpPr>
               <p:cNvPr id="3" name="Объект 2"/>
@@ -12727,7 +13245,7 @@
               <a:blipFill>
                 <a:blip r:embed="rId2"/>
                 <a:stretch>
-                  <a:fillRect l="-174" t="-1519"/>
+                  <a:fillRect l="-174" t="-2025"/>
                 </a:stretch>
               </a:blipFill>
             </p:spPr>
@@ -12763,14 +13281,14 @@
           <a:p>
             <a:fld id="{8253DDDB-F8F7-4D64-A7FD-3F3D61C1949F}" type="slidenum">
               <a:rPr lang="ru-RU" smtClean="0"/>
-              <a:t>17</a:t>
+              <a:t>18</a:t>
             </a:fld>
             <a:endParaRPr lang="ru-RU"/>
           </a:p>
         </p:txBody>
       </p:sp>
-      <mc:AlternateContent xmlns:mc="http://schemas.openxmlformats.org/markup-compatibility/2006" xmlns:a14="http://schemas.microsoft.com/office/drawing/2010/main">
-        <mc:Choice Requires="a14">
+      <mc:AlternateContent xmlns:mc="http://schemas.openxmlformats.org/markup-compatibility/2006">
+        <mc:Choice xmlns:a14="http://schemas.microsoft.com/office/drawing/2010/main" Requires="a14">
           <p:graphicFrame>
             <p:nvGraphicFramePr>
               <p:cNvPr id="5" name="Таблица 4"/>
@@ -12780,7 +13298,7 @@
               <p:nvPr>
                 <p:extLst>
                   <p:ext uri="{D42A27DB-BD31-4B8C-83A1-F6EECF244321}">
-                    <p14:modId xmlns:p14="http://schemas.microsoft.com/office/powerpoint/2010/main" val="2802555580"/>
+                    <p14:modId xmlns:p14="http://schemas.microsoft.com/office/powerpoint/2010/main" val="1213281164"/>
                   </p:ext>
                 </p:extLst>
               </p:nvPr>
@@ -12882,7 +13400,7 @@
                               </m:oMath>
                             </m:oMathPara>
                           </a14:m>
-                          <a:endParaRPr lang="en-US" sz="2400" dirty="0" smtClean="0"/>
+                          <a:endParaRPr lang="en-US" sz="2400" dirty="0"/>
                         </a:p>
                         <a:p>
                           <a:pPr marL="0" indent="0">
@@ -12959,7 +13477,7 @@
                               </m:oMath>
                             </m:oMathPara>
                           </a14:m>
-                          <a:endParaRPr lang="en-US" sz="2400" dirty="0" smtClean="0"/>
+                          <a:endParaRPr lang="en-US" sz="2400" dirty="0"/>
                         </a:p>
                         <a:p>
                           <a:pPr marL="0" indent="0">
@@ -13030,13 +13548,10 @@
                                   <m:t> </m:t>
                                 </m:r>
                                 <m:r>
-                                  <m:rPr>
-                                    <m:sty m:val="p"/>
-                                  </m:rPr>
-                                  <a:rPr lang="en-US" sz="2400" smtClean="0">
+                                  <a:rPr lang="en-US" sz="2400" i="1" smtClean="0">
                                     <a:latin typeface="Cambria Math" panose="02040503050406030204" pitchFamily="18" charset="0"/>
                                   </a:rPr>
-                                  <m:t>p</m:t>
+                                  <m:t>𝑝</m:t>
                                 </m:r>
                                 <m:r>
                                   <a:rPr lang="en-US" sz="2400" smtClean="0">
@@ -13060,13 +13575,10 @@
                                   <m:t> </m:t>
                                 </m:r>
                                 <m:r>
-                                  <m:rPr>
-                                    <m:sty m:val="p"/>
-                                  </m:rPr>
-                                  <a:rPr lang="en-US" sz="2400" smtClean="0">
+                                  <a:rPr lang="en-US" sz="2400" i="1" smtClean="0">
                                     <a:latin typeface="Cambria Math" panose="02040503050406030204" pitchFamily="18" charset="0"/>
                                   </a:rPr>
-                                  <m:t>q</m:t>
+                                  <m:t>𝑞</m:t>
                                 </m:r>
                                 <m:r>
                                   <a:rPr lang="en-US" sz="2400" smtClean="0">
@@ -13077,7 +13589,7 @@
                               </m:oMath>
                             </m:oMathPara>
                           </a14:m>
-                          <a:endParaRPr lang="en-US" sz="2400" dirty="0" smtClean="0"/>
+                          <a:endParaRPr lang="en-US" sz="2400" dirty="0"/>
                         </a:p>
                         <a:p>
                           <a:pPr marL="0" indent="0">
@@ -13177,7 +13689,7 @@
                             </m:oMath>
                           </a14:m>
                           <a:r>
-                            <a:rPr lang="en-US" sz="2400" dirty="0" smtClean="0"/>
+                            <a:rPr lang="en-US" sz="2400" dirty="0"/>
                             <a:t> </a:t>
                           </a:r>
                           <a14:m>
@@ -13204,13 +13716,10 @@
                                 <m:t> </m:t>
                               </m:r>
                               <m:r>
-                                <m:rPr>
-                                  <m:sty m:val="p"/>
-                                </m:rPr>
-                                <a:rPr lang="en-US" sz="2400">
+                                <a:rPr lang="en-US" sz="2400" i="1">
                                   <a:latin typeface="Cambria Math" panose="02040503050406030204" pitchFamily="18" charset="0"/>
                                 </a:rPr>
-                                <m:t>q</m:t>
+                                <m:t>𝑞</m:t>
                               </m:r>
                               <m:r>
                                 <a:rPr lang="en-US" sz="2400">
@@ -13220,7 +13729,7 @@
                               </m:r>
                             </m:oMath>
                           </a14:m>
-                          <a:endParaRPr lang="en-US" sz="2400" dirty="0" smtClean="0"/>
+                          <a:endParaRPr lang="en-US" sz="2400" dirty="0"/>
                         </a:p>
                         <a:p>
                           <a:pPr marL="0" indent="0">
@@ -13267,7 +13776,7 @@
                             </m:oMath>
                           </a14:m>
                           <a:r>
-                            <a:rPr lang="en-US" sz="2400" dirty="0" smtClean="0"/>
+                            <a:rPr lang="en-US" sz="2400" dirty="0"/>
                             <a:t> </a:t>
                           </a:r>
                           <a14:m>
@@ -13294,13 +13803,10 @@
                                 <m:t> </m:t>
                               </m:r>
                               <m:r>
-                                <m:rPr>
-                                  <m:sty m:val="p"/>
-                                </m:rPr>
-                                <a:rPr lang="en-US" sz="2400">
+                                <a:rPr lang="en-US" sz="2400" i="1">
                                   <a:latin typeface="Cambria Math" panose="02040503050406030204" pitchFamily="18" charset="0"/>
                                 </a:rPr>
-                                <m:t>q</m:t>
+                                <m:t>𝑞</m:t>
                               </m:r>
                               <m:r>
                                 <a:rPr lang="en-US" sz="2400">
@@ -13449,7 +13955,7 @@
                               </m:oMath>
                             </m:oMathPara>
                           </a14:m>
-                          <a:endParaRPr lang="en-US" sz="2400" dirty="0" smtClean="0"/>
+                          <a:endParaRPr lang="en-US" sz="2400" dirty="0"/>
                         </a:p>
                         <a:p>
                           <a:pPr marL="0" indent="0">
@@ -13528,7 +14034,7 @@
                               </m:oMath>
                             </m:oMathPara>
                           </a14:m>
-                          <a:endParaRPr lang="en-US" sz="2400" dirty="0" smtClean="0"/>
+                          <a:endParaRPr lang="en-US" sz="2400" dirty="0"/>
                         </a:p>
                         <a:p>
                           <a:pPr marL="0" indent="0">
@@ -13630,7 +14136,7 @@
                               </m:oMath>
                             </m:oMathPara>
                           </a14:m>
-                          <a:endParaRPr lang="en-US" sz="2400" dirty="0" smtClean="0"/>
+                          <a:endParaRPr lang="en-US" sz="2400" dirty="0"/>
                         </a:p>
                         <a:p>
                           <a:pPr marL="0" indent="0">
@@ -13709,7 +14215,7 @@
                               </m:oMath>
                             </m:oMathPara>
                           </a14:m>
-                          <a:endParaRPr lang="en-US" sz="2400" dirty="0" smtClean="0"/>
+                          <a:endParaRPr lang="en-US" sz="2400" dirty="0"/>
                         </a:p>
                         <a:p>
                           <a:pPr marL="0" indent="0">
@@ -13837,10 +14343,13 @@
                                       <m:t> </m:t>
                                     </m:r>
                                     <m:r>
-                                      <a:rPr lang="en-US" sz="2400" smtClean="0">
+                                      <m:rPr>
+                                        <m:sty m:val="p"/>
+                                      </m:rPr>
+                                      <a:rPr lang="en-US" sz="2400" i="0" smtClean="0">
                                         <a:latin typeface="Cambria Math" panose="02040503050406030204" pitchFamily="18" charset="0"/>
                                       </a:rPr>
-                                      <m:t>𝑚𝑜𝑑</m:t>
+                                      <m:t>mod</m:t>
                                     </m:r>
                                     <m:r>
                                       <a:rPr lang="en-US" sz="2400" smtClean="0">
@@ -13886,7 +14395,7 @@
                               </m:oMath>
                             </m:oMathPara>
                           </a14:m>
-                          <a:endParaRPr lang="en-US" sz="2400" dirty="0" smtClean="0"/>
+                          <a:endParaRPr lang="en-US" sz="2400" dirty="0"/>
                         </a:p>
                         <a:p>
                           <a:pPr marL="0" indent="0">
@@ -13938,7 +14447,7 @@
             </a:graphic>
           </p:graphicFrame>
         </mc:Choice>
-        <mc:Fallback xmlns="">
+        <mc:Fallback>
           <p:graphicFrame>
             <p:nvGraphicFramePr>
               <p:cNvPr id="5" name="Таблица 4"/>
@@ -13948,14 +14457,14 @@
               <p:nvPr>
                 <p:extLst>
                   <p:ext uri="{D42A27DB-BD31-4B8C-83A1-F6EECF244321}">
-                    <p14:modId xmlns:p14="http://schemas.microsoft.com/office/powerpoint/2010/main" val="2802555580"/>
+                    <p14:modId xmlns:p14="http://schemas.microsoft.com/office/powerpoint/2010/main" val="1213281164"/>
                   </p:ext>
                 </p:extLst>
               </p:nvPr>
             </p:nvGraphicFramePr>
             <p:xfrm>
               <a:off x="838198" y="3814558"/>
-              <a:ext cx="10618178" cy="2660015"/>
+              <a:ext cx="10618178" cy="2651760"/>
             </p:xfrm>
             <a:graphic>
               <a:graphicData uri="http://schemas.openxmlformats.org/drawingml/2006/table">
@@ -13979,7 +14488,7 @@
                       </a:extLst>
                     </a:gridCol>
                   </a:tblGrid>
-                  <a:tr h="2660015">
+                  <a:tr h="2651760">
                     <a:tc>
                       <a:txBody>
                         <a:bodyPr/>
@@ -13992,7 +14501,7 @@
                         <a:blipFill>
                           <a:blip r:embed="rId3"/>
                           <a:stretch>
-                            <a:fillRect l="-115" t="-228" r="-100115" b="-457"/>
+                            <a:fillRect l="-115" t="-229" r="-100115" b="-459"/>
                           </a:stretch>
                         </a:blipFill>
                       </a:tcPr>
@@ -14009,7 +14518,7 @@
                         <a:blipFill>
                           <a:blip r:embed="rId3"/>
                           <a:stretch>
-                            <a:fillRect l="-100230" t="-228" r="-230" b="-457"/>
+                            <a:fillRect l="-100230" t="-229" r="-230" b="-459"/>
                           </a:stretch>
                         </a:blipFill>
                       </a:tcPr>
@@ -14036,172 +14545,6 @@
   <p:clrMapOvr>
     <a:masterClrMapping/>
   </p:clrMapOvr>
-  <p:timing>
-    <p:tnLst>
-      <p:par>
-        <p:cTn id="1" dur="indefinite" restart="never" nodeType="tmRoot"/>
-      </p:par>
-    </p:tnLst>
-  </p:timing>
-</p:sld>
-</file>
-
-<file path=ppt/slides/slide18.xml><?xml version="1.0" encoding="utf-8"?>
-<p:sld xmlns:a="http://schemas.openxmlformats.org/drawingml/2006/main" xmlns:r="http://schemas.openxmlformats.org/officeDocument/2006/relationships" xmlns:p="http://schemas.openxmlformats.org/presentationml/2006/main">
-  <p:cSld>
-    <p:spTree>
-      <p:nvGrpSpPr>
-        <p:cNvPr id="1" name=""/>
-        <p:cNvGrpSpPr/>
-        <p:nvPr/>
-      </p:nvGrpSpPr>
-      <p:grpSpPr>
-        <a:xfrm>
-          <a:off x="0" y="0"/>
-          <a:ext cx="0" cy="0"/>
-          <a:chOff x="0" y="0"/>
-          <a:chExt cx="0" cy="0"/>
-        </a:xfrm>
-      </p:grpSpPr>
-      <p:sp>
-        <p:nvSpPr>
-          <p:cNvPr id="2" name="Заголовок 1"/>
-          <p:cNvSpPr>
-            <a:spLocks noGrp="1"/>
-          </p:cNvSpPr>
-          <p:nvPr>
-            <p:ph type="title"/>
-          </p:nvPr>
-        </p:nvSpPr>
-        <p:spPr/>
-        <p:txBody>
-          <a:bodyPr/>
-          <a:lstStyle/>
-          <a:p>
-            <a:r>
-              <a:rPr lang="ru-RU" dirty="0" smtClean="0"/>
-              <a:t>Стойкость </a:t>
-            </a:r>
-            <a:r>
-              <a:rPr lang="en-US" dirty="0" smtClean="0"/>
-              <a:t>RSA </a:t>
-            </a:r>
-            <a:r>
-              <a:rPr lang="ru-RU" dirty="0" smtClean="0"/>
-              <a:t>и Эль-</a:t>
-            </a:r>
-            <a:r>
-              <a:rPr lang="ru-RU" dirty="0" err="1" smtClean="0"/>
-              <a:t>Гамаля</a:t>
-            </a:r>
-            <a:endParaRPr lang="ru-RU" dirty="0"/>
-          </a:p>
-        </p:txBody>
-      </p:sp>
-      <p:sp>
-        <p:nvSpPr>
-          <p:cNvPr id="3" name="Объект 2"/>
-          <p:cNvSpPr>
-            <a:spLocks noGrp="1"/>
-          </p:cNvSpPr>
-          <p:nvPr>
-            <p:ph idx="1"/>
-          </p:nvPr>
-        </p:nvSpPr>
-        <p:spPr/>
-        <p:txBody>
-          <a:bodyPr/>
-          <a:lstStyle/>
-          <a:p>
-            <a:r>
-              <a:rPr lang="ru-RU" dirty="0" smtClean="0"/>
-              <a:t>Стойкость Эль-</a:t>
-            </a:r>
-            <a:r>
-              <a:rPr lang="ru-RU" dirty="0" err="1" smtClean="0"/>
-              <a:t>Гамаля</a:t>
-            </a:r>
-            <a:r>
-              <a:rPr lang="ru-RU" dirty="0" smtClean="0"/>
-              <a:t> сводится к стойкости одного из предположений о стойкости </a:t>
-            </a:r>
-            <a:r>
-              <a:rPr lang="ru-RU" dirty="0" err="1" smtClean="0"/>
-              <a:t>Диффи-Хеллмана</a:t>
-            </a:r>
-            <a:r>
-              <a:rPr lang="ru-RU" dirty="0" smtClean="0"/>
-              <a:t> (</a:t>
-            </a:r>
-            <a:r>
-              <a:rPr lang="en-US" dirty="0" smtClean="0"/>
-              <a:t>Hash-DH</a:t>
-            </a:r>
-            <a:r>
-              <a:rPr lang="ru-RU" dirty="0" smtClean="0"/>
-              <a:t>), которая может быть сведена к задаче нахождения дискретного логарифма.</a:t>
-            </a:r>
-          </a:p>
-          <a:p>
-            <a:endParaRPr lang="ru-RU" dirty="0"/>
-          </a:p>
-          <a:p>
-            <a:r>
-              <a:rPr lang="ru-RU" dirty="0" smtClean="0"/>
-              <a:t>Стойкость </a:t>
-            </a:r>
-            <a:r>
-              <a:rPr lang="en-US" dirty="0" smtClean="0"/>
-              <a:t>RSA </a:t>
-            </a:r>
-            <a:r>
-              <a:rPr lang="ru-RU" dirty="0" smtClean="0"/>
-              <a:t>сводится к сложности задачи нахождения дискретного логарифма, которая сводится к задаче факторизации больших целых чисел.</a:t>
-            </a:r>
-            <a:endParaRPr lang="ru-RU" dirty="0"/>
-          </a:p>
-        </p:txBody>
-      </p:sp>
-      <p:sp>
-        <p:nvSpPr>
-          <p:cNvPr id="4" name="Номер слайда 3"/>
-          <p:cNvSpPr>
-            <a:spLocks noGrp="1"/>
-          </p:cNvSpPr>
-          <p:nvPr>
-            <p:ph type="sldNum" sz="quarter" idx="12"/>
-          </p:nvPr>
-        </p:nvSpPr>
-        <p:spPr/>
-        <p:txBody>
-          <a:bodyPr/>
-          <a:lstStyle/>
-          <a:p>
-            <a:fld id="{8253DDDB-F8F7-4D64-A7FD-3F3D61C1949F}" type="slidenum">
-              <a:rPr lang="ru-RU" smtClean="0"/>
-              <a:t>18</a:t>
-            </a:fld>
-            <a:endParaRPr lang="ru-RU"/>
-          </a:p>
-        </p:txBody>
-      </p:sp>
-    </p:spTree>
-    <p:extLst>
-      <p:ext uri="{BB962C8B-B14F-4D97-AF65-F5344CB8AC3E}">
-        <p14:creationId xmlns:p14="http://schemas.microsoft.com/office/powerpoint/2010/main" val="532519201"/>
-      </p:ext>
-    </p:extLst>
-  </p:cSld>
-  <p:clrMapOvr>
-    <a:masterClrMapping/>
-  </p:clrMapOvr>
-  <p:timing>
-    <p:tnLst>
-      <p:par>
-        <p:cTn id="1" dur="indefinite" restart="never" nodeType="tmRoot"/>
-      </p:par>
-    </p:tnLst>
-  </p:timing>
 </p:sld>
 </file>
 
@@ -14238,20 +14581,20 @@
           <a:lstStyle/>
           <a:p>
             <a:r>
-              <a:rPr lang="ru-RU" dirty="0" smtClean="0"/>
-              <a:t>Группа точек </a:t>
-            </a:r>
-            <a:r>
-              <a:rPr lang="ru-RU" dirty="0" smtClean="0"/>
-              <a:t>эллиптическ</a:t>
-            </a:r>
-            <a:r>
-              <a:rPr lang="ru-RU" dirty="0" smtClean="0"/>
-              <a:t>ой</a:t>
-            </a:r>
-            <a:r>
-              <a:rPr lang="ru-RU" dirty="0" smtClean="0"/>
-              <a:t> кривой</a:t>
+              <a:rPr lang="ru-RU" dirty="0"/>
+              <a:t>Стойкость </a:t>
+            </a:r>
+            <a:r>
+              <a:rPr lang="en-US" dirty="0"/>
+              <a:t>RSA </a:t>
+            </a:r>
+            <a:r>
+              <a:rPr lang="ru-RU" dirty="0"/>
+              <a:t>и Эль-</a:t>
+            </a:r>
+            <a:r>
+              <a:rPr lang="ru-RU" dirty="0" err="1"/>
+              <a:t>Гамаля</a:t>
             </a:r>
             <a:endParaRPr lang="ru-RU" dirty="0"/>
           </a:p>
@@ -14272,53 +14615,51 @@
           <a:bodyPr/>
           <a:lstStyle/>
           <a:p>
-            <a:pPr marL="0" indent="0">
-              <a:buNone/>
-            </a:pPr>
-            <a:r>
-              <a:rPr lang="ru-RU" dirty="0" smtClean="0"/>
-              <a:t>Минус мультипликативных циклических групп – большой размер параметров, при которых криптосистемы на их основе становятся стойкими.</a:t>
-            </a:r>
             <a:r>
               <a:rPr lang="ru-RU" dirty="0"/>
-              <a:t> </a:t>
-            </a:r>
-            <a:r>
-              <a:rPr lang="ru-RU" dirty="0" smtClean="0"/>
-              <a:t>Как следствие – большой размер ключей, подписей, </a:t>
-            </a:r>
-            <a:r>
-              <a:rPr lang="ru-RU" dirty="0" err="1" smtClean="0"/>
-              <a:t>шифртекстов</a:t>
-            </a:r>
-            <a:r>
-              <a:rPr lang="ru-RU" dirty="0" smtClean="0"/>
-              <a:t>.</a:t>
-            </a:r>
-          </a:p>
-          <a:p>
-            <a:pPr marL="0" indent="0">
-              <a:buNone/>
-            </a:pPr>
+              <a:t>Стойкость Эль-</a:t>
+            </a:r>
+            <a:r>
+              <a:rPr lang="ru-RU" dirty="0" err="1"/>
+              <a:t>Гамаля</a:t>
+            </a:r>
+            <a:r>
+              <a:rPr lang="ru-RU" dirty="0"/>
+              <a:t> сводится к стойкости одного из предположений о стойкости </a:t>
+            </a:r>
+            <a:r>
+              <a:rPr lang="ru-RU" dirty="0" err="1"/>
+              <a:t>Диффи-Хеллмана</a:t>
+            </a:r>
+            <a:r>
+              <a:rPr lang="ru-RU" dirty="0"/>
+              <a:t> (</a:t>
+            </a:r>
+            <a:r>
+              <a:rPr lang="en-US" dirty="0"/>
+              <a:t>Hash-DH</a:t>
+            </a:r>
+            <a:r>
+              <a:rPr lang="ru-RU" dirty="0"/>
+              <a:t>), которая может быть сведена к задаче нахождения дискретного логарифма.</a:t>
+            </a:r>
+          </a:p>
+          <a:p>
             <a:endParaRPr lang="ru-RU" dirty="0"/>
           </a:p>
           <a:p>
-            <a:pPr marL="0" indent="0">
-              <a:buNone/>
-            </a:pPr>
-            <a:r>
-              <a:rPr lang="ru-RU" dirty="0" smtClean="0"/>
-              <a:t>Если ли группы, элементы в которых имеют меньший размер, но для которых выполняется предположение о сложности нахождения дискретного логарифма и решении задач </a:t>
-            </a:r>
-            <a:r>
-              <a:rPr lang="ru-RU" dirty="0" err="1" smtClean="0"/>
-              <a:t>Диффи-Хеллмана</a:t>
-            </a:r>
-            <a:r>
-              <a:rPr lang="ru-RU" dirty="0" smtClean="0"/>
-              <a:t>?</a:t>
-            </a:r>
-            <a:endParaRPr lang="ru-RU" dirty="0"/>
+            <a:r>
+              <a:rPr lang="ru-RU" dirty="0"/>
+              <a:t>Стойкость </a:t>
+            </a:r>
+            <a:r>
+              <a:rPr lang="en-US" dirty="0"/>
+              <a:t>RSA </a:t>
+            </a:r>
+            <a:r>
+              <a:rPr lang="ru-RU" dirty="0"/>
+              <a:t>сводится к сложности задачи нахождения дискретного логарифма, которая сводится к задаче факторизации больших целых чисел.</a:t>
+            </a:r>
           </a:p>
         </p:txBody>
       </p:sp>
@@ -14348,20 +14689,13 @@
     </p:spTree>
     <p:extLst>
       <p:ext uri="{BB962C8B-B14F-4D97-AF65-F5344CB8AC3E}">
-        <p14:creationId xmlns:p14="http://schemas.microsoft.com/office/powerpoint/2010/main" val="3103673760"/>
+        <p14:creationId xmlns:p14="http://schemas.microsoft.com/office/powerpoint/2010/main" val="532519201"/>
       </p:ext>
     </p:extLst>
   </p:cSld>
   <p:clrMapOvr>
     <a:masterClrMapping/>
   </p:clrMapOvr>
-  <p:timing>
-    <p:tnLst>
-      <p:par>
-        <p:cTn id="1" dur="indefinite" restart="never" nodeType="tmRoot"/>
-      </p:par>
-    </p:tnLst>
-  </p:timing>
 </p:sld>
 </file>
 
@@ -14398,10 +14732,9 @@
           <a:lstStyle/>
           <a:p>
             <a:r>
-              <a:rPr lang="ru-RU" dirty="0" smtClean="0"/>
+              <a:rPr lang="ru-RU" dirty="0"/>
               <a:t>Аутентифицированное шифрование</a:t>
             </a:r>
-            <a:endParaRPr lang="ru-RU" dirty="0"/>
           </a:p>
         </p:txBody>
       </p:sp>
@@ -14428,38 +14761,38 @@
           <a:lstStyle/>
           <a:p>
             <a:r>
-              <a:rPr lang="ru-RU" dirty="0" smtClean="0"/>
+              <a:rPr lang="ru-RU" dirty="0"/>
               <a:t>Предполагается наличие </a:t>
             </a:r>
             <a:r>
-              <a:rPr lang="ru-RU" b="1" dirty="0" smtClean="0"/>
+              <a:rPr lang="ru-RU" b="1" dirty="0"/>
               <a:t>общего секретного ключа</a:t>
             </a:r>
           </a:p>
           <a:p>
             <a:r>
-              <a:rPr lang="ru-RU" dirty="0" smtClean="0"/>
+              <a:rPr lang="ru-RU" dirty="0"/>
               <a:t>Пассивный противник не может расшифровать сообщения</a:t>
             </a:r>
           </a:p>
           <a:p>
             <a:r>
-              <a:rPr lang="ru-RU" dirty="0" smtClean="0"/>
+              <a:rPr lang="ru-RU" dirty="0"/>
               <a:t>Активный противник не может вставлять или изменять сообщения в канале</a:t>
             </a:r>
-            <a:endParaRPr lang="en-US" dirty="0" smtClean="0"/>
-          </a:p>
-          <a:p>
-            <a:r>
-              <a:rPr lang="ru-RU" dirty="0" smtClean="0"/>
+            <a:endParaRPr lang="en-US" dirty="0"/>
+          </a:p>
+          <a:p>
+            <a:r>
+              <a:rPr lang="ru-RU" dirty="0"/>
               <a:t>Целостность </a:t>
             </a:r>
             <a:r>
-              <a:rPr lang="ru-RU" dirty="0" err="1" smtClean="0"/>
+              <a:rPr lang="ru-RU" dirty="0" err="1"/>
               <a:t>шифртекстов</a:t>
             </a:r>
             <a:r>
-              <a:rPr lang="ru-RU" dirty="0" smtClean="0"/>
+              <a:rPr lang="ru-RU" dirty="0"/>
               <a:t> обеспечивает целостность открытых текстов</a:t>
             </a:r>
           </a:p>
@@ -14558,10 +14891,9 @@
           <a:p>
             <a:pPr algn="ctr"/>
             <a:r>
-              <a:rPr lang="en-US" sz="2400" dirty="0" smtClean="0"/>
+              <a:rPr lang="en-US" sz="2400" dirty="0"/>
               <a:t>Alice</a:t>
             </a:r>
-            <a:endParaRPr lang="en-US" sz="2400" dirty="0"/>
           </a:p>
         </p:txBody>
       </p:sp>
@@ -14600,10 +14932,9 @@
           <a:p>
             <a:pPr algn="ctr"/>
             <a:r>
-              <a:rPr lang="en-US" sz="2400" dirty="0" smtClean="0"/>
+              <a:rPr lang="en-US" sz="2400" dirty="0"/>
               <a:t>Bob</a:t>
             </a:r>
-            <a:endParaRPr lang="en-US" sz="2400" dirty="0"/>
           </a:p>
         </p:txBody>
       </p:sp>
@@ -14630,18 +14961,13 @@
           <a:lstStyle/>
           <a:p>
             <a:r>
-              <a:rPr lang="en-US" sz="2400" b="1" i="1" dirty="0" smtClean="0">
+              <a:rPr lang="en-US" sz="2400" b="1" i="1" dirty="0">
                 <a:solidFill>
                   <a:srgbClr val="FF0000"/>
                 </a:solidFill>
               </a:rPr>
               <a:t>k</a:t>
             </a:r>
-            <a:endParaRPr lang="en-US" sz="2400" b="1" i="1" dirty="0">
-              <a:solidFill>
-                <a:srgbClr val="FF0000"/>
-              </a:solidFill>
-            </a:endParaRPr>
           </a:p>
         </p:txBody>
       </p:sp>
@@ -14668,18 +14994,13 @@
           <a:lstStyle/>
           <a:p>
             <a:r>
-              <a:rPr lang="en-US" sz="2400" b="1" i="1" dirty="0" smtClean="0">
+              <a:rPr lang="en-US" sz="2400" b="1" i="1" dirty="0">
                 <a:solidFill>
                   <a:srgbClr val="FF0000"/>
                 </a:solidFill>
               </a:rPr>
               <a:t>k</a:t>
             </a:r>
-            <a:endParaRPr lang="en-US" sz="2400" b="1" i="1" dirty="0">
-              <a:solidFill>
-                <a:srgbClr val="FF0000"/>
-              </a:solidFill>
-            </a:endParaRPr>
           </a:p>
         </p:txBody>
       </p:sp>
@@ -14819,10 +15140,9 @@
             <a:lstStyle/>
             <a:p>
               <a:r>
-                <a:rPr lang="en-US" sz="2400" i="1" dirty="0" smtClean="0"/>
+                <a:rPr lang="en-US" sz="2400" i="1" dirty="0"/>
                 <a:t>c</a:t>
               </a:r>
-              <a:endParaRPr lang="en-US" sz="2400" i="1" dirty="0"/>
             </a:p>
           </p:txBody>
         </p:sp>
@@ -14867,76 +15187,72 @@
                 <a:p>
                   <a:pPr algn="ctr"/>
                   <a:r>
-                    <a:rPr lang="ru-RU" sz="2400" dirty="0" smtClean="0"/>
+                    <a:rPr lang="ru-RU" sz="2400" dirty="0"/>
                     <a:t>Не может создать</a:t>
                   </a:r>
                   <a:r>
-                    <a:rPr lang="en-US" sz="2400" dirty="0" smtClean="0"/>
+                    <a:rPr lang="en-US" sz="2400" dirty="0"/>
                     <a:t> </a:t>
                   </a:r>
                   <a:r>
-                    <a:rPr lang="ru-RU" sz="2400" dirty="0" smtClean="0"/>
+                    <a:rPr lang="ru-RU" sz="2400" dirty="0"/>
                     <a:t>корректный</a:t>
                   </a:r>
-                  <a:r>
-                    <a:rPr lang="en-US" sz="2400" dirty="0" smtClean="0"/>
-                    <a:t/>
-                  </a:r>
                   <a:br>
-                    <a:rPr lang="en-US" sz="2400" dirty="0" smtClean="0"/>
+                    <a:rPr lang="en-US" sz="2400" dirty="0"/>
                   </a:br>
                   <a:r>
-                    <a:rPr lang="en-US" sz="2400" i="1" dirty="0" smtClean="0"/>
+                    <a:rPr lang="en-US" sz="2400" i="1" dirty="0"/>
                     <a:t>c</a:t>
                   </a:r>
                   <a:r>
-                    <a:rPr lang="en-US" sz="2400" dirty="0" smtClean="0"/>
+                    <a:rPr lang="en-US" sz="2400" dirty="0"/>
                     <a:t> ∉ { </a:t>
                   </a:r>
                   <a:r>
-                    <a:rPr lang="en-US" sz="2400" i="1" dirty="0" smtClean="0"/>
+                    <a:rPr lang="en-US" sz="2400" i="1" dirty="0"/>
                     <a:t>c</a:t>
                   </a:r>
                   <a:r>
-                    <a:rPr lang="en-US" sz="2400" baseline="-25000" dirty="0" smtClean="0"/>
+                    <a:rPr lang="en-US" sz="2400" baseline="-25000" dirty="0"/>
                     <a:t>1</a:t>
                   </a:r>
                   <a:r>
-                    <a:rPr lang="en-US" sz="2400" dirty="0" smtClean="0"/>
+                    <a:rPr lang="en-US" sz="2400" dirty="0"/>
                     <a:t>, …, </a:t>
                   </a:r>
                   <a:r>
-                    <a:rPr lang="en-US" sz="2400" i="1" dirty="0" err="1" smtClean="0"/>
+                    <a:rPr lang="en-US" sz="2400" i="1" dirty="0" err="1"/>
                     <a:t>c</a:t>
                   </a:r>
                   <a:r>
-                    <a:rPr lang="en-US" sz="2400" i="1" baseline="-25000" dirty="0" err="1" smtClean="0"/>
+                    <a:rPr lang="en-US" sz="2400" i="1" baseline="-25000" dirty="0" err="1"/>
                     <a:t>q</a:t>
                   </a:r>
                   <a:r>
-                    <a:rPr lang="en-US" sz="2400" dirty="0" smtClean="0"/>
+                    <a:rPr lang="en-US" sz="2400" dirty="0"/>
                     <a:t>}</a:t>
                   </a:r>
                 </a:p>
                 <a:p>
                   <a:pPr algn="ctr"/>
                   <a:r>
-                    <a:rPr lang="ru-RU" sz="2400" dirty="0" smtClean="0"/>
+                    <a:rPr lang="ru-RU" sz="2400" dirty="0"/>
                     <a:t>Не может различить</a:t>
                   </a:r>
                 </a:p>
                 <a:p>
                   <a:pPr algn="ctr"/>
                   <a:r>
-                    <a:rPr lang="ru-RU" sz="2400" dirty="0" smtClean="0"/>
+                    <a:rPr lang="ru-RU" sz="2400" dirty="0"/>
                     <a:t> </a:t>
                   </a:r>
                   <a:r>
-                    <a:rPr lang="ru-RU" sz="2400" dirty="0" err="1" smtClean="0"/>
+                    <a:rPr lang="ru-RU" sz="2400" dirty="0" err="1"/>
                     <a:t>зашифрования</a:t>
                   </a:r>
                   <a:r>
-                    <a:rPr lang="ru-RU" sz="2400" dirty="0" smtClean="0"/>
+                    <a:rPr lang="ru-RU" sz="2400" dirty="0"/>
                     <a:t> </a:t>
                   </a:r>
                   <a14:m>
@@ -15011,15 +15327,15 @@
                       </m:sSub>
                     </m:oMath>
                   </a14:m>
-                  <a:endParaRPr lang="en-US" sz="2400" dirty="0" smtClean="0"/>
+                  <a:endParaRPr lang="en-US" sz="2400" dirty="0"/>
                 </a:p>
                 <a:p>
                   <a:pPr algn="ctr"/>
                   <a:r>
-                    <a:rPr lang="ru-RU" sz="2400" dirty="0" smtClean="0"/>
+                    <a:rPr lang="ru-RU" sz="2400" dirty="0"/>
                     <a:t>Не может расшифровать</a:t>
                   </a:r>
-                  <a:endParaRPr lang="en-US" sz="2400" dirty="0" smtClean="0"/>
+                  <a:endParaRPr lang="en-US" sz="2400" dirty="0"/>
                 </a:p>
                 <a:p>
                   <a:pPr algn="ctr"/>
@@ -15053,7 +15369,7 @@
                     </m:oMath>
                   </a14:m>
                   <a:r>
-                    <a:rPr lang="ru-RU" sz="2400" dirty="0" smtClean="0"/>
+                    <a:rPr lang="ru-RU" sz="2400" dirty="0"/>
                     <a:t> </a:t>
                   </a:r>
                   <a:endParaRPr lang="en-US" sz="2400" dirty="0"/>
@@ -15416,7 +15732,7 @@
                     </m:oMath>
                   </m:oMathPara>
                 </a14:m>
-                <a:endParaRPr lang="en-US" sz="2400" b="0" dirty="0" smtClean="0"/>
+                <a:endParaRPr lang="en-US" sz="2400" b="0" dirty="0"/>
               </a:p>
             </p:txBody>
           </p:sp>
@@ -15470,13 +15786,6 @@
   <p:clrMapOvr>
     <a:masterClrMapping/>
   </p:clrMapOvr>
-  <p:timing>
-    <p:tnLst>
-      <p:par>
-        <p:cTn id="1" dur="indefinite" restart="never" nodeType="tmRoot"/>
-      </p:par>
-    </p:tnLst>
-  </p:timing>
 </p:sld>
 </file>
 
@@ -15513,14 +15822,140 @@
           <a:lstStyle/>
           <a:p>
             <a:r>
-              <a:rPr lang="ru-RU" dirty="0" smtClean="0"/>
-              <a:t>Группа точек </a:t>
-            </a:r>
-            <a:r>
               <a:rPr lang="ru-RU" dirty="0"/>
-              <a:t>эллиптической кривой</a:t>
-            </a:r>
+              <a:t>Группа точек эллиптической кривой</a:t>
+            </a:r>
+          </a:p>
+        </p:txBody>
+      </p:sp>
+      <p:sp>
+        <p:nvSpPr>
+          <p:cNvPr id="3" name="Объект 2"/>
+          <p:cNvSpPr>
+            <a:spLocks noGrp="1"/>
+          </p:cNvSpPr>
+          <p:nvPr>
+            <p:ph idx="1"/>
+          </p:nvPr>
+        </p:nvSpPr>
+        <p:spPr/>
+        <p:txBody>
+          <a:bodyPr/>
+          <a:lstStyle/>
+          <a:p>
+            <a:pPr marL="0" indent="0">
+              <a:buNone/>
+            </a:pPr>
+            <a:r>
+              <a:rPr lang="ru-RU" dirty="0"/>
+              <a:t>Минус мультипликативных циклических групп – большой размер параметров, при которых криптосистемы на их основе становятся стойкими. Как следствие – большой размер ключей, подписей, </a:t>
+            </a:r>
+            <a:r>
+              <a:rPr lang="ru-RU" dirty="0" err="1"/>
+              <a:t>шифртекстов</a:t>
+            </a:r>
+            <a:r>
+              <a:rPr lang="ru-RU" dirty="0"/>
+              <a:t>.</a:t>
+            </a:r>
+          </a:p>
+          <a:p>
+            <a:pPr marL="0" indent="0">
+              <a:buNone/>
+            </a:pPr>
             <a:endParaRPr lang="ru-RU" dirty="0"/>
+          </a:p>
+          <a:p>
+            <a:pPr marL="0" indent="0">
+              <a:buNone/>
+            </a:pPr>
+            <a:r>
+              <a:rPr lang="ru-RU" dirty="0"/>
+              <a:t>Если ли группы, элементы в которых имеют меньший размер, но для которых выполняется предположение о сложности нахождения дискретного логарифма и решении задач </a:t>
+            </a:r>
+            <a:r>
+              <a:rPr lang="ru-RU" dirty="0" err="1"/>
+              <a:t>Диффи-Хеллмана</a:t>
+            </a:r>
+            <a:r>
+              <a:rPr lang="ru-RU" dirty="0"/>
+              <a:t>?</a:t>
+            </a:r>
+          </a:p>
+        </p:txBody>
+      </p:sp>
+      <p:sp>
+        <p:nvSpPr>
+          <p:cNvPr id="4" name="Номер слайда 3"/>
+          <p:cNvSpPr>
+            <a:spLocks noGrp="1"/>
+          </p:cNvSpPr>
+          <p:nvPr>
+            <p:ph type="sldNum" sz="quarter" idx="12"/>
+          </p:nvPr>
+        </p:nvSpPr>
+        <p:spPr/>
+        <p:txBody>
+          <a:bodyPr/>
+          <a:lstStyle/>
+          <a:p>
+            <a:fld id="{8253DDDB-F8F7-4D64-A7FD-3F3D61C1949F}" type="slidenum">
+              <a:rPr lang="ru-RU" smtClean="0"/>
+              <a:t>20</a:t>
+            </a:fld>
+            <a:endParaRPr lang="ru-RU"/>
+          </a:p>
+        </p:txBody>
+      </p:sp>
+    </p:spTree>
+    <p:extLst>
+      <p:ext uri="{BB962C8B-B14F-4D97-AF65-F5344CB8AC3E}">
+        <p14:creationId xmlns:p14="http://schemas.microsoft.com/office/powerpoint/2010/main" val="3103673760"/>
+      </p:ext>
+    </p:extLst>
+  </p:cSld>
+  <p:clrMapOvr>
+    <a:masterClrMapping/>
+  </p:clrMapOvr>
+</p:sld>
+</file>
+
+<file path=ppt/slides/slide21.xml><?xml version="1.0" encoding="utf-8"?>
+<p:sld xmlns:a="http://schemas.openxmlformats.org/drawingml/2006/main" xmlns:r="http://schemas.openxmlformats.org/officeDocument/2006/relationships" xmlns:p="http://schemas.openxmlformats.org/presentationml/2006/main">
+  <p:cSld>
+    <p:spTree>
+      <p:nvGrpSpPr>
+        <p:cNvPr id="1" name=""/>
+        <p:cNvGrpSpPr/>
+        <p:nvPr/>
+      </p:nvGrpSpPr>
+      <p:grpSpPr>
+        <a:xfrm>
+          <a:off x="0" y="0"/>
+          <a:ext cx="0" cy="0"/>
+          <a:chOff x="0" y="0"/>
+          <a:chExt cx="0" cy="0"/>
+        </a:xfrm>
+      </p:grpSpPr>
+      <p:sp>
+        <p:nvSpPr>
+          <p:cNvPr id="2" name="Заголовок 1"/>
+          <p:cNvSpPr>
+            <a:spLocks noGrp="1"/>
+          </p:cNvSpPr>
+          <p:nvPr>
+            <p:ph type="title"/>
+          </p:nvPr>
+        </p:nvSpPr>
+        <p:spPr/>
+        <p:txBody>
+          <a:bodyPr/>
+          <a:lstStyle/>
+          <a:p>
+            <a:r>
+              <a:rPr lang="ru-RU" dirty="0"/>
+              <a:t>Группа точек эллиптической кривой</a:t>
+            </a:r>
           </a:p>
         </p:txBody>
       </p:sp>
@@ -15545,7 +15980,7 @@
                   <a:buNone/>
                 </a:pPr>
                 <a:r>
-                  <a:rPr lang="ru-RU" sz="2400" dirty="0" smtClean="0"/>
+                  <a:rPr lang="ru-RU" sz="2400" dirty="0"/>
                   <a:t>Группа точек эллиптической кривой – группа точек, образованная целочисленными точками на некоторой эллиптической кривой с введённой операцией умножения точки </a:t>
                 </a:r>
                 <a14:m>
@@ -15559,11 +15994,11 @@
                   </m:oMath>
                 </a14:m>
                 <a:r>
-                  <a:rPr lang="ru-RU" sz="2400" dirty="0" smtClean="0"/>
+                  <a:rPr lang="ru-RU" sz="2400" dirty="0"/>
                   <a:t> на число</a:t>
                 </a:r>
                 <a:r>
-                  <a:rPr lang="en-US" sz="2400" dirty="0" smtClean="0"/>
+                  <a:rPr lang="en-US" sz="2400" dirty="0"/>
                   <a:t> </a:t>
                 </a:r>
                 <a14:m>
@@ -15577,7 +16012,7 @@
                   </m:oMath>
                 </a14:m>
                 <a:r>
-                  <a:rPr lang="ru-RU" sz="2400" dirty="0" smtClean="0"/>
+                  <a:rPr lang="ru-RU" sz="2400" dirty="0"/>
                   <a:t>, определяемой как </a:t>
                 </a:r>
                 <a14:m>
@@ -15701,7 +16136,7 @@
           <a:p>
             <a:fld id="{8253DDDB-F8F7-4D64-A7FD-3F3D61C1949F}" type="slidenum">
               <a:rPr lang="ru-RU" smtClean="0"/>
-              <a:t>20</a:t>
+              <a:t>21</a:t>
             </a:fld>
             <a:endParaRPr lang="ru-RU"/>
           </a:p>
@@ -15777,17 +16212,10 @@
   <p:clrMapOvr>
     <a:masterClrMapping/>
   </p:clrMapOvr>
-  <p:timing>
-    <p:tnLst>
-      <p:par>
-        <p:cTn id="1" dur="indefinite" restart="never" nodeType="tmRoot"/>
-      </p:par>
-    </p:tnLst>
-  </p:timing>
 </p:sld>
 </file>
 
-<file path=ppt/slides/slide21.xml><?xml version="1.0" encoding="utf-8"?>
+<file path=ppt/slides/slide22.xml><?xml version="1.0" encoding="utf-8"?>
 <p:sld xmlns:a="http://schemas.openxmlformats.org/drawingml/2006/main" xmlns:r="http://schemas.openxmlformats.org/officeDocument/2006/relationships" xmlns:p="http://schemas.openxmlformats.org/presentationml/2006/main">
   <p:cSld>
     <p:spTree>
@@ -15820,16 +16248,12 @@
           <a:lstStyle/>
           <a:p>
             <a:r>
-              <a:rPr lang="ru-RU" dirty="0" smtClean="0"/>
+              <a:rPr lang="ru-RU" dirty="0"/>
               <a:t>Группа </a:t>
             </a:r>
             <a:r>
-              <a:rPr lang="ru-RU" smtClean="0"/>
-              <a:t>точек </a:t>
-            </a:r>
-            <a:r>
               <a:rPr lang="ru-RU"/>
-              <a:t>эллиптической кривой</a:t>
+              <a:t>точек эллиптической кривой</a:t>
             </a:r>
             <a:endParaRPr lang="ru-RU" dirty="0"/>
           </a:p>
@@ -15861,26 +16285,26 @@
               <a:buNone/>
             </a:pPr>
             <a:r>
-              <a:rPr lang="ru-RU" sz="2400" dirty="0" smtClean="0"/>
+              <a:rPr lang="ru-RU" sz="2400" dirty="0"/>
               <a:t>Можем ввести аналоги протоколов </a:t>
             </a:r>
             <a:r>
-              <a:rPr lang="ru-RU" sz="2400" dirty="0" err="1" smtClean="0"/>
+              <a:rPr lang="ru-RU" sz="2400" dirty="0" err="1"/>
               <a:t>Дифии-Хеллмана</a:t>
             </a:r>
             <a:r>
-              <a:rPr lang="ru-RU" sz="2400" dirty="0" smtClean="0"/>
+              <a:rPr lang="ru-RU" sz="2400" dirty="0"/>
               <a:t> и </a:t>
             </a:r>
             <a:r>
-              <a:rPr lang="en-US" sz="2400" dirty="0" smtClean="0"/>
+              <a:rPr lang="en-US" sz="2400" dirty="0"/>
               <a:t>DSA</a:t>
             </a:r>
             <a:r>
-              <a:rPr lang="ru-RU" sz="2400" dirty="0" smtClean="0"/>
+              <a:rPr lang="ru-RU" sz="2400" dirty="0"/>
               <a:t>, путём замены групп и замены операций возведения в степень на операцию умножения точки на число.</a:t>
             </a:r>
-            <a:endParaRPr lang="en-US" sz="2400" dirty="0" smtClean="0"/>
+            <a:endParaRPr lang="en-US" sz="2400" dirty="0"/>
           </a:p>
           <a:p>
             <a:pPr marL="0" indent="0">
@@ -15892,7 +16316,7 @@
             <a:pPr marL="0" indent="0">
               <a:buNone/>
             </a:pPr>
-            <a:endParaRPr lang="en-US" sz="2400" dirty="0" smtClean="0"/>
+            <a:endParaRPr lang="en-US" sz="2400" dirty="0"/>
           </a:p>
           <a:p>
             <a:pPr marL="0" indent="0">
@@ -15905,7 +16329,7 @@
               <a:buNone/>
             </a:pPr>
             <a:r>
-              <a:rPr lang="ru-RU" sz="2400" dirty="0" smtClean="0"/>
+              <a:rPr lang="ru-RU" sz="2400" dirty="0"/>
               <a:t> </a:t>
             </a:r>
           </a:p>
@@ -15919,7 +16343,7 @@
             <a:pPr marL="0" indent="0">
               <a:buNone/>
             </a:pPr>
-            <a:endParaRPr lang="en-US" sz="2400" dirty="0" smtClean="0"/>
+            <a:endParaRPr lang="en-US" sz="2400" dirty="0"/>
           </a:p>
           <a:p>
             <a:pPr marL="0" indent="0">
@@ -15932,15 +16356,15 @@
               <a:buNone/>
             </a:pPr>
             <a:r>
-              <a:rPr lang="ru-RU" sz="2400" dirty="0" smtClean="0"/>
+              <a:rPr lang="ru-RU" sz="2400" dirty="0"/>
               <a:t>Для фиксированных кривых в группе точек задачи нахождения дискретного логарифма и задачи </a:t>
             </a:r>
             <a:r>
-              <a:rPr lang="ru-RU" sz="2400" dirty="0" err="1" smtClean="0"/>
+              <a:rPr lang="ru-RU" sz="2400" dirty="0" err="1"/>
               <a:t>Диффи-Хеллмана</a:t>
             </a:r>
             <a:r>
-              <a:rPr lang="ru-RU" sz="2400" dirty="0" smtClean="0"/>
+              <a:rPr lang="ru-RU" sz="2400" dirty="0"/>
               <a:t> трудные.</a:t>
             </a:r>
             <a:endParaRPr lang="ru-RU" dirty="0"/>
@@ -15964,7 +16388,7 @@
           <a:p>
             <a:fld id="{8253DDDB-F8F7-4D64-A7FD-3F3D61C1949F}" type="slidenum">
               <a:rPr lang="ru-RU" smtClean="0"/>
-              <a:t>21</a:t>
+              <a:t>22</a:t>
             </a:fld>
             <a:endParaRPr lang="ru-RU"/>
           </a:p>
@@ -16010,17 +16434,10 @@
   <p:clrMapOvr>
     <a:masterClrMapping/>
   </p:clrMapOvr>
-  <p:timing>
-    <p:tnLst>
-      <p:par>
-        <p:cTn id="1" dur="indefinite" restart="never" nodeType="tmRoot"/>
-      </p:par>
-    </p:tnLst>
-  </p:timing>
 </p:sld>
 </file>
 
-<file path=ppt/slides/slide22.xml><?xml version="1.0" encoding="utf-8"?>
+<file path=ppt/slides/slide23.xml><?xml version="1.0" encoding="utf-8"?>
 <p:sld xmlns:a="http://schemas.openxmlformats.org/drawingml/2006/main" xmlns:r="http://schemas.openxmlformats.org/officeDocument/2006/relationships" xmlns:p="http://schemas.openxmlformats.org/presentationml/2006/main">
   <p:cSld>
     <p:spTree>
@@ -16092,7 +16509,7 @@
           <a:p>
             <a:fld id="{8253DDDB-F8F7-4D64-A7FD-3F3D61C1949F}" type="slidenum">
               <a:rPr lang="ru-RU" smtClean="0"/>
-              <a:t>22</a:t>
+              <a:t>23</a:t>
             </a:fld>
             <a:endParaRPr lang="ru-RU"/>
           </a:p>
@@ -16108,13 +16525,6 @@
   <p:clrMapOvr>
     <a:masterClrMapping/>
   </p:clrMapOvr>
-  <p:timing>
-    <p:tnLst>
-      <p:par>
-        <p:cTn id="1" dur="indefinite" restart="never" nodeType="tmRoot"/>
-      </p:par>
-    </p:tnLst>
-  </p:timing>
 </p:sld>
 </file>
 
@@ -16151,10 +16561,9 @@
           <a:lstStyle/>
           <a:p>
             <a:r>
-              <a:rPr lang="ru-RU" dirty="0" smtClean="0"/>
+              <a:rPr lang="ru-RU" dirty="0"/>
               <a:t>Согласование ключей</a:t>
             </a:r>
-            <a:endParaRPr lang="ru-RU" dirty="0"/>
           </a:p>
         </p:txBody>
       </p:sp>
@@ -16174,7 +16583,7 @@
           <a:lstStyle/>
           <a:p>
             <a:r>
-              <a:rPr lang="ru-RU" dirty="0" smtClean="0"/>
+              <a:rPr lang="ru-RU" dirty="0"/>
               <a:t>Генерация одной из сторон и передача другой (обмен ключей)</a:t>
             </a:r>
           </a:p>
@@ -16183,7 +16592,7 @@
           </a:p>
           <a:p>
             <a:r>
-              <a:rPr lang="ru-RU" dirty="0" smtClean="0"/>
+              <a:rPr lang="ru-RU" dirty="0"/>
               <a:t>Генерация доверенной третьей стороной</a:t>
             </a:r>
           </a:p>
@@ -16192,7 +16601,7 @@
           </a:p>
           <a:p>
             <a:r>
-              <a:rPr lang="ru-RU" dirty="0" smtClean="0"/>
+              <a:rPr lang="ru-RU" dirty="0"/>
               <a:t>Выработка ключа из общего ключевого материала</a:t>
             </a:r>
           </a:p>
@@ -16204,10 +16613,9 @@
               <a:buNone/>
             </a:pPr>
             <a:r>
-              <a:rPr lang="ru-RU" dirty="0" smtClean="0"/>
+              <a:rPr lang="ru-RU" dirty="0"/>
               <a:t>Необходимо обеспечение целостности и секретности согласованных ключей.</a:t>
             </a:r>
-            <a:endParaRPr lang="ru-RU" dirty="0"/>
           </a:p>
         </p:txBody>
       </p:sp>
@@ -16244,13 +16652,6 @@
   <p:clrMapOvr>
     <a:masterClrMapping/>
   </p:clrMapOvr>
-  <p:timing>
-    <p:tnLst>
-      <p:par>
-        <p:cTn id="1" dur="indefinite" restart="never" nodeType="tmRoot"/>
-      </p:par>
-    </p:tnLst>
-  </p:timing>
 </p:sld>
 </file>
 
@@ -16312,7 +16713,7 @@
               <a:buNone/>
             </a:pPr>
             <a:r>
-              <a:rPr lang="ru-RU" dirty="0" smtClean="0"/>
+              <a:rPr lang="ru-RU" dirty="0"/>
               <a:t>Все описанные способы согласования ключей можно реализовать средствами симметричной криптографии, но при условии наличия общего симметричного ключа. Т.е. для получения общего секретного ключа необходим уже существующий общий секретный ключ.</a:t>
             </a:r>
           </a:p>
@@ -16327,10 +16728,9 @@
               <a:buNone/>
             </a:pPr>
             <a:r>
-              <a:rPr lang="ru-RU" dirty="0" smtClean="0"/>
+              <a:rPr lang="ru-RU" dirty="0"/>
               <a:t>Хотелось бы иметь возможность согласования ключей, без необходимости иметь общий секретный ключ со всеми участниками.</a:t>
             </a:r>
-            <a:endParaRPr lang="ru-RU" dirty="0"/>
           </a:p>
         </p:txBody>
       </p:sp>
@@ -16367,13 +16767,6 @@
   <p:clrMapOvr>
     <a:masterClrMapping/>
   </p:clrMapOvr>
-  <p:timing>
-    <p:tnLst>
-      <p:par>
-        <p:cTn id="1" dur="indefinite" restart="never" nodeType="tmRoot"/>
-      </p:par>
-    </p:tnLst>
-  </p:timing>
 </p:sld>
 </file>
 
@@ -16410,10 +16803,9 @@
           <a:lstStyle/>
           <a:p>
             <a:r>
-              <a:rPr lang="ru-RU" dirty="0" smtClean="0"/>
+              <a:rPr lang="ru-RU" dirty="0"/>
               <a:t>Асимметричная криптография</a:t>
             </a:r>
-            <a:endParaRPr lang="ru-RU" dirty="0"/>
           </a:p>
         </p:txBody>
       </p:sp>
@@ -16433,63 +16825,63 @@
           <a:lstStyle/>
           <a:p>
             <a:r>
-              <a:rPr lang="ru-RU" dirty="0" smtClean="0"/>
+              <a:rPr lang="ru-RU" dirty="0"/>
               <a:t>Использование двух различный ключей – открытого ключа </a:t>
             </a:r>
             <a:r>
-              <a:rPr lang="en-US" dirty="0" smtClean="0"/>
+              <a:rPr lang="en-US" dirty="0"/>
               <a:t>PK (public key)</a:t>
             </a:r>
             <a:r>
-              <a:rPr lang="ru-RU" dirty="0" smtClean="0"/>
+              <a:rPr lang="ru-RU" dirty="0"/>
               <a:t> и закрытого ключа </a:t>
             </a:r>
             <a:r>
-              <a:rPr lang="en-US" dirty="0" smtClean="0"/>
+              <a:rPr lang="en-US" dirty="0"/>
               <a:t>SK (secret key</a:t>
             </a:r>
             <a:r>
-              <a:rPr lang="ru-RU" dirty="0" smtClean="0"/>
+              <a:rPr lang="ru-RU" dirty="0"/>
               <a:t>)</a:t>
             </a:r>
           </a:p>
           <a:p>
             <a:r>
-              <a:rPr lang="ru-RU" dirty="0" smtClean="0"/>
+              <a:rPr lang="ru-RU" dirty="0"/>
               <a:t>Предполагается секретность только закрытого ключа, открытый ключ общеизвестен</a:t>
             </a:r>
           </a:p>
           <a:p>
             <a:r>
-              <a:rPr lang="ru-RU" dirty="0" smtClean="0"/>
+              <a:rPr lang="ru-RU" dirty="0"/>
               <a:t>Открытый ключ используется для шифрования и проверки подписи, закрытый для </a:t>
             </a:r>
             <a:r>
-              <a:rPr lang="ru-RU" dirty="0" err="1" smtClean="0"/>
+              <a:rPr lang="ru-RU" dirty="0" err="1"/>
               <a:t>расшифрования</a:t>
             </a:r>
             <a:r>
-              <a:rPr lang="ru-RU" dirty="0" smtClean="0"/>
+              <a:rPr lang="ru-RU" dirty="0"/>
               <a:t> и подписания</a:t>
             </a:r>
           </a:p>
           <a:p>
             <a:r>
-              <a:rPr lang="ru-RU" dirty="0" smtClean="0"/>
+              <a:rPr lang="ru-RU" dirty="0"/>
               <a:t>Операции шифрования и </a:t>
             </a:r>
             <a:r>
-              <a:rPr lang="ru-RU" dirty="0" err="1" smtClean="0"/>
+              <a:rPr lang="ru-RU" dirty="0" err="1"/>
               <a:t>расшифрования</a:t>
             </a:r>
             <a:r>
-              <a:rPr lang="ru-RU" dirty="0" smtClean="0"/>
+              <a:rPr lang="ru-RU" dirty="0"/>
               <a:t>, подписи и проверки различны (т.е. преобразования асимметричны)</a:t>
             </a:r>
           </a:p>
           <a:p>
             <a:r>
-              <a:rPr lang="ru-RU" dirty="0" smtClean="0"/>
+              <a:rPr lang="ru-RU" dirty="0"/>
               <a:t>В общем случае намного медленнее симметричных криптосистем</a:t>
             </a:r>
           </a:p>
@@ -16531,13 +16923,6 @@
   <p:clrMapOvr>
     <a:masterClrMapping/>
   </p:clrMapOvr>
-  <p:timing>
-    <p:tnLst>
-      <p:par>
-        <p:cTn id="1" dur="indefinite" restart="never" nodeType="tmRoot"/>
-      </p:par>
-    </p:tnLst>
-  </p:timing>
 </p:sld>
 </file>
 
@@ -16574,22 +16959,21 @@
           <a:lstStyle/>
           <a:p>
             <a:r>
-              <a:rPr lang="ru-RU" dirty="0" smtClean="0"/>
+              <a:rPr lang="ru-RU" dirty="0"/>
               <a:t>Протокол обмена ключей </a:t>
             </a:r>
             <a:r>
-              <a:rPr lang="en-US" dirty="0" err="1" smtClean="0"/>
+              <a:rPr lang="en-US" dirty="0" err="1"/>
               <a:t>Diffie</a:t>
             </a:r>
             <a:r>
-              <a:rPr lang="en-US" dirty="0" smtClean="0"/>
+              <a:rPr lang="en-US" dirty="0"/>
               <a:t>-Hellman’</a:t>
             </a:r>
             <a:r>
-              <a:rPr lang="ru-RU" dirty="0" smtClean="0"/>
+              <a:rPr lang="ru-RU" dirty="0"/>
               <a:t>а</a:t>
             </a:r>
-            <a:endParaRPr lang="ru-RU" dirty="0"/>
           </a:p>
         </p:txBody>
       </p:sp>
@@ -16612,7 +16996,7 @@
               <a:buNone/>
             </a:pPr>
             <a:r>
-              <a:rPr lang="ru-RU" dirty="0" smtClean="0"/>
+              <a:rPr lang="ru-RU" dirty="0"/>
               <a:t>Пусть имеется незащищенный открытый канал связи при условии пассивного противника.</a:t>
             </a:r>
           </a:p>
@@ -16621,10 +17005,9 @@
               <a:buNone/>
             </a:pPr>
             <a:r>
-              <a:rPr lang="ru-RU" dirty="0" smtClean="0"/>
+              <a:rPr lang="ru-RU" dirty="0"/>
               <a:t>Хотим получить возможность согласования общего ключа для Алисы и Боба.</a:t>
             </a:r>
-            <a:endParaRPr lang="ru-RU" dirty="0"/>
           </a:p>
         </p:txBody>
       </p:sp>
@@ -16686,10 +17069,9 @@
           <a:p>
             <a:pPr algn="ctr"/>
             <a:r>
-              <a:rPr lang="en-US" sz="2400" dirty="0" smtClean="0"/>
+              <a:rPr lang="en-US" sz="2400" dirty="0"/>
               <a:t>Bob</a:t>
             </a:r>
-            <a:endParaRPr lang="en-US" sz="2400" dirty="0"/>
           </a:p>
         </p:txBody>
       </p:sp>
@@ -16728,10 +17110,9 @@
           <a:p>
             <a:pPr algn="ctr"/>
             <a:r>
-              <a:rPr lang="en-US" sz="2400" dirty="0" smtClean="0"/>
+              <a:rPr lang="en-US" sz="2400" dirty="0"/>
               <a:t>Alice</a:t>
             </a:r>
-            <a:endParaRPr lang="en-US" sz="2400" dirty="0"/>
           </a:p>
         </p:txBody>
       </p:sp>
@@ -16890,7 +17271,7 @@
           <a:lstStyle/>
           <a:p>
             <a:r>
-              <a:rPr lang="ru-RU" sz="2400" dirty="0" smtClean="0"/>
+              <a:rPr lang="ru-RU" sz="2400" dirty="0"/>
               <a:t>Пассивное прослушивание</a:t>
             </a:r>
             <a:endParaRPr lang="en-US" sz="2400" dirty="0"/>
@@ -16946,13 +17327,6 @@
   <p:clrMapOvr>
     <a:masterClrMapping/>
   </p:clrMapOvr>
-  <p:timing>
-    <p:tnLst>
-      <p:par>
-        <p:cTn id="1" dur="indefinite" restart="never" nodeType="tmRoot"/>
-      </p:par>
-    </p:tnLst>
-  </p:timing>
 </p:sld>
 </file>
 
@@ -16989,15 +17363,14 @@
           <a:lstStyle/>
           <a:p>
             <a:r>
-              <a:rPr lang="ru-RU" dirty="0" smtClean="0"/>
+              <a:rPr lang="ru-RU" dirty="0"/>
               <a:t>Кратко о мультипликативной группе</a:t>
             </a:r>
-            <a:endParaRPr lang="ru-RU" dirty="0"/>
           </a:p>
         </p:txBody>
       </p:sp>
-      <mc:AlternateContent xmlns:mc="http://schemas.openxmlformats.org/markup-compatibility/2006" xmlns:a14="http://schemas.microsoft.com/office/drawing/2010/main">
-        <mc:Choice Requires="a14">
+      <mc:AlternateContent xmlns:mc="http://schemas.openxmlformats.org/markup-compatibility/2006">
+        <mc:Choice xmlns:a14="http://schemas.microsoft.com/office/drawing/2010/main" Requires="a14">
           <p:sp>
             <p:nvSpPr>
               <p:cNvPr id="3" name="Объект 2"/>
@@ -17014,7 +17387,7 @@
               <a:lstStyle/>
               <a:p>
                 <a:r>
-                  <a:rPr lang="ru-RU" dirty="0" smtClean="0"/>
+                  <a:rPr lang="ru-RU" dirty="0"/>
                   <a:t>Пусть </a:t>
                 </a:r>
                 <a14:m>
@@ -17032,7 +17405,7 @@
                   <a:t> </a:t>
                 </a:r>
                 <a:r>
-                  <a:rPr lang="ru-RU" dirty="0" smtClean="0"/>
+                  <a:rPr lang="ru-RU" dirty="0"/>
                   <a:t>простое число. Пусть </a:t>
                 </a:r>
                 <a14:m>
@@ -17047,10 +17420,10 @@
                       </m:sSubSupPr>
                       <m:e>
                         <m:r>
-                          <a:rPr lang="en-US" b="0" i="1" smtClean="0">
-                            <a:latin typeface="Cambria Math" panose="02040503050406030204" pitchFamily="18" charset="0"/>
-                          </a:rPr>
-                          <m:t>𝑍</m:t>
+                          <a:rPr lang="ru-RU" sz="2800" i="1">
+                            <a:latin typeface="Cambria Math" panose="02040503050406030204" pitchFamily="18" charset="0"/>
+                          </a:rPr>
+                          <m:t>ℤ</m:t>
                         </m:r>
                       </m:e>
                       <m:sub>
@@ -17073,11 +17446,11 @@
                   </m:oMath>
                 </a14:m>
                 <a:r>
-                  <a:rPr lang="en-US" dirty="0" smtClean="0"/>
+                  <a:rPr lang="en-US" dirty="0"/>
                   <a:t> - </a:t>
                 </a:r>
                 <a:r>
-                  <a:rPr lang="ru-RU" dirty="0" smtClean="0"/>
+                  <a:rPr lang="ru-RU" dirty="0"/>
                   <a:t>циклическая мультипликативная группа по модулю </a:t>
                 </a:r>
                 <a14:m>
@@ -17091,7 +17464,7 @@
                   </m:oMath>
                 </a14:m>
                 <a:r>
-                  <a:rPr lang="ru-RU" dirty="0" smtClean="0"/>
+                  <a:rPr lang="ru-RU" dirty="0"/>
                   <a:t>, </a:t>
                 </a:r>
                 <a14:m>
@@ -17117,10 +17490,10 @@
                           </m:sSubSupPr>
                           <m:e>
                             <m:r>
-                              <a:rPr lang="en-US" b="0" i="1" smtClean="0">
+                              <a:rPr lang="ru-RU" sz="2800" i="1">
                                 <a:latin typeface="Cambria Math" panose="02040503050406030204" pitchFamily="18" charset="0"/>
                               </a:rPr>
-                              <m:t>𝑍</m:t>
+                              <m:t>ℤ</m:t>
                             </m:r>
                           </m:e>
                           <m:sub>
@@ -17192,7 +17565,7 @@
                   </m:oMath>
                 </a14:m>
                 <a:r>
-                  <a:rPr lang="ru-RU" dirty="0" smtClean="0"/>
+                  <a:rPr lang="ru-RU" dirty="0"/>
                   <a:t>.</a:t>
                 </a:r>
               </a:p>
@@ -17296,7 +17669,7 @@
                   </m:oMath>
                 </a14:m>
                 <a:r>
-                  <a:rPr lang="ru-RU" dirty="0" smtClean="0"/>
+                  <a:rPr lang="ru-RU" dirty="0"/>
                   <a:t> – единичный элемент в группе </a:t>
                 </a:r>
                 <a14:m>
@@ -17311,10 +17684,10 @@
                       </m:sSubSupPr>
                       <m:e>
                         <m:r>
-                          <a:rPr lang="en-US" b="0" i="1" smtClean="0">
-                            <a:latin typeface="Cambria Math" panose="02040503050406030204" pitchFamily="18" charset="0"/>
-                          </a:rPr>
-                          <m:t>𝑍</m:t>
+                          <a:rPr lang="ru-RU" sz="2800" i="1">
+                            <a:latin typeface="Cambria Math" panose="02040503050406030204" pitchFamily="18" charset="0"/>
+                          </a:rPr>
+                          <m:t>ℤ</m:t>
                         </m:r>
                       </m:e>
                       <m:sub>
@@ -17336,11 +17709,11 @@
                     </m:sSubSup>
                   </m:oMath>
                 </a14:m>
-                <a:endParaRPr lang="ru-RU" dirty="0" smtClean="0"/>
+                <a:endParaRPr lang="ru-RU" dirty="0"/>
               </a:p>
               <a:p>
                 <a:r>
-                  <a:rPr lang="ru-RU" dirty="0" smtClean="0"/>
+                  <a:rPr lang="ru-RU" dirty="0"/>
                   <a:t>Пусть </a:t>
                 </a:r>
                 <a14:m>
@@ -17393,11 +17766,11 @@
                   </m:oMath>
                 </a14:m>
                 <a:r>
-                  <a:rPr lang="en-US" dirty="0" smtClean="0"/>
+                  <a:rPr lang="en-US" dirty="0"/>
                   <a:t> - </a:t>
                 </a:r>
                 <a:r>
-                  <a:rPr lang="ru-RU" dirty="0" smtClean="0"/>
+                  <a:rPr lang="ru-RU" dirty="0"/>
                   <a:t>генератор, т.е. </a:t>
                 </a:r>
                 <a14:m>
@@ -17430,10 +17803,10 @@
                       </m:sSubSupPr>
                       <m:e>
                         <m:r>
-                          <a:rPr lang="en-US" b="0" i="1" smtClean="0">
-                            <a:latin typeface="Cambria Math" panose="02040503050406030204" pitchFamily="18" charset="0"/>
-                          </a:rPr>
-                          <m:t>𝑍</m:t>
+                          <a:rPr lang="ru-RU" sz="2800" i="1">
+                            <a:latin typeface="Cambria Math" panose="02040503050406030204" pitchFamily="18" charset="0"/>
+                          </a:rPr>
+                          <m:t>ℤ</m:t>
                         </m:r>
                       </m:e>
                       <m:sub>
@@ -17461,7 +17834,7 @@
                     </m:r>
                   </m:oMath>
                 </a14:m>
-                <a:endParaRPr lang="en-US" b="0" dirty="0" smtClean="0"/>
+                <a:endParaRPr lang="en-US" b="0" dirty="0"/>
               </a:p>
               <a:p>
                 <a14:m>
@@ -17580,7 +17953,7 @@
                     </m:sSup>
                   </m:oMath>
                 </a14:m>
-                <a:endParaRPr lang="en-US" dirty="0" smtClean="0"/>
+                <a:endParaRPr lang="en-US" dirty="0"/>
               </a:p>
               <a:p>
                 <a:endParaRPr lang="en-US" dirty="0"/>
@@ -17590,7 +17963,7 @@
                   <a:buNone/>
                 </a:pPr>
                 <a:r>
-                  <a:rPr lang="ru-RU" dirty="0" smtClean="0"/>
+                  <a:rPr lang="ru-RU" dirty="0"/>
                   <a:t>Пример. Пусть </a:t>
                 </a:r>
                 <a14:m>
@@ -17610,7 +17983,7 @@
                   </m:oMath>
                 </a14:m>
                 <a:r>
-                  <a:rPr lang="ru-RU" dirty="0" smtClean="0"/>
+                  <a:rPr lang="ru-RU" dirty="0"/>
                   <a:t>.</a:t>
                 </a:r>
               </a:p>
@@ -17662,7 +18035,7 @@
                   </m:oMath>
                 </a14:m>
                 <a:r>
-                  <a:rPr lang="en-US" dirty="0" smtClean="0"/>
+                  <a:rPr lang="en-US" dirty="0"/>
                   <a:t>, </a:t>
                 </a:r>
                 <a14:m>
@@ -17682,7 +18055,7 @@
                   </m:oMath>
                 </a14:m>
                 <a:r>
-                  <a:rPr lang="en-US" dirty="0" smtClean="0"/>
+                  <a:rPr lang="en-US" dirty="0"/>
                   <a:t> </a:t>
                 </a:r>
                 <a:endParaRPr lang="ru-RU" dirty="0"/>
@@ -17690,7 +18063,7 @@
             </p:txBody>
           </p:sp>
         </mc:Choice>
-        <mc:Fallback xmlns="">
+        <mc:Fallback>
           <p:sp>
             <p:nvSpPr>
               <p:cNvPr id="3" name="Объект 2"/>
@@ -17757,13 +18130,6 @@
   <p:clrMapOvr>
     <a:masterClrMapping/>
   </p:clrMapOvr>
-  <p:timing>
-    <p:tnLst>
-      <p:par>
-        <p:cTn id="1" dur="indefinite" restart="never" nodeType="tmRoot"/>
-      </p:par>
-    </p:tnLst>
-  </p:timing>
 </p:sld>
 </file>
 
@@ -17800,27 +18166,1108 @@
           <a:lstStyle/>
           <a:p>
             <a:r>
-              <a:rPr lang="ru-RU" dirty="0" smtClean="0"/>
-              <a:t>Протокол обмена ключей </a:t>
-            </a:r>
-            <a:r>
-              <a:rPr lang="en-US" dirty="0" err="1" smtClean="0"/>
-              <a:t>Diffie</a:t>
-            </a:r>
-            <a:r>
-              <a:rPr lang="en-US" dirty="0" smtClean="0"/>
-              <a:t>-Hellman’</a:t>
-            </a:r>
-            <a:r>
-              <a:rPr lang="ru-RU" dirty="0" smtClean="0"/>
-              <a:t>а</a:t>
+              <a:rPr lang="ru-RU" dirty="0"/>
+              <a:t>Кратко о мультипликативной группе</a:t>
+            </a:r>
+            <a:r>
+              <a:rPr lang="en-US" dirty="0"/>
+              <a:t> (2)</a:t>
             </a:r>
             <a:endParaRPr lang="ru-RU" dirty="0"/>
           </a:p>
         </p:txBody>
       </p:sp>
-      <mc:AlternateContent xmlns:mc="http://schemas.openxmlformats.org/markup-compatibility/2006" xmlns:a14="http://schemas.microsoft.com/office/drawing/2010/main">
-        <mc:Choice Requires="a14">
+      <mc:AlternateContent xmlns:mc="http://schemas.openxmlformats.org/markup-compatibility/2006">
+        <mc:Choice xmlns:a14="http://schemas.microsoft.com/office/drawing/2010/main" Requires="a14">
+          <p:sp>
+            <p:nvSpPr>
+              <p:cNvPr id="3" name="Объект 2"/>
+              <p:cNvSpPr>
+                <a:spLocks noGrp="1"/>
+              </p:cNvSpPr>
+              <p:nvPr>
+                <p:ph idx="1"/>
+              </p:nvPr>
+            </p:nvSpPr>
+            <p:spPr/>
+            <p:txBody>
+              <a:bodyPr>
+                <a:normAutofit fontScale="92500" lnSpcReduction="20000"/>
+              </a:bodyPr>
+              <a:lstStyle/>
+              <a:p>
+                <a:pPr marL="0" indent="0">
+                  <a:buNone/>
+                </a:pPr>
+                <a:r>
+                  <a:rPr lang="ru-RU" dirty="0"/>
+                  <a:t>Все циклические группы одного и того же порядка</a:t>
+                </a:r>
+                <a:r>
+                  <a:rPr lang="en-US" dirty="0"/>
+                  <a:t> </a:t>
+                </a:r>
+                <a:r>
+                  <a:rPr lang="ru-RU" dirty="0"/>
+                  <a:t>изоморфны.</a:t>
+                </a:r>
+                <a:endParaRPr lang="en-US" dirty="0"/>
+              </a:p>
+              <a:p>
+                <a:pPr marL="0" indent="0">
+                  <a:buNone/>
+                </a:pPr>
+                <a:endParaRPr lang="en-US" dirty="0"/>
+              </a:p>
+              <a:p>
+                <a:pPr marL="0" indent="0">
+                  <a:buNone/>
+                </a:pPr>
+                <a:r>
+                  <a:rPr lang="ru-RU" dirty="0"/>
+                  <a:t>Пример. Пусть </a:t>
+                </a:r>
+                <a14:m>
+                  <m:oMath xmlns:m="http://schemas.openxmlformats.org/officeDocument/2006/math">
+                    <m:r>
+                      <a:rPr lang="en-US" b="0" i="1" smtClean="0">
+                        <a:latin typeface="Cambria Math" panose="02040503050406030204" pitchFamily="18" charset="0"/>
+                      </a:rPr>
+                      <m:t>𝑝</m:t>
+                    </m:r>
+                    <m:r>
+                      <a:rPr lang="en-US" b="0" i="1" smtClean="0">
+                        <a:latin typeface="Cambria Math" panose="02040503050406030204" pitchFamily="18" charset="0"/>
+                      </a:rPr>
+                      <m:t>=7</m:t>
+                    </m:r>
+                  </m:oMath>
+                </a14:m>
+                <a:r>
+                  <a:rPr lang="ru-RU" dirty="0"/>
+                  <a:t>.</a:t>
+                </a:r>
+              </a:p>
+              <a:p>
+                <a:pPr marL="0" indent="0">
+                  <a:buNone/>
+                </a:pPr>
+                <a14:m>
+                  <m:oMath xmlns:m="http://schemas.openxmlformats.org/officeDocument/2006/math">
+                    <m:sSubSup>
+                      <m:sSubSupPr>
+                        <m:ctrlPr>
+                          <a:rPr lang="en-US" b="0" i="1" smtClean="0">
+                            <a:latin typeface="Cambria Math" panose="02040503050406030204" pitchFamily="18" charset="0"/>
+                          </a:rPr>
+                        </m:ctrlPr>
+                      </m:sSubSupPr>
+                      <m:e>
+                        <m:r>
+                          <a:rPr lang="en-US" b="0" i="1" smtClean="0">
+                            <a:latin typeface="Cambria Math" panose="02040503050406030204" pitchFamily="18" charset="0"/>
+                          </a:rPr>
+                          <m:t>ℤ</m:t>
+                        </m:r>
+                      </m:e>
+                      <m:sub>
+                        <m:r>
+                          <a:rPr lang="en-US" b="0" i="1" smtClean="0">
+                            <a:latin typeface="Cambria Math" panose="02040503050406030204" pitchFamily="18" charset="0"/>
+                          </a:rPr>
+                          <m:t>7</m:t>
+                        </m:r>
+                      </m:sub>
+                      <m:sup>
+                        <m:r>
+                          <a:rPr lang="en-US" b="0" i="1" smtClean="0">
+                            <a:latin typeface="Cambria Math" panose="02040503050406030204" pitchFamily="18" charset="0"/>
+                          </a:rPr>
+                          <m:t>∗</m:t>
+                        </m:r>
+                      </m:sup>
+                    </m:sSubSup>
+                    <m:r>
+                      <a:rPr lang="en-US" b="0" i="1" smtClean="0">
+                        <a:latin typeface="Cambria Math" panose="02040503050406030204" pitchFamily="18" charset="0"/>
+                      </a:rPr>
+                      <m:t>={3, 2, 6, 4, 5, 1}</m:t>
+                    </m:r>
+                  </m:oMath>
+                </a14:m>
+                <a:r>
+                  <a:rPr lang="en-US" dirty="0"/>
+                  <a:t>, </a:t>
+                </a:r>
+                <a14:m>
+                  <m:oMath xmlns:m="http://schemas.openxmlformats.org/officeDocument/2006/math">
+                    <m:r>
+                      <a:rPr lang="en-US" b="0" i="1" dirty="0" smtClean="0">
+                        <a:latin typeface="Cambria Math" panose="02040503050406030204" pitchFamily="18" charset="0"/>
+                      </a:rPr>
+                      <m:t>𝑔</m:t>
+                    </m:r>
+                    <m:r>
+                      <a:rPr lang="en-US" b="0" i="1" dirty="0" smtClean="0">
+                        <a:latin typeface="Cambria Math" panose="02040503050406030204" pitchFamily="18" charset="0"/>
+                      </a:rPr>
+                      <m:t>=3</m:t>
+                    </m:r>
+                  </m:oMath>
+                </a14:m>
+                <a:r>
+                  <a:rPr lang="en-US" b="0" i="0" dirty="0"/>
+                  <a:t> </a:t>
+                </a:r>
+                <a:r>
+                  <a:rPr lang="ru-RU" b="0" i="0" dirty="0"/>
+                  <a:t>генератор</a:t>
+                </a:r>
+                <a:r>
+                  <a:rPr lang="ru-RU" b="0" i="0" dirty="0">
+                    <a:latin typeface="+mj-lt"/>
+                  </a:rPr>
+                  <a:t>,</a:t>
+                </a:r>
+                <a:r>
+                  <a:rPr lang="ru-RU" dirty="0"/>
+                  <a:t> </a:t>
+                </a:r>
+                <a14:m>
+                  <m:oMath xmlns:m="http://schemas.openxmlformats.org/officeDocument/2006/math">
+                    <m:d>
+                      <m:dPr>
+                        <m:begChr m:val="|"/>
+                        <m:endChr m:val="|"/>
+                        <m:ctrlPr>
+                          <a:rPr lang="en-US" b="0" i="1" dirty="0" smtClean="0">
+                            <a:latin typeface="Cambria Math" panose="02040503050406030204" pitchFamily="18" charset="0"/>
+                          </a:rPr>
+                        </m:ctrlPr>
+                      </m:dPr>
+                      <m:e>
+                        <m:sSubSup>
+                          <m:sSubSupPr>
+                            <m:ctrlPr>
+                              <a:rPr lang="en-US" i="1">
+                                <a:latin typeface="Cambria Math" panose="02040503050406030204" pitchFamily="18" charset="0"/>
+                              </a:rPr>
+                            </m:ctrlPr>
+                          </m:sSubSupPr>
+                          <m:e>
+                            <m:r>
+                              <a:rPr lang="en-US" i="1">
+                                <a:latin typeface="Cambria Math" panose="02040503050406030204" pitchFamily="18" charset="0"/>
+                              </a:rPr>
+                              <m:t>ℤ</m:t>
+                            </m:r>
+                          </m:e>
+                          <m:sub>
+                            <m:r>
+                              <a:rPr lang="en-US" i="1">
+                                <a:latin typeface="Cambria Math" panose="02040503050406030204" pitchFamily="18" charset="0"/>
+                              </a:rPr>
+                              <m:t>7</m:t>
+                            </m:r>
+                          </m:sub>
+                          <m:sup>
+                            <m:r>
+                              <a:rPr lang="en-US" i="1">
+                                <a:latin typeface="Cambria Math" panose="02040503050406030204" pitchFamily="18" charset="0"/>
+                              </a:rPr>
+                              <m:t>∗</m:t>
+                            </m:r>
+                          </m:sup>
+                        </m:sSubSup>
+                      </m:e>
+                    </m:d>
+                    <m:r>
+                      <a:rPr lang="en-US" b="0" i="1" smtClean="0">
+                        <a:latin typeface="Cambria Math" panose="02040503050406030204" pitchFamily="18" charset="0"/>
+                      </a:rPr>
+                      <m:t>=</m:t>
+                    </m:r>
+                    <m:r>
+                      <a:rPr lang="en-US" b="0" i="1" smtClean="0">
+                        <a:latin typeface="Cambria Math" panose="02040503050406030204" pitchFamily="18" charset="0"/>
+                      </a:rPr>
+                      <m:t>𝜙</m:t>
+                    </m:r>
+                    <m:d>
+                      <m:dPr>
+                        <m:ctrlPr>
+                          <a:rPr lang="en-US" b="0" i="1" smtClean="0">
+                            <a:latin typeface="Cambria Math" panose="02040503050406030204" pitchFamily="18" charset="0"/>
+                          </a:rPr>
+                        </m:ctrlPr>
+                      </m:dPr>
+                      <m:e>
+                        <m:r>
+                          <a:rPr lang="en-US" b="0" i="1" smtClean="0">
+                            <a:latin typeface="Cambria Math" panose="02040503050406030204" pitchFamily="18" charset="0"/>
+                          </a:rPr>
+                          <m:t>𝑝</m:t>
+                        </m:r>
+                      </m:e>
+                    </m:d>
+                    <m:r>
+                      <a:rPr lang="en-US" b="0" i="1" smtClean="0">
+                        <a:latin typeface="Cambria Math" panose="02040503050406030204" pitchFamily="18" charset="0"/>
+                      </a:rPr>
+                      <m:t>=6</m:t>
+                    </m:r>
+                  </m:oMath>
+                </a14:m>
+                <a:r>
+                  <a:rPr lang="ru-RU" dirty="0"/>
+                  <a:t>, </a:t>
+                </a:r>
+                <a14:m>
+                  <m:oMath xmlns:m="http://schemas.openxmlformats.org/officeDocument/2006/math">
+                    <m:sSubSup>
+                      <m:sSubSupPr>
+                        <m:ctrlPr>
+                          <a:rPr lang="en-US" i="1">
+                            <a:latin typeface="Cambria Math" panose="02040503050406030204" pitchFamily="18" charset="0"/>
+                          </a:rPr>
+                        </m:ctrlPr>
+                      </m:sSubSupPr>
+                      <m:e>
+                        <m:r>
+                          <a:rPr lang="en-US" i="1">
+                            <a:latin typeface="Cambria Math" panose="02040503050406030204" pitchFamily="18" charset="0"/>
+                          </a:rPr>
+                          <m:t>ℤ</m:t>
+                        </m:r>
+                      </m:e>
+                      <m:sub>
+                        <m:r>
+                          <a:rPr lang="en-US" i="1">
+                            <a:latin typeface="Cambria Math" panose="02040503050406030204" pitchFamily="18" charset="0"/>
+                          </a:rPr>
+                          <m:t>7</m:t>
+                        </m:r>
+                      </m:sub>
+                      <m:sup>
+                        <m:r>
+                          <a:rPr lang="en-US" i="1">
+                            <a:latin typeface="Cambria Math" panose="02040503050406030204" pitchFamily="18" charset="0"/>
+                          </a:rPr>
+                          <m:t>∗</m:t>
+                        </m:r>
+                      </m:sup>
+                    </m:sSubSup>
+                    <m:r>
+                      <a:rPr lang="en-US" i="1">
+                        <a:latin typeface="Cambria Math" panose="02040503050406030204" pitchFamily="18" charset="0"/>
+                        <a:ea typeface="Cambria Math" panose="02040503050406030204" pitchFamily="18" charset="0"/>
+                      </a:rPr>
+                      <m:t>≅</m:t>
+                    </m:r>
+                  </m:oMath>
+                </a14:m>
+                <a:r>
+                  <a:rPr lang="en-US" dirty="0"/>
+                  <a:t> </a:t>
+                </a:r>
+                <a14:m>
+                  <m:oMath xmlns:m="http://schemas.openxmlformats.org/officeDocument/2006/math">
+                    <m:sSubSup>
+                      <m:sSubSupPr>
+                        <m:ctrlPr>
+                          <a:rPr lang="en-US" i="1">
+                            <a:latin typeface="Cambria Math" panose="02040503050406030204" pitchFamily="18" charset="0"/>
+                          </a:rPr>
+                        </m:ctrlPr>
+                      </m:sSubSupPr>
+                      <m:e>
+                        <m:r>
+                          <a:rPr lang="en-US" i="1">
+                            <a:latin typeface="Cambria Math" panose="02040503050406030204" pitchFamily="18" charset="0"/>
+                          </a:rPr>
+                          <m:t>ℤ</m:t>
+                        </m:r>
+                      </m:e>
+                      <m:sub>
+                        <m:r>
+                          <a:rPr lang="ru-RU" i="1">
+                            <a:latin typeface="Cambria Math" panose="02040503050406030204" pitchFamily="18" charset="0"/>
+                          </a:rPr>
+                          <m:t>6</m:t>
+                        </m:r>
+                      </m:sub>
+                      <m:sup>
+                        <m:r>
+                          <a:rPr lang="ru-RU" i="1">
+                            <a:latin typeface="Cambria Math" panose="02040503050406030204" pitchFamily="18" charset="0"/>
+                          </a:rPr>
+                          <m:t>+</m:t>
+                        </m:r>
+                      </m:sup>
+                    </m:sSubSup>
+                  </m:oMath>
+                </a14:m>
+                <a:endParaRPr lang="en-US" dirty="0"/>
+              </a:p>
+              <a:p>
+                <a:pPr marL="0" indent="0">
+                  <a:buNone/>
+                </a:pPr>
+                <a:endParaRPr lang="en-US" dirty="0"/>
+              </a:p>
+              <a:p>
+                <a:pPr marL="0" indent="0">
+                  <a:buNone/>
+                </a:pPr>
+                <a:r>
+                  <a:rPr lang="ru-RU" dirty="0"/>
+                  <a:t>Возьмём </a:t>
+                </a:r>
+                <a14:m>
+                  <m:oMath xmlns:m="http://schemas.openxmlformats.org/officeDocument/2006/math">
+                    <m:sSup>
+                      <m:sSupPr>
+                        <m:ctrlPr>
+                          <a:rPr lang="en-US" b="0" i="1" smtClean="0">
+                            <a:latin typeface="Cambria Math" panose="02040503050406030204" pitchFamily="18" charset="0"/>
+                          </a:rPr>
+                        </m:ctrlPr>
+                      </m:sSupPr>
+                      <m:e>
+                        <m:r>
+                          <a:rPr lang="en-US" b="0" i="1" smtClean="0">
+                            <a:latin typeface="Cambria Math" panose="02040503050406030204" pitchFamily="18" charset="0"/>
+                          </a:rPr>
+                          <m:t>𝑔</m:t>
+                        </m:r>
+                      </m:e>
+                      <m:sup>
+                        <m:r>
+                          <a:rPr lang="en-US" b="0" i="1" smtClean="0">
+                            <a:latin typeface="Cambria Math" panose="02040503050406030204" pitchFamily="18" charset="0"/>
+                          </a:rPr>
+                          <m:t>′</m:t>
+                        </m:r>
+                      </m:sup>
+                    </m:sSup>
+                    <m:r>
+                      <a:rPr lang="en-US" b="0" i="1" smtClean="0">
+                        <a:latin typeface="Cambria Math" panose="02040503050406030204" pitchFamily="18" charset="0"/>
+                      </a:rPr>
+                      <m:t>=2</m:t>
+                    </m:r>
+                  </m:oMath>
+                </a14:m>
+                <a:r>
+                  <a:rPr lang="ru-RU" dirty="0"/>
+                  <a:t>. Рассмотрим </a:t>
+                </a:r>
+                <a14:m>
+                  <m:oMath xmlns:m="http://schemas.openxmlformats.org/officeDocument/2006/math">
+                    <m:r>
+                      <a:rPr lang="en-US" b="0" i="1" smtClean="0">
+                        <a:latin typeface="Cambria Math" panose="02040503050406030204" pitchFamily="18" charset="0"/>
+                      </a:rPr>
+                      <m:t>&lt;</m:t>
+                    </m:r>
+                    <m:sSup>
+                      <m:sSupPr>
+                        <m:ctrlPr>
+                          <a:rPr lang="en-US" b="0" i="1" smtClean="0">
+                            <a:latin typeface="Cambria Math" panose="02040503050406030204" pitchFamily="18" charset="0"/>
+                          </a:rPr>
+                        </m:ctrlPr>
+                      </m:sSupPr>
+                      <m:e>
+                        <m:r>
+                          <a:rPr lang="en-US" b="0" i="1" smtClean="0">
+                            <a:latin typeface="Cambria Math" panose="02040503050406030204" pitchFamily="18" charset="0"/>
+                          </a:rPr>
+                          <m:t>𝑔</m:t>
+                        </m:r>
+                      </m:e>
+                      <m:sup>
+                        <m:r>
+                          <a:rPr lang="en-US" b="0" i="1" smtClean="0">
+                            <a:latin typeface="Cambria Math" panose="02040503050406030204" pitchFamily="18" charset="0"/>
+                          </a:rPr>
+                          <m:t>′</m:t>
+                        </m:r>
+                      </m:sup>
+                    </m:sSup>
+                    <m:r>
+                      <a:rPr lang="en-US" b="0" i="1" smtClean="0">
+                        <a:latin typeface="Cambria Math" panose="02040503050406030204" pitchFamily="18" charset="0"/>
+                      </a:rPr>
+                      <m:t>&gt; ={2,4,1}</m:t>
+                    </m:r>
+                  </m:oMath>
+                </a14:m>
+                <a:r>
+                  <a:rPr lang="ru-RU" dirty="0"/>
+                  <a:t>. Т.е. </a:t>
+                </a:r>
+                <a14:m>
+                  <m:oMath xmlns:m="http://schemas.openxmlformats.org/officeDocument/2006/math">
+                    <m:r>
+                      <a:rPr lang="en-US" b="0" i="1" smtClean="0">
+                        <a:latin typeface="Cambria Math" panose="02040503050406030204" pitchFamily="18" charset="0"/>
+                      </a:rPr>
+                      <m:t>𝑔</m:t>
+                    </m:r>
+                    <m:r>
+                      <a:rPr lang="en-US" b="0" i="1" smtClean="0">
+                        <a:latin typeface="Cambria Math" panose="02040503050406030204" pitchFamily="18" charset="0"/>
+                      </a:rPr>
+                      <m:t>′</m:t>
+                    </m:r>
+                  </m:oMath>
+                </a14:m>
+                <a:r>
+                  <a:rPr lang="ru-RU" dirty="0"/>
+                  <a:t> определяет подгруппу мощности 3, </a:t>
+                </a:r>
+                <a14:m>
+                  <m:oMath xmlns:m="http://schemas.openxmlformats.org/officeDocument/2006/math">
+                    <m:r>
+                      <a:rPr lang="en-US" i="1">
+                        <a:latin typeface="Cambria Math" panose="02040503050406030204" pitchFamily="18" charset="0"/>
+                      </a:rPr>
+                      <m:t>&lt;</m:t>
+                    </m:r>
+                    <m:sSup>
+                      <m:sSupPr>
+                        <m:ctrlPr>
+                          <a:rPr lang="en-US" i="1">
+                            <a:latin typeface="Cambria Math" panose="02040503050406030204" pitchFamily="18" charset="0"/>
+                          </a:rPr>
+                        </m:ctrlPr>
+                      </m:sSupPr>
+                      <m:e>
+                        <m:r>
+                          <a:rPr lang="en-US" i="1">
+                            <a:latin typeface="Cambria Math" panose="02040503050406030204" pitchFamily="18" charset="0"/>
+                          </a:rPr>
+                          <m:t>𝑔</m:t>
+                        </m:r>
+                      </m:e>
+                      <m:sup>
+                        <m:r>
+                          <a:rPr lang="en-US" i="1">
+                            <a:latin typeface="Cambria Math" panose="02040503050406030204" pitchFamily="18" charset="0"/>
+                          </a:rPr>
+                          <m:t>′</m:t>
+                        </m:r>
+                      </m:sup>
+                    </m:sSup>
+                    <m:r>
+                      <a:rPr lang="en-US" i="1">
+                        <a:latin typeface="Cambria Math" panose="02040503050406030204" pitchFamily="18" charset="0"/>
+                      </a:rPr>
+                      <m:t>&gt; </m:t>
+                    </m:r>
+                    <m:r>
+                      <a:rPr lang="en-US" i="1">
+                        <a:latin typeface="Cambria Math" panose="02040503050406030204" pitchFamily="18" charset="0"/>
+                        <a:ea typeface="Cambria Math" panose="02040503050406030204" pitchFamily="18" charset="0"/>
+                      </a:rPr>
+                      <m:t>≅</m:t>
+                    </m:r>
+                    <m:sSubSup>
+                      <m:sSubSupPr>
+                        <m:ctrlPr>
+                          <a:rPr lang="ru-RU" b="0" i="1" smtClean="0">
+                            <a:latin typeface="Cambria Math" panose="02040503050406030204" pitchFamily="18" charset="0"/>
+                            <a:ea typeface="Cambria Math" panose="02040503050406030204" pitchFamily="18" charset="0"/>
+                          </a:rPr>
+                        </m:ctrlPr>
+                      </m:sSubSupPr>
+                      <m:e>
+                        <m:r>
+                          <a:rPr lang="ru-RU" b="0" i="1" smtClean="0">
+                            <a:latin typeface="Cambria Math" panose="02040503050406030204" pitchFamily="18" charset="0"/>
+                            <a:ea typeface="Cambria Math" panose="02040503050406030204" pitchFamily="18" charset="0"/>
+                          </a:rPr>
+                          <m:t>ℤ</m:t>
+                        </m:r>
+                      </m:e>
+                      <m:sub>
+                        <m:r>
+                          <a:rPr lang="ru-RU" b="0" i="1" smtClean="0">
+                            <a:latin typeface="Cambria Math" panose="02040503050406030204" pitchFamily="18" charset="0"/>
+                            <a:ea typeface="Cambria Math" panose="02040503050406030204" pitchFamily="18" charset="0"/>
+                          </a:rPr>
+                          <m:t>3</m:t>
+                        </m:r>
+                      </m:sub>
+                      <m:sup>
+                        <m:r>
+                          <a:rPr lang="en-US" b="0" i="1" smtClean="0">
+                            <a:latin typeface="Cambria Math" panose="02040503050406030204" pitchFamily="18" charset="0"/>
+                            <a:ea typeface="Cambria Math" panose="02040503050406030204" pitchFamily="18" charset="0"/>
+                          </a:rPr>
+                          <m:t>+</m:t>
+                        </m:r>
+                      </m:sup>
+                    </m:sSubSup>
+                  </m:oMath>
+                </a14:m>
+                <a:endParaRPr lang="ru-RU" dirty="0"/>
+              </a:p>
+              <a:p>
+                <a:pPr marL="0" indent="0">
+                  <a:buNone/>
+                </a:pPr>
+                <a:endParaRPr lang="ru-RU" dirty="0"/>
+              </a:p>
+              <a:p>
+                <a:pPr marL="0" indent="0">
+                  <a:buNone/>
+                </a:pPr>
+                <a:r>
+                  <a:rPr lang="ru-RU" dirty="0"/>
+                  <a:t>Возьмём </a:t>
+                </a:r>
+                <a14:m>
+                  <m:oMath xmlns:m="http://schemas.openxmlformats.org/officeDocument/2006/math">
+                    <m:sSup>
+                      <m:sSupPr>
+                        <m:ctrlPr>
+                          <a:rPr lang="en-US" i="1">
+                            <a:latin typeface="Cambria Math" panose="02040503050406030204" pitchFamily="18" charset="0"/>
+                          </a:rPr>
+                        </m:ctrlPr>
+                      </m:sSupPr>
+                      <m:e>
+                        <m:r>
+                          <a:rPr lang="en-US" i="1">
+                            <a:latin typeface="Cambria Math" panose="02040503050406030204" pitchFamily="18" charset="0"/>
+                          </a:rPr>
+                          <m:t>𝑔</m:t>
+                        </m:r>
+                      </m:e>
+                      <m:sup>
+                        <m:r>
+                          <a:rPr lang="en-US" i="1">
+                            <a:latin typeface="Cambria Math" panose="02040503050406030204" pitchFamily="18" charset="0"/>
+                          </a:rPr>
+                          <m:t>′</m:t>
+                        </m:r>
+                        <m:r>
+                          <a:rPr lang="en-US" b="0" i="1" smtClean="0">
+                            <a:latin typeface="Cambria Math" panose="02040503050406030204" pitchFamily="18" charset="0"/>
+                          </a:rPr>
+                          <m:t>′</m:t>
+                        </m:r>
+                      </m:sup>
+                    </m:sSup>
+                    <m:r>
+                      <a:rPr lang="en-US" i="1">
+                        <a:latin typeface="Cambria Math" panose="02040503050406030204" pitchFamily="18" charset="0"/>
+                      </a:rPr>
+                      <m:t>=</m:t>
+                    </m:r>
+                    <m:r>
+                      <a:rPr lang="ru-RU" b="0" i="1" smtClean="0">
+                        <a:latin typeface="Cambria Math" panose="02040503050406030204" pitchFamily="18" charset="0"/>
+                      </a:rPr>
+                      <m:t>6</m:t>
+                    </m:r>
+                  </m:oMath>
+                </a14:m>
+                <a:r>
+                  <a:rPr lang="ru-RU" dirty="0"/>
+                  <a:t>. Рассмотрим </a:t>
+                </a:r>
+                <a14:m>
+                  <m:oMath xmlns:m="http://schemas.openxmlformats.org/officeDocument/2006/math">
+                    <m:r>
+                      <a:rPr lang="en-US" i="1">
+                        <a:latin typeface="Cambria Math" panose="02040503050406030204" pitchFamily="18" charset="0"/>
+                      </a:rPr>
+                      <m:t>&lt;</m:t>
+                    </m:r>
+                    <m:sSup>
+                      <m:sSupPr>
+                        <m:ctrlPr>
+                          <a:rPr lang="en-US" i="1">
+                            <a:latin typeface="Cambria Math" panose="02040503050406030204" pitchFamily="18" charset="0"/>
+                          </a:rPr>
+                        </m:ctrlPr>
+                      </m:sSupPr>
+                      <m:e>
+                        <m:r>
+                          <a:rPr lang="en-US" i="1">
+                            <a:latin typeface="Cambria Math" panose="02040503050406030204" pitchFamily="18" charset="0"/>
+                          </a:rPr>
+                          <m:t>𝑔</m:t>
+                        </m:r>
+                      </m:e>
+                      <m:sup>
+                        <m:r>
+                          <a:rPr lang="en-US" i="1">
+                            <a:latin typeface="Cambria Math" panose="02040503050406030204" pitchFamily="18" charset="0"/>
+                          </a:rPr>
+                          <m:t>′</m:t>
+                        </m:r>
+                        <m:r>
+                          <a:rPr lang="en-US" b="0" i="1" smtClean="0">
+                            <a:latin typeface="Cambria Math" panose="02040503050406030204" pitchFamily="18" charset="0"/>
+                          </a:rPr>
+                          <m:t>′</m:t>
+                        </m:r>
+                      </m:sup>
+                    </m:sSup>
+                    <m:r>
+                      <a:rPr lang="en-US" i="1">
+                        <a:latin typeface="Cambria Math" panose="02040503050406030204" pitchFamily="18" charset="0"/>
+                      </a:rPr>
+                      <m:t>&gt; ={</m:t>
+                    </m:r>
+                    <m:r>
+                      <a:rPr lang="en-US" b="0" i="1" smtClean="0">
+                        <a:latin typeface="Cambria Math" panose="02040503050406030204" pitchFamily="18" charset="0"/>
+                      </a:rPr>
+                      <m:t>6,1</m:t>
+                    </m:r>
+                    <m:r>
+                      <a:rPr lang="en-US" i="1">
+                        <a:latin typeface="Cambria Math" panose="02040503050406030204" pitchFamily="18" charset="0"/>
+                      </a:rPr>
+                      <m:t>}</m:t>
+                    </m:r>
+                  </m:oMath>
+                </a14:m>
+                <a:r>
+                  <a:rPr lang="ru-RU" dirty="0"/>
+                  <a:t>. Т.е. </a:t>
+                </a:r>
+                <a14:m>
+                  <m:oMath xmlns:m="http://schemas.openxmlformats.org/officeDocument/2006/math">
+                    <m:r>
+                      <a:rPr lang="en-US" i="1">
+                        <a:latin typeface="Cambria Math" panose="02040503050406030204" pitchFamily="18" charset="0"/>
+                      </a:rPr>
+                      <m:t>𝑔</m:t>
+                    </m:r>
+                    <m:r>
+                      <a:rPr lang="en-US" i="1">
+                        <a:latin typeface="Cambria Math" panose="02040503050406030204" pitchFamily="18" charset="0"/>
+                      </a:rPr>
+                      <m:t>′</m:t>
+                    </m:r>
+                  </m:oMath>
+                </a14:m>
+                <a:r>
+                  <a:rPr lang="ru-RU" dirty="0"/>
+                  <a:t> определяет подгруппу мощности </a:t>
+                </a:r>
+                <a:r>
+                  <a:rPr lang="en-US" dirty="0"/>
+                  <a:t>2</a:t>
+                </a:r>
+                <a:r>
+                  <a:rPr lang="ru-RU" dirty="0"/>
+                  <a:t>, </a:t>
+                </a:r>
+                <a14:m>
+                  <m:oMath xmlns:m="http://schemas.openxmlformats.org/officeDocument/2006/math">
+                    <m:r>
+                      <a:rPr lang="en-US" i="1">
+                        <a:latin typeface="Cambria Math" panose="02040503050406030204" pitchFamily="18" charset="0"/>
+                      </a:rPr>
+                      <m:t>&lt;</m:t>
+                    </m:r>
+                    <m:sSup>
+                      <m:sSupPr>
+                        <m:ctrlPr>
+                          <a:rPr lang="en-US" i="1">
+                            <a:latin typeface="Cambria Math" panose="02040503050406030204" pitchFamily="18" charset="0"/>
+                          </a:rPr>
+                        </m:ctrlPr>
+                      </m:sSupPr>
+                      <m:e>
+                        <m:r>
+                          <a:rPr lang="en-US" i="1">
+                            <a:latin typeface="Cambria Math" panose="02040503050406030204" pitchFamily="18" charset="0"/>
+                          </a:rPr>
+                          <m:t>𝑔</m:t>
+                        </m:r>
+                      </m:e>
+                      <m:sup>
+                        <m:r>
+                          <a:rPr lang="en-US" i="1">
+                            <a:latin typeface="Cambria Math" panose="02040503050406030204" pitchFamily="18" charset="0"/>
+                          </a:rPr>
+                          <m:t>′</m:t>
+                        </m:r>
+                      </m:sup>
+                    </m:sSup>
+                    <m:r>
+                      <a:rPr lang="en-US" i="1">
+                        <a:latin typeface="Cambria Math" panose="02040503050406030204" pitchFamily="18" charset="0"/>
+                      </a:rPr>
+                      <m:t>&gt; </m:t>
+                    </m:r>
+                    <m:r>
+                      <a:rPr lang="en-US" i="1">
+                        <a:latin typeface="Cambria Math" panose="02040503050406030204" pitchFamily="18" charset="0"/>
+                        <a:ea typeface="Cambria Math" panose="02040503050406030204" pitchFamily="18" charset="0"/>
+                      </a:rPr>
+                      <m:t>≅</m:t>
+                    </m:r>
+                    <m:sSubSup>
+                      <m:sSubSupPr>
+                        <m:ctrlPr>
+                          <a:rPr lang="ru-RU" b="0" i="1" smtClean="0">
+                            <a:latin typeface="Cambria Math" panose="02040503050406030204" pitchFamily="18" charset="0"/>
+                            <a:ea typeface="Cambria Math" panose="02040503050406030204" pitchFamily="18" charset="0"/>
+                          </a:rPr>
+                        </m:ctrlPr>
+                      </m:sSubSupPr>
+                      <m:e>
+                        <m:r>
+                          <a:rPr lang="ru-RU" i="1">
+                            <a:latin typeface="Cambria Math" panose="02040503050406030204" pitchFamily="18" charset="0"/>
+                            <a:ea typeface="Cambria Math" panose="02040503050406030204" pitchFamily="18" charset="0"/>
+                          </a:rPr>
+                          <m:t>ℤ</m:t>
+                        </m:r>
+                      </m:e>
+                      <m:sub>
+                        <m:r>
+                          <a:rPr lang="ru-RU" b="0" i="1" smtClean="0">
+                            <a:latin typeface="Cambria Math" panose="02040503050406030204" pitchFamily="18" charset="0"/>
+                            <a:ea typeface="Cambria Math" panose="02040503050406030204" pitchFamily="18" charset="0"/>
+                          </a:rPr>
+                          <m:t>2</m:t>
+                        </m:r>
+                      </m:sub>
+                      <m:sup>
+                        <m:r>
+                          <a:rPr lang="en-US" i="1">
+                            <a:latin typeface="Cambria Math" panose="02040503050406030204" pitchFamily="18" charset="0"/>
+                            <a:ea typeface="Cambria Math" panose="02040503050406030204" pitchFamily="18" charset="0"/>
+                          </a:rPr>
+                          <m:t>+</m:t>
+                        </m:r>
+                      </m:sup>
+                    </m:sSubSup>
+                  </m:oMath>
+                </a14:m>
+                <a:endParaRPr lang="ru-RU" dirty="0"/>
+              </a:p>
+              <a:p>
+                <a:pPr marL="0" indent="0">
+                  <a:buNone/>
+                </a:pPr>
+                <a:endParaRPr lang="ru-RU" dirty="0"/>
+              </a:p>
+              <a:p>
+                <a:pPr marL="0" indent="0">
+                  <a:buNone/>
+                </a:pPr>
+                <a14:m>
+                  <m:oMath xmlns:m="http://schemas.openxmlformats.org/officeDocument/2006/math">
+                    <m:sSubSup>
+                      <m:sSubSupPr>
+                        <m:ctrlPr>
+                          <a:rPr lang="en-US" i="1">
+                            <a:latin typeface="Cambria Math" panose="02040503050406030204" pitchFamily="18" charset="0"/>
+                          </a:rPr>
+                        </m:ctrlPr>
+                      </m:sSubSupPr>
+                      <m:e>
+                        <m:r>
+                          <a:rPr lang="en-US" i="1">
+                            <a:latin typeface="Cambria Math" panose="02040503050406030204" pitchFamily="18" charset="0"/>
+                          </a:rPr>
+                          <m:t>ℤ</m:t>
+                        </m:r>
+                      </m:e>
+                      <m:sub>
+                        <m:r>
+                          <a:rPr lang="en-US" i="1">
+                            <a:latin typeface="Cambria Math" panose="02040503050406030204" pitchFamily="18" charset="0"/>
+                          </a:rPr>
+                          <m:t>7</m:t>
+                        </m:r>
+                      </m:sub>
+                      <m:sup>
+                        <m:r>
+                          <a:rPr lang="en-US" i="1">
+                            <a:latin typeface="Cambria Math" panose="02040503050406030204" pitchFamily="18" charset="0"/>
+                          </a:rPr>
+                          <m:t>∗</m:t>
+                        </m:r>
+                      </m:sup>
+                    </m:sSubSup>
+                    <m:r>
+                      <a:rPr lang="en-US" i="1" smtClean="0">
+                        <a:latin typeface="Cambria Math" panose="02040503050406030204" pitchFamily="18" charset="0"/>
+                        <a:ea typeface="Cambria Math" panose="02040503050406030204" pitchFamily="18" charset="0"/>
+                      </a:rPr>
+                      <m:t>≅</m:t>
+                    </m:r>
+                  </m:oMath>
+                </a14:m>
+                <a:r>
+                  <a:rPr lang="en-US" dirty="0"/>
+                  <a:t> </a:t>
+                </a:r>
+                <a14:m>
+                  <m:oMath xmlns:m="http://schemas.openxmlformats.org/officeDocument/2006/math">
+                    <m:sSubSup>
+                      <m:sSubSupPr>
+                        <m:ctrlPr>
+                          <a:rPr lang="en-US" i="1">
+                            <a:latin typeface="Cambria Math" panose="02040503050406030204" pitchFamily="18" charset="0"/>
+                          </a:rPr>
+                        </m:ctrlPr>
+                      </m:sSubSupPr>
+                      <m:e>
+                        <m:r>
+                          <a:rPr lang="en-US" i="1">
+                            <a:latin typeface="Cambria Math" panose="02040503050406030204" pitchFamily="18" charset="0"/>
+                          </a:rPr>
+                          <m:t>ℤ</m:t>
+                        </m:r>
+                      </m:e>
+                      <m:sub>
+                        <m:r>
+                          <a:rPr lang="ru-RU" b="0" i="1" smtClean="0">
+                            <a:latin typeface="Cambria Math" panose="02040503050406030204" pitchFamily="18" charset="0"/>
+                          </a:rPr>
+                          <m:t>6</m:t>
+                        </m:r>
+                      </m:sub>
+                      <m:sup>
+                        <m:r>
+                          <a:rPr lang="ru-RU" b="0" i="1" smtClean="0">
+                            <a:latin typeface="Cambria Math" panose="02040503050406030204" pitchFamily="18" charset="0"/>
+                          </a:rPr>
+                          <m:t>+</m:t>
+                        </m:r>
+                      </m:sup>
+                    </m:sSubSup>
+                    <m:r>
+                      <a:rPr lang="en-US" i="1">
+                        <a:latin typeface="Cambria Math" panose="02040503050406030204" pitchFamily="18" charset="0"/>
+                        <a:ea typeface="Cambria Math" panose="02040503050406030204" pitchFamily="18" charset="0"/>
+                      </a:rPr>
+                      <m:t>≅</m:t>
+                    </m:r>
+                    <m:sSubSup>
+                      <m:sSubSupPr>
+                        <m:ctrlPr>
+                          <a:rPr lang="ru-RU" i="1">
+                            <a:latin typeface="Cambria Math" panose="02040503050406030204" pitchFamily="18" charset="0"/>
+                            <a:ea typeface="Cambria Math" panose="02040503050406030204" pitchFamily="18" charset="0"/>
+                          </a:rPr>
+                        </m:ctrlPr>
+                      </m:sSubSupPr>
+                      <m:e>
+                        <m:r>
+                          <a:rPr lang="ru-RU" i="1">
+                            <a:latin typeface="Cambria Math" panose="02040503050406030204" pitchFamily="18" charset="0"/>
+                            <a:ea typeface="Cambria Math" panose="02040503050406030204" pitchFamily="18" charset="0"/>
+                          </a:rPr>
+                          <m:t>ℤ</m:t>
+                        </m:r>
+                      </m:e>
+                      <m:sub>
+                        <m:r>
+                          <a:rPr lang="ru-RU" i="1">
+                            <a:latin typeface="Cambria Math" panose="02040503050406030204" pitchFamily="18" charset="0"/>
+                            <a:ea typeface="Cambria Math" panose="02040503050406030204" pitchFamily="18" charset="0"/>
+                          </a:rPr>
+                          <m:t>3</m:t>
+                        </m:r>
+                      </m:sub>
+                      <m:sup>
+                        <m:r>
+                          <a:rPr lang="en-US" i="1">
+                            <a:latin typeface="Cambria Math" panose="02040503050406030204" pitchFamily="18" charset="0"/>
+                            <a:ea typeface="Cambria Math" panose="02040503050406030204" pitchFamily="18" charset="0"/>
+                          </a:rPr>
+                          <m:t>+</m:t>
+                        </m:r>
+                      </m:sup>
+                    </m:sSubSup>
+                    <m:r>
+                      <a:rPr lang="ru-RU" b="0" i="1" smtClean="0">
+                        <a:latin typeface="Cambria Math" panose="02040503050406030204" pitchFamily="18" charset="0"/>
+                        <a:ea typeface="Cambria Math" panose="02040503050406030204" pitchFamily="18" charset="0"/>
+                      </a:rPr>
+                      <m:t>×</m:t>
+                    </m:r>
+                    <m:sSubSup>
+                      <m:sSubSupPr>
+                        <m:ctrlPr>
+                          <a:rPr lang="ru-RU" i="1">
+                            <a:latin typeface="Cambria Math" panose="02040503050406030204" pitchFamily="18" charset="0"/>
+                            <a:ea typeface="Cambria Math" panose="02040503050406030204" pitchFamily="18" charset="0"/>
+                          </a:rPr>
+                        </m:ctrlPr>
+                      </m:sSubSupPr>
+                      <m:e>
+                        <m:r>
+                          <a:rPr lang="ru-RU" i="1">
+                            <a:latin typeface="Cambria Math" panose="02040503050406030204" pitchFamily="18" charset="0"/>
+                            <a:ea typeface="Cambria Math" panose="02040503050406030204" pitchFamily="18" charset="0"/>
+                          </a:rPr>
+                          <m:t>ℤ</m:t>
+                        </m:r>
+                      </m:e>
+                      <m:sub>
+                        <m:r>
+                          <a:rPr lang="ru-RU" i="1">
+                            <a:latin typeface="Cambria Math" panose="02040503050406030204" pitchFamily="18" charset="0"/>
+                            <a:ea typeface="Cambria Math" panose="02040503050406030204" pitchFamily="18" charset="0"/>
+                          </a:rPr>
+                          <m:t>2</m:t>
+                        </m:r>
+                      </m:sub>
+                      <m:sup>
+                        <m:r>
+                          <a:rPr lang="en-US" i="1">
+                            <a:latin typeface="Cambria Math" panose="02040503050406030204" pitchFamily="18" charset="0"/>
+                            <a:ea typeface="Cambria Math" panose="02040503050406030204" pitchFamily="18" charset="0"/>
+                          </a:rPr>
+                          <m:t>+</m:t>
+                        </m:r>
+                      </m:sup>
+                    </m:sSubSup>
+                  </m:oMath>
+                </a14:m>
+                <a:endParaRPr lang="ru-RU" dirty="0"/>
+              </a:p>
+            </p:txBody>
+          </p:sp>
+        </mc:Choice>
+        <mc:Fallback>
+          <p:sp>
+            <p:nvSpPr>
+              <p:cNvPr id="3" name="Объект 2"/>
+              <p:cNvSpPr>
+                <a:spLocks noGrp="1" noRot="1" noChangeAspect="1" noMove="1" noResize="1" noEditPoints="1" noAdjustHandles="1" noChangeArrowheads="1" noChangeShapeType="1" noTextEdit="1"/>
+              </p:cNvSpPr>
+              <p:nvPr>
+                <p:ph idx="1"/>
+              </p:nvPr>
+            </p:nvSpPr>
+            <p:spPr>
+              <a:blipFill>
+                <a:blip r:embed="rId2"/>
+                <a:stretch>
+                  <a:fillRect l="-928" t="-3221"/>
+                </a:stretch>
+              </a:blipFill>
+            </p:spPr>
+            <p:txBody>
+              <a:bodyPr/>
+              <a:lstStyle/>
+              <a:p>
+                <a:r>
+                  <a:rPr lang="ru-RU">
+                    <a:noFill/>
+                  </a:rPr>
+                  <a:t> </a:t>
+                </a:r>
+              </a:p>
+            </p:txBody>
+          </p:sp>
+        </mc:Fallback>
+      </mc:AlternateContent>
+      <p:sp>
+        <p:nvSpPr>
+          <p:cNvPr id="4" name="Номер слайда 3"/>
+          <p:cNvSpPr>
+            <a:spLocks noGrp="1"/>
+          </p:cNvSpPr>
+          <p:nvPr>
+            <p:ph type="sldNum" sz="quarter" idx="12"/>
+          </p:nvPr>
+        </p:nvSpPr>
+        <p:spPr/>
+        <p:txBody>
+          <a:bodyPr/>
+          <a:lstStyle/>
+          <a:p>
+            <a:fld id="{8253DDDB-F8F7-4D64-A7FD-3F3D61C1949F}" type="slidenum">
+              <a:rPr lang="ru-RU" smtClean="0"/>
+              <a:t>8</a:t>
+            </a:fld>
+            <a:endParaRPr lang="ru-RU"/>
+          </a:p>
+        </p:txBody>
+      </p:sp>
+    </p:spTree>
+    <p:extLst>
+      <p:ext uri="{BB962C8B-B14F-4D97-AF65-F5344CB8AC3E}">
+        <p14:creationId xmlns:p14="http://schemas.microsoft.com/office/powerpoint/2010/main" val="3179930098"/>
+      </p:ext>
+    </p:extLst>
+  </p:cSld>
+  <p:clrMapOvr>
+    <a:masterClrMapping/>
+  </p:clrMapOvr>
+</p:sld>
+</file>
+
+<file path=ppt/slides/slide9.xml><?xml version="1.0" encoding="utf-8"?>
+<p:sld xmlns:a="http://schemas.openxmlformats.org/drawingml/2006/main" xmlns:r="http://schemas.openxmlformats.org/officeDocument/2006/relationships" xmlns:p="http://schemas.openxmlformats.org/presentationml/2006/main">
+  <p:cSld>
+    <p:spTree>
+      <p:nvGrpSpPr>
+        <p:cNvPr id="1" name=""/>
+        <p:cNvGrpSpPr/>
+        <p:nvPr/>
+      </p:nvGrpSpPr>
+      <p:grpSpPr>
+        <a:xfrm>
+          <a:off x="0" y="0"/>
+          <a:ext cx="0" cy="0"/>
+          <a:chOff x="0" y="0"/>
+          <a:chExt cx="0" cy="0"/>
+        </a:xfrm>
+      </p:grpSpPr>
+      <p:sp>
+        <p:nvSpPr>
+          <p:cNvPr id="2" name="Заголовок 1"/>
+          <p:cNvSpPr>
+            <a:spLocks noGrp="1"/>
+          </p:cNvSpPr>
+          <p:nvPr>
+            <p:ph type="title"/>
+          </p:nvPr>
+        </p:nvSpPr>
+        <p:spPr/>
+        <p:txBody>
+          <a:bodyPr/>
+          <a:lstStyle/>
+          <a:p>
+            <a:r>
+              <a:rPr lang="ru-RU" dirty="0"/>
+              <a:t>Протокол обмена ключей </a:t>
+            </a:r>
+            <a:r>
+              <a:rPr lang="en-US" dirty="0" err="1"/>
+              <a:t>Diffie</a:t>
+            </a:r>
+            <a:r>
+              <a:rPr lang="en-US" dirty="0"/>
+              <a:t>-Hellman’</a:t>
+            </a:r>
+            <a:r>
+              <a:rPr lang="ru-RU" dirty="0"/>
+              <a:t>а</a:t>
+            </a:r>
+          </a:p>
+        </p:txBody>
+      </p:sp>
+      <mc:AlternateContent xmlns:mc="http://schemas.openxmlformats.org/markup-compatibility/2006">
+        <mc:Choice xmlns:a14="http://schemas.microsoft.com/office/drawing/2010/main" Requires="a14">
           <p:sp>
             <p:nvSpPr>
               <p:cNvPr id="3" name="Объект 2"/>
@@ -17847,7 +19294,7 @@
                   <a:buNone/>
                 </a:pPr>
                 <a:r>
-                  <a:rPr lang="ru-RU" dirty="0" smtClean="0"/>
+                  <a:rPr lang="ru-RU" dirty="0"/>
                   <a:t>Пусть </a:t>
                 </a:r>
                 <a14:m>
@@ -17861,15 +19308,15 @@
                   </m:oMath>
                 </a14:m>
                 <a:r>
-                  <a:rPr lang="en-US" dirty="0" smtClean="0"/>
+                  <a:rPr lang="en-US" dirty="0"/>
                   <a:t> </a:t>
                 </a:r>
                 <a:r>
-                  <a:rPr lang="ru-RU" dirty="0" smtClean="0"/>
+                  <a:rPr lang="ru-RU" dirty="0"/>
                   <a:t>большое простое число</a:t>
                 </a:r>
                 <a:r>
-                  <a:rPr lang="en-US" dirty="0" smtClean="0"/>
+                  <a:rPr lang="en-US" dirty="0"/>
                   <a:t>: </a:t>
                 </a:r>
                 <a14:m>
@@ -17908,11 +19355,11 @@
                   </m:oMath>
                 </a14:m>
                 <a:r>
-                  <a:rPr lang="en-US" dirty="0" smtClean="0"/>
+                  <a:rPr lang="en-US" dirty="0"/>
                   <a:t> - </a:t>
                 </a:r>
                 <a:r>
-                  <a:rPr lang="ru-RU" dirty="0" smtClean="0"/>
+                  <a:rPr lang="ru-RU" dirty="0"/>
                   <a:t>простое.</a:t>
                 </a:r>
               </a:p>
@@ -17921,7 +19368,7 @@
                   <a:buNone/>
                 </a:pPr>
                 <a:r>
-                  <a:rPr lang="ru-RU" dirty="0" smtClean="0"/>
+                  <a:rPr lang="ru-RU" dirty="0"/>
                   <a:t>Пусть </a:t>
                 </a:r>
                 <a14:m>
@@ -17935,8 +19382,12 @@
                   </m:oMath>
                 </a14:m>
                 <a:r>
-                  <a:rPr lang="ru-RU" dirty="0" smtClean="0"/>
-                  <a:t> – генератор в </a:t>
+                  <a:rPr lang="ru-RU" dirty="0"/>
+                  <a:t> </a:t>
+                </a:r>
+                <a:r>
+                  <a:rPr lang="ru-RU"/>
+                  <a:t>– генератор </a:t>
                 </a:r>
                 <a14:m>
                   <m:oMath xmlns:m="http://schemas.openxmlformats.org/officeDocument/2006/math">
@@ -17950,10 +19401,10 @@
                       </m:sSubSupPr>
                       <m:e>
                         <m:r>
-                          <a:rPr lang="en-US" b="0" i="1" smtClean="0">
-                            <a:latin typeface="Cambria Math" panose="02040503050406030204" pitchFamily="18" charset="0"/>
-                          </a:rPr>
-                          <m:t>𝑍</m:t>
+                          <a:rPr lang="ru-RU" sz="2800" i="1">
+                            <a:latin typeface="Cambria Math" panose="02040503050406030204" pitchFamily="18" charset="0"/>
+                          </a:rPr>
+                          <m:t>ℤ</m:t>
                         </m:r>
                       </m:e>
                       <m:sub>
@@ -17975,7 +19426,7 @@
                     </m:sSubSup>
                   </m:oMath>
                 </a14:m>
-                <a:endParaRPr lang="en-US" dirty="0" smtClean="0"/>
+                <a:endParaRPr lang="en-US" dirty="0"/>
               </a:p>
               <a:p>
                 <a:pPr marL="0" indent="0">
@@ -17987,7 +19438,7 @@
                 <a:pPr marL="0" indent="0">
                   <a:buNone/>
                 </a:pPr>
-                <a:endParaRPr lang="en-US" dirty="0" smtClean="0"/>
+                <a:endParaRPr lang="en-US" dirty="0"/>
               </a:p>
               <a:p>
                 <a:pPr marL="0" indent="0">
@@ -17999,7 +19450,7 @@
                 <a:pPr marL="0" indent="0">
                   <a:buNone/>
                 </a:pPr>
-                <a:endParaRPr lang="en-US" dirty="0" smtClean="0"/>
+                <a:endParaRPr lang="en-US" dirty="0"/>
               </a:p>
               <a:p>
                 <a:pPr marL="0" indent="0">
@@ -18011,26 +19462,26 @@
                 <a:pPr marL="0" indent="0">
                   <a:buNone/>
                 </a:pPr>
-                <a:endParaRPr lang="en-US" dirty="0" smtClean="0"/>
+                <a:endParaRPr lang="en-US" dirty="0"/>
               </a:p>
               <a:p>
                 <a:pPr marL="0" indent="0">
                   <a:buNone/>
                 </a:pPr>
                 <a:r>
-                  <a:rPr lang="en-US" dirty="0" smtClean="0"/>
+                  <a:rPr lang="en-US" dirty="0"/>
                   <a:t>NB: </a:t>
                 </a:r>
                 <a:r>
-                  <a:rPr lang="ru-RU" dirty="0" smtClean="0"/>
+                  <a:rPr lang="ru-RU" dirty="0"/>
                   <a:t>для формирования итогового симметричного ключа используют </a:t>
                 </a:r>
                 <a:r>
-                  <a:rPr lang="ru-RU" dirty="0" err="1" smtClean="0"/>
+                  <a:rPr lang="ru-RU" dirty="0" err="1"/>
                   <a:t>хэш</a:t>
                 </a:r>
                 <a:r>
-                  <a:rPr lang="ru-RU" dirty="0" smtClean="0"/>
+                  <a:rPr lang="ru-RU" dirty="0"/>
                   <a:t> от итогового значения </a:t>
                 </a:r>
                 <a14:m>
@@ -18063,15 +19514,14 @@
                   </m:oMath>
                 </a14:m>
                 <a:r>
-                  <a:rPr lang="ru-RU" dirty="0" smtClean="0"/>
+                  <a:rPr lang="ru-RU" dirty="0"/>
                   <a:t>, или другие техники выработки ключа из ключевого материала.</a:t>
                 </a:r>
-                <a:endParaRPr lang="ru-RU" dirty="0"/>
               </a:p>
             </p:txBody>
           </p:sp>
         </mc:Choice>
-        <mc:Fallback xmlns="">
+        <mc:Fallback>
           <p:sp>
             <p:nvSpPr>
               <p:cNvPr id="3" name="Объект 2"/>
@@ -18126,7 +19576,7 @@
           <a:p>
             <a:fld id="{8253DDDB-F8F7-4D64-A7FD-3F3D61C1949F}" type="slidenum">
               <a:rPr lang="ru-RU" smtClean="0"/>
-              <a:t>8</a:t>
+              <a:t>9</a:t>
             </a:fld>
             <a:endParaRPr lang="ru-RU" dirty="0"/>
           </a:p>
@@ -18155,10 +19605,9 @@
           <a:lstStyle/>
           <a:p>
             <a:r>
-              <a:rPr lang="en-US" sz="2400" b="1" u="sng" dirty="0" smtClean="0"/>
+              <a:rPr lang="en-US" sz="2400" b="1" u="sng" dirty="0"/>
               <a:t>Alice</a:t>
             </a:r>
-            <a:endParaRPr lang="en-US" sz="2400" b="1" u="sng" dirty="0"/>
           </a:p>
         </p:txBody>
       </p:sp>
@@ -18185,10 +19634,9 @@
           <a:lstStyle/>
           <a:p>
             <a:r>
-              <a:rPr lang="en-US" sz="2400" b="1" u="sng" dirty="0" smtClean="0"/>
+              <a:rPr lang="en-US" sz="2400" b="1" u="sng" dirty="0"/>
               <a:t>Bob</a:t>
             </a:r>
-            <a:endParaRPr lang="en-US" sz="2400" b="1" u="sng" dirty="0"/>
           </a:p>
         </p:txBody>
       </p:sp>
@@ -18216,21 +19664,16 @@
           <a:p>
             <a:r>
               <a:rPr lang="en-US" sz="2000" dirty="0"/>
-              <a:t>c</a:t>
-            </a:r>
-            <a:r>
-              <a:rPr lang="en-US" sz="2000" dirty="0" smtClean="0"/>
-              <a:t>hoose random </a:t>
-            </a:r>
-            <a:r>
-              <a:rPr lang="en-US" sz="2400" b="1" dirty="0" smtClean="0"/>
+              <a:t>choose random </a:t>
+            </a:r>
+            <a:r>
+              <a:rPr lang="en-US" sz="2400" b="1" dirty="0"/>
               <a:t>a</a:t>
             </a:r>
             <a:r>
-              <a:rPr lang="en-US" sz="2000" dirty="0" smtClean="0"/>
+              <a:rPr lang="en-US" sz="2000" dirty="0"/>
               <a:t> in {1,…,p-1}</a:t>
             </a:r>
-            <a:endParaRPr lang="en-US" sz="2000" dirty="0"/>
           </a:p>
         </p:txBody>
       </p:sp>
@@ -18258,21 +19701,16 @@
           <a:p>
             <a:r>
               <a:rPr lang="en-US" sz="2000" dirty="0"/>
-              <a:t>c</a:t>
-            </a:r>
-            <a:r>
-              <a:rPr lang="en-US" sz="2000" dirty="0" smtClean="0"/>
-              <a:t>hoose random </a:t>
-            </a:r>
-            <a:r>
-              <a:rPr lang="en-US" sz="2400" b="1" dirty="0" smtClean="0"/>
+              <a:t>choose random </a:t>
+            </a:r>
+            <a:r>
+              <a:rPr lang="en-US" sz="2400" b="1" dirty="0"/>
               <a:t>b</a:t>
             </a:r>
             <a:r>
-              <a:rPr lang="en-US" sz="2000" dirty="0" smtClean="0"/>
+              <a:rPr lang="en-US" sz="2000" dirty="0"/>
               <a:t> in {1,…,p-1}</a:t>
             </a:r>
-            <a:endParaRPr lang="en-US" sz="2000" dirty="0"/>
           </a:p>
         </p:txBody>
       </p:sp>
@@ -18365,27 +19803,27 @@
           <a:lstStyle/>
           <a:p>
             <a:r>
-              <a:rPr lang="en-US" sz="2400" b="1" dirty="0" err="1" smtClean="0"/>
+              <a:rPr lang="en-US" sz="2400" b="1" dirty="0" err="1"/>
               <a:t>k</a:t>
             </a:r>
             <a:r>
-              <a:rPr lang="en-US" sz="2400" b="1" baseline="-25000" dirty="0" err="1" smtClean="0"/>
+              <a:rPr lang="en-US" sz="2400" b="1" baseline="-25000" dirty="0" err="1"/>
               <a:t>AB</a:t>
             </a:r>
             <a:r>
-              <a:rPr lang="en-US" sz="2400" b="1" dirty="0" smtClean="0"/>
+              <a:rPr lang="en-US" sz="2400" b="1" dirty="0"/>
               <a:t> = g</a:t>
             </a:r>
             <a:r>
-              <a:rPr lang="en-US" sz="2800" b="1" baseline="30000" dirty="0" smtClean="0"/>
+              <a:rPr lang="en-US" sz="2800" b="1" baseline="30000" dirty="0"/>
               <a:t>ab</a:t>
             </a:r>
             <a:r>
-              <a:rPr lang="en-US" sz="2400" b="1" dirty="0" smtClean="0"/>
+              <a:rPr lang="en-US" sz="2400" b="1" dirty="0"/>
               <a:t>  </a:t>
             </a:r>
             <a:r>
-              <a:rPr lang="en-US" dirty="0" smtClean="0"/>
+              <a:rPr lang="en-US" dirty="0"/>
               <a:t>(mod p)</a:t>
             </a:r>
             <a:endParaRPr lang="en-US" baseline="-25000" dirty="0"/>
@@ -18415,59 +19853,59 @@
           <a:lstStyle/>
           <a:p>
             <a:r>
-              <a:rPr lang="en-US" sz="2400" dirty="0" smtClean="0"/>
+              <a:rPr lang="en-US" sz="2400" dirty="0"/>
               <a:t>=      </a:t>
             </a:r>
             <a:r>
-              <a:rPr lang="en-US" sz="2800" dirty="0" smtClean="0"/>
+              <a:rPr lang="en-US" sz="2800" dirty="0"/>
               <a:t>(</a:t>
             </a:r>
             <a:r>
-              <a:rPr lang="en-US" sz="2400" dirty="0" err="1" smtClean="0"/>
+              <a:rPr lang="en-US" sz="2400" dirty="0" err="1"/>
               <a:t>g</a:t>
             </a:r>
             <a:r>
-              <a:rPr lang="en-US" sz="2800" baseline="30000" dirty="0" err="1" smtClean="0"/>
+              <a:rPr lang="en-US" sz="2800" baseline="30000" dirty="0" err="1"/>
               <a:t>a</a:t>
             </a:r>
             <a:r>
-              <a:rPr lang="en-US" sz="2800" dirty="0" smtClean="0"/>
+              <a:rPr lang="en-US" sz="2800" dirty="0"/>
               <a:t>)</a:t>
             </a:r>
             <a:r>
-              <a:rPr lang="en-US" sz="2800" baseline="50000" dirty="0" smtClean="0"/>
+              <a:rPr lang="en-US" sz="2800" baseline="50000" dirty="0"/>
               <a:t>b</a:t>
             </a:r>
             <a:r>
-              <a:rPr lang="en-US" sz="2800" dirty="0" smtClean="0"/>
+              <a:rPr lang="en-US" sz="2800" dirty="0"/>
               <a:t>     </a:t>
             </a:r>
             <a:r>
-              <a:rPr lang="en-US" sz="2400" dirty="0" smtClean="0"/>
+              <a:rPr lang="en-US" sz="2400" dirty="0"/>
               <a:t>=</a:t>
             </a:r>
             <a:r>
-              <a:rPr lang="en-US" sz="2800" dirty="0" smtClean="0"/>
+              <a:rPr lang="en-US" sz="2800" dirty="0"/>
               <a:t>  </a:t>
             </a:r>
             <a:r>
-              <a:rPr lang="en-US" sz="2400" b="1" dirty="0" err="1" smtClean="0"/>
+              <a:rPr lang="en-US" sz="2400" b="1" dirty="0" err="1"/>
               <a:t>A</a:t>
             </a:r>
             <a:r>
-              <a:rPr lang="en-US" sz="2800" b="1" baseline="30000" dirty="0" err="1" smtClean="0"/>
+              <a:rPr lang="en-US" sz="2800" b="1" baseline="30000" dirty="0" err="1"/>
               <a:t>b</a:t>
             </a:r>
             <a:r>
-              <a:rPr lang="en-US" sz="2800" baseline="30000" dirty="0" smtClean="0"/>
+              <a:rPr lang="en-US" sz="2800" baseline="30000" dirty="0"/>
               <a:t> </a:t>
             </a:r>
             <a:r>
-              <a:rPr lang="en-US" sz="2800" dirty="0" smtClean="0"/>
+              <a:rPr lang="en-US" sz="2800" dirty="0"/>
               <a:t> </a:t>
             </a:r>
             <a:r>
-              <a:rPr lang="en-US" sz="1600" dirty="0" smtClean="0"/>
+              <a:rPr lang="en-US" sz="1600" dirty="0"/>
               <a:t>(mod p)</a:t>
             </a:r>
             <a:endParaRPr lang="en-US" sz="1600" baseline="30000" dirty="0"/>
@@ -18497,35 +19935,35 @@
           <a:lstStyle/>
           <a:p>
             <a:r>
-              <a:rPr lang="en-US" sz="2400" dirty="0" smtClean="0"/>
+              <a:rPr lang="en-US" sz="2400" dirty="0"/>
               <a:t>  </a:t>
             </a:r>
             <a:r>
-              <a:rPr lang="en-US" sz="2400" b="1" dirty="0" smtClean="0"/>
+              <a:rPr lang="en-US" sz="2400" b="1" dirty="0"/>
               <a:t>B</a:t>
             </a:r>
             <a:r>
-              <a:rPr lang="en-US" sz="2800" b="1" baseline="30000" dirty="0" smtClean="0"/>
+              <a:rPr lang="en-US" sz="2800" b="1" baseline="30000" dirty="0"/>
               <a:t>a</a:t>
             </a:r>
             <a:r>
-              <a:rPr lang="en-US" sz="2800" baseline="30000" dirty="0" smtClean="0"/>
+              <a:rPr lang="en-US" sz="2800" baseline="30000" dirty="0"/>
               <a:t>  </a:t>
             </a:r>
             <a:r>
-              <a:rPr lang="en-US" sz="1600" dirty="0" smtClean="0"/>
+              <a:rPr lang="en-US" sz="1600" dirty="0"/>
               <a:t>(mod p)   </a:t>
             </a:r>
             <a:r>
-              <a:rPr lang="en-US" sz="2400" dirty="0" smtClean="0"/>
+              <a:rPr lang="en-US" sz="2400" dirty="0"/>
               <a:t>=    </a:t>
             </a:r>
             <a:r>
-              <a:rPr lang="en-US" sz="2800" dirty="0" smtClean="0"/>
+              <a:rPr lang="en-US" sz="2800" dirty="0"/>
               <a:t>(</a:t>
             </a:r>
             <a:r>
-              <a:rPr lang="en-US" sz="2400" dirty="0" err="1" smtClean="0"/>
+              <a:rPr lang="en-US" sz="2400" dirty="0" err="1"/>
               <a:t>g</a:t>
             </a:r>
             <a:r>
@@ -18533,19 +19971,19 @@
               <a:t>b</a:t>
             </a:r>
             <a:r>
-              <a:rPr lang="en-US" sz="2800" dirty="0" smtClean="0"/>
+              <a:rPr lang="en-US" sz="2800" dirty="0"/>
               <a:t>)</a:t>
             </a:r>
             <a:r>
-              <a:rPr lang="en-US" sz="2800" baseline="50000" dirty="0" smtClean="0"/>
+              <a:rPr lang="en-US" sz="2800" baseline="50000" dirty="0"/>
               <a:t>a</a:t>
             </a:r>
             <a:r>
-              <a:rPr lang="en-US" sz="2800" dirty="0" smtClean="0"/>
+              <a:rPr lang="en-US" sz="2800" dirty="0"/>
               <a:t>  </a:t>
             </a:r>
             <a:r>
-              <a:rPr lang="en-US" sz="2400" dirty="0" smtClean="0"/>
+              <a:rPr lang="en-US" sz="2400" dirty="0"/>
               <a:t>=</a:t>
             </a:r>
             <a:endParaRPr lang="en-US" sz="2400" baseline="30000" dirty="0"/>
@@ -18601,702 +20039,6 @@
   <p:clrMapOvr>
     <a:masterClrMapping/>
   </p:clrMapOvr>
-  <p:timing>
-    <p:tnLst>
-      <p:par>
-        <p:cTn id="1" dur="indefinite" restart="never" nodeType="tmRoot"/>
-      </p:par>
-    </p:tnLst>
-  </p:timing>
-</p:sld>
-</file>
-
-<file path=ppt/slides/slide9.xml><?xml version="1.0" encoding="utf-8"?>
-<p:sld xmlns:a="http://schemas.openxmlformats.org/drawingml/2006/main" xmlns:r="http://schemas.openxmlformats.org/officeDocument/2006/relationships" xmlns:p="http://schemas.openxmlformats.org/presentationml/2006/main">
-  <p:cSld>
-    <p:spTree>
-      <p:nvGrpSpPr>
-        <p:cNvPr id="1" name=""/>
-        <p:cNvGrpSpPr/>
-        <p:nvPr/>
-      </p:nvGrpSpPr>
-      <p:grpSpPr>
-        <a:xfrm>
-          <a:off x="0" y="0"/>
-          <a:ext cx="0" cy="0"/>
-          <a:chOff x="0" y="0"/>
-          <a:chExt cx="0" cy="0"/>
-        </a:xfrm>
-      </p:grpSpPr>
-      <p:sp>
-        <p:nvSpPr>
-          <p:cNvPr id="2" name="Заголовок 1"/>
-          <p:cNvSpPr>
-            <a:spLocks noGrp="1"/>
-          </p:cNvSpPr>
-          <p:nvPr>
-            <p:ph type="title"/>
-          </p:nvPr>
-        </p:nvSpPr>
-        <p:spPr/>
-        <p:txBody>
-          <a:bodyPr/>
-          <a:lstStyle/>
-          <a:p>
-            <a:r>
-              <a:rPr lang="ru-RU" dirty="0" smtClean="0"/>
-              <a:t>Стойкость</a:t>
-            </a:r>
-            <a:endParaRPr lang="ru-RU" dirty="0"/>
-          </a:p>
-        </p:txBody>
-      </p:sp>
-      <mc:AlternateContent xmlns:mc="http://schemas.openxmlformats.org/markup-compatibility/2006" xmlns:a14="http://schemas.microsoft.com/office/drawing/2010/main">
-        <mc:Choice Requires="a14">
-          <p:sp>
-            <p:nvSpPr>
-              <p:cNvPr id="3" name="Объект 2"/>
-              <p:cNvSpPr>
-                <a:spLocks noGrp="1"/>
-              </p:cNvSpPr>
-              <p:nvPr>
-                <p:ph idx="1"/>
-              </p:nvPr>
-            </p:nvSpPr>
-            <p:spPr/>
-            <p:txBody>
-              <a:bodyPr/>
-              <a:lstStyle/>
-              <a:p>
-                <a:pPr marL="0" indent="0">
-                  <a:buNone/>
-                </a:pPr>
-                <a:r>
-                  <a:rPr lang="ru-RU" dirty="0" smtClean="0"/>
-                  <a:t>Противник видит </a:t>
-                </a:r>
-                <a14:m>
-                  <m:oMath xmlns:m="http://schemas.openxmlformats.org/officeDocument/2006/math">
-                    <m:r>
-                      <a:rPr lang="en-US" b="0" i="1" smtClean="0">
-                        <a:latin typeface="Cambria Math" panose="02040503050406030204" pitchFamily="18" charset="0"/>
-                      </a:rPr>
-                      <m:t>𝑝</m:t>
-                    </m:r>
-                    <m:r>
-                      <a:rPr lang="en-US" b="0" i="1" smtClean="0">
-                        <a:latin typeface="Cambria Math" panose="02040503050406030204" pitchFamily="18" charset="0"/>
-                      </a:rPr>
-                      <m:t>, </m:t>
-                    </m:r>
-                    <m:r>
-                      <a:rPr lang="en-US" b="0" i="1" smtClean="0">
-                        <a:latin typeface="Cambria Math" panose="02040503050406030204" pitchFamily="18" charset="0"/>
-                      </a:rPr>
-                      <m:t>𝑔</m:t>
-                    </m:r>
-                    <m:r>
-                      <a:rPr lang="en-US" b="0" i="1" smtClean="0">
-                        <a:latin typeface="Cambria Math" panose="02040503050406030204" pitchFamily="18" charset="0"/>
-                      </a:rPr>
-                      <m:t>, </m:t>
-                    </m:r>
-                    <m:r>
-                      <a:rPr lang="en-US" b="0" i="1" smtClean="0">
-                        <a:latin typeface="Cambria Math" panose="02040503050406030204" pitchFamily="18" charset="0"/>
-                      </a:rPr>
-                      <m:t>𝐴</m:t>
-                    </m:r>
-                    <m:r>
-                      <a:rPr lang="en-US" b="0" i="1" smtClean="0">
-                        <a:latin typeface="Cambria Math" panose="02040503050406030204" pitchFamily="18" charset="0"/>
-                      </a:rPr>
-                      <m:t>=</m:t>
-                    </m:r>
-                    <m:sSup>
-                      <m:sSupPr>
-                        <m:ctrlPr>
-                          <a:rPr lang="en-US" b="0" i="1" smtClean="0">
-                            <a:latin typeface="Cambria Math" panose="02040503050406030204" pitchFamily="18" charset="0"/>
-                          </a:rPr>
-                        </m:ctrlPr>
-                      </m:sSupPr>
-                      <m:e>
-                        <m:r>
-                          <a:rPr lang="en-US" b="0" i="1" smtClean="0">
-                            <a:latin typeface="Cambria Math" panose="02040503050406030204" pitchFamily="18" charset="0"/>
-                          </a:rPr>
-                          <m:t>𝑔</m:t>
-                        </m:r>
-                      </m:e>
-                      <m:sup>
-                        <m:r>
-                          <a:rPr lang="en-US" b="0" i="1" smtClean="0">
-                            <a:latin typeface="Cambria Math" panose="02040503050406030204" pitchFamily="18" charset="0"/>
-                          </a:rPr>
-                          <m:t>𝑎</m:t>
-                        </m:r>
-                      </m:sup>
-                    </m:sSup>
-                    <m:d>
-                      <m:dPr>
-                        <m:ctrlPr>
-                          <a:rPr lang="en-US" b="0" i="1" smtClean="0">
-                            <a:latin typeface="Cambria Math" panose="02040503050406030204" pitchFamily="18" charset="0"/>
-                          </a:rPr>
-                        </m:ctrlPr>
-                      </m:dPr>
-                      <m:e>
-                        <m:r>
-                          <a:rPr lang="en-US" b="0" i="1" smtClean="0">
-                            <a:latin typeface="Cambria Math" panose="02040503050406030204" pitchFamily="18" charset="0"/>
-                          </a:rPr>
-                          <m:t>𝑚𝑜𝑑</m:t>
-                        </m:r>
-                        <m:r>
-                          <a:rPr lang="en-US" b="0" i="1" smtClean="0">
-                            <a:latin typeface="Cambria Math" panose="02040503050406030204" pitchFamily="18" charset="0"/>
-                          </a:rPr>
-                          <m:t> </m:t>
-                        </m:r>
-                        <m:r>
-                          <a:rPr lang="en-US" b="0" i="1" smtClean="0">
-                            <a:latin typeface="Cambria Math" panose="02040503050406030204" pitchFamily="18" charset="0"/>
-                          </a:rPr>
-                          <m:t>𝑝</m:t>
-                        </m:r>
-                      </m:e>
-                    </m:d>
-                    <m:r>
-                      <a:rPr lang="en-US" b="0" i="1" smtClean="0">
-                        <a:latin typeface="Cambria Math" panose="02040503050406030204" pitchFamily="18" charset="0"/>
-                      </a:rPr>
-                      <m:t>, </m:t>
-                    </m:r>
-                    <m:r>
-                      <a:rPr lang="en-US" b="0" i="1" smtClean="0">
-                        <a:latin typeface="Cambria Math" panose="02040503050406030204" pitchFamily="18" charset="0"/>
-                      </a:rPr>
-                      <m:t>𝐵</m:t>
-                    </m:r>
-                    <m:r>
-                      <a:rPr lang="en-US" b="0" i="1" smtClean="0">
-                        <a:latin typeface="Cambria Math" panose="02040503050406030204" pitchFamily="18" charset="0"/>
-                      </a:rPr>
-                      <m:t>=</m:t>
-                    </m:r>
-                    <m:sSup>
-                      <m:sSupPr>
-                        <m:ctrlPr>
-                          <a:rPr lang="en-US" b="0" i="1" smtClean="0">
-                            <a:latin typeface="Cambria Math" panose="02040503050406030204" pitchFamily="18" charset="0"/>
-                          </a:rPr>
-                        </m:ctrlPr>
-                      </m:sSupPr>
-                      <m:e>
-                        <m:r>
-                          <a:rPr lang="en-US" b="0" i="1" smtClean="0">
-                            <a:latin typeface="Cambria Math" panose="02040503050406030204" pitchFamily="18" charset="0"/>
-                          </a:rPr>
-                          <m:t>𝑔</m:t>
-                        </m:r>
-                      </m:e>
-                      <m:sup>
-                        <m:r>
-                          <a:rPr lang="en-US" b="0" i="1" smtClean="0">
-                            <a:latin typeface="Cambria Math" panose="02040503050406030204" pitchFamily="18" charset="0"/>
-                          </a:rPr>
-                          <m:t>𝑏</m:t>
-                        </m:r>
-                      </m:sup>
-                    </m:sSup>
-                    <m:r>
-                      <a:rPr lang="en-US" b="0" i="1" smtClean="0">
-                        <a:latin typeface="Cambria Math" panose="02040503050406030204" pitchFamily="18" charset="0"/>
-                      </a:rPr>
-                      <m:t>(</m:t>
-                    </m:r>
-                    <m:r>
-                      <a:rPr lang="en-US" b="0" i="1" smtClean="0">
-                        <a:latin typeface="Cambria Math" panose="02040503050406030204" pitchFamily="18" charset="0"/>
-                      </a:rPr>
-                      <m:t>𝑚𝑜𝑑</m:t>
-                    </m:r>
-                    <m:r>
-                      <a:rPr lang="en-US" b="0" i="1" smtClean="0">
-                        <a:latin typeface="Cambria Math" panose="02040503050406030204" pitchFamily="18" charset="0"/>
-                      </a:rPr>
-                      <m:t> </m:t>
-                    </m:r>
-                    <m:r>
-                      <a:rPr lang="en-US" b="0" i="1" smtClean="0">
-                        <a:latin typeface="Cambria Math" panose="02040503050406030204" pitchFamily="18" charset="0"/>
-                      </a:rPr>
-                      <m:t>𝑝</m:t>
-                    </m:r>
-                    <m:r>
-                      <a:rPr lang="en-US" b="0" i="1" smtClean="0">
-                        <a:latin typeface="Cambria Math" panose="02040503050406030204" pitchFamily="18" charset="0"/>
-                      </a:rPr>
-                      <m:t>)</m:t>
-                    </m:r>
-                  </m:oMath>
-                </a14:m>
-                <a:endParaRPr lang="ru-RU" dirty="0" smtClean="0"/>
-              </a:p>
-              <a:p>
-                <a:pPr marL="0" indent="0">
-                  <a:buNone/>
-                </a:pPr>
-                <a:r>
-                  <a:rPr lang="ru-RU" dirty="0" smtClean="0"/>
-                  <a:t>Противник хочет вычислить </a:t>
-                </a:r>
-                <a14:m>
-                  <m:oMath xmlns:m="http://schemas.openxmlformats.org/officeDocument/2006/math">
-                    <m:sSup>
-                      <m:sSupPr>
-                        <m:ctrlPr>
-                          <a:rPr lang="en-US" b="0" i="1" smtClean="0">
-                            <a:latin typeface="Cambria Math" panose="02040503050406030204" pitchFamily="18" charset="0"/>
-                          </a:rPr>
-                        </m:ctrlPr>
-                      </m:sSupPr>
-                      <m:e>
-                        <m:r>
-                          <a:rPr lang="en-US" b="0" i="1" smtClean="0">
-                            <a:latin typeface="Cambria Math" panose="02040503050406030204" pitchFamily="18" charset="0"/>
-                          </a:rPr>
-                          <m:t>𝑔</m:t>
-                        </m:r>
-                      </m:e>
-                      <m:sup>
-                        <m:r>
-                          <a:rPr lang="en-US" b="0" i="1" smtClean="0">
-                            <a:latin typeface="Cambria Math" panose="02040503050406030204" pitchFamily="18" charset="0"/>
-                          </a:rPr>
-                          <m:t>𝑎𝑏</m:t>
-                        </m:r>
-                      </m:sup>
-                    </m:sSup>
-                    <m:r>
-                      <a:rPr lang="en-US" b="0" i="1" smtClean="0">
-                        <a:latin typeface="Cambria Math" panose="02040503050406030204" pitchFamily="18" charset="0"/>
-                      </a:rPr>
-                      <m:t>(</m:t>
-                    </m:r>
-                    <m:r>
-                      <a:rPr lang="en-US" b="0" i="1" smtClean="0">
-                        <a:latin typeface="Cambria Math" panose="02040503050406030204" pitchFamily="18" charset="0"/>
-                      </a:rPr>
-                      <m:t>𝑚𝑜𝑑</m:t>
-                    </m:r>
-                    <m:r>
-                      <a:rPr lang="en-US" b="0" i="1" smtClean="0">
-                        <a:latin typeface="Cambria Math" panose="02040503050406030204" pitchFamily="18" charset="0"/>
-                      </a:rPr>
-                      <m:t> </m:t>
-                    </m:r>
-                    <m:r>
-                      <a:rPr lang="en-US" b="0" i="1" smtClean="0">
-                        <a:latin typeface="Cambria Math" panose="02040503050406030204" pitchFamily="18" charset="0"/>
-                      </a:rPr>
-                      <m:t>𝑝</m:t>
-                    </m:r>
-                    <m:r>
-                      <a:rPr lang="en-US" b="0" i="1" smtClean="0">
-                        <a:latin typeface="Cambria Math" panose="02040503050406030204" pitchFamily="18" charset="0"/>
-                      </a:rPr>
-                      <m:t>)</m:t>
-                    </m:r>
-                  </m:oMath>
-                </a14:m>
-                <a:endParaRPr lang="ru-RU" dirty="0"/>
-              </a:p>
-              <a:p>
-                <a:pPr marL="0" indent="0">
-                  <a:buNone/>
-                </a:pPr>
-                <a:r>
-                  <a:rPr lang="ru-RU" dirty="0" smtClean="0"/>
-                  <a:t>Пусть </a:t>
-                </a:r>
-                <a14:m>
-                  <m:oMath xmlns:m="http://schemas.openxmlformats.org/officeDocument/2006/math">
-                    <m:r>
-                      <a:rPr lang="en-US" b="0" i="1" smtClean="0">
-                        <a:latin typeface="Cambria Math" panose="02040503050406030204" pitchFamily="18" charset="0"/>
-                      </a:rPr>
-                      <m:t>𝐷</m:t>
-                    </m:r>
-                    <m:sSub>
-                      <m:sSubPr>
-                        <m:ctrlPr>
-                          <a:rPr lang="en-US" b="0" i="1" smtClean="0">
-                            <a:latin typeface="Cambria Math" panose="02040503050406030204" pitchFamily="18" charset="0"/>
-                          </a:rPr>
-                        </m:ctrlPr>
-                      </m:sSubPr>
-                      <m:e>
-                        <m:r>
-                          <a:rPr lang="en-US" b="0" i="1" smtClean="0">
-                            <a:latin typeface="Cambria Math" panose="02040503050406030204" pitchFamily="18" charset="0"/>
-                          </a:rPr>
-                          <m:t>𝐻</m:t>
-                        </m:r>
-                      </m:e>
-                      <m:sub>
-                        <m:r>
-                          <a:rPr lang="en-US" b="0" i="1" smtClean="0">
-                            <a:latin typeface="Cambria Math" panose="02040503050406030204" pitchFamily="18" charset="0"/>
-                          </a:rPr>
-                          <m:t>𝑔</m:t>
-                        </m:r>
-                      </m:sub>
-                    </m:sSub>
-                    <m:d>
-                      <m:dPr>
-                        <m:ctrlPr>
-                          <a:rPr lang="en-US" b="0" i="1" smtClean="0">
-                            <a:latin typeface="Cambria Math" panose="02040503050406030204" pitchFamily="18" charset="0"/>
-                          </a:rPr>
-                        </m:ctrlPr>
-                      </m:dPr>
-                      <m:e>
-                        <m:sSup>
-                          <m:sSupPr>
-                            <m:ctrlPr>
-                              <a:rPr lang="en-US" b="0" i="1" smtClean="0">
-                                <a:latin typeface="Cambria Math" panose="02040503050406030204" pitchFamily="18" charset="0"/>
-                              </a:rPr>
-                            </m:ctrlPr>
-                          </m:sSupPr>
-                          <m:e>
-                            <m:r>
-                              <a:rPr lang="en-US" b="0" i="1" smtClean="0">
-                                <a:latin typeface="Cambria Math" panose="02040503050406030204" pitchFamily="18" charset="0"/>
-                              </a:rPr>
-                              <m:t>𝑔</m:t>
-                            </m:r>
-                          </m:e>
-                          <m:sup>
-                            <m:r>
-                              <a:rPr lang="en-US" b="0" i="1" smtClean="0">
-                                <a:latin typeface="Cambria Math" panose="02040503050406030204" pitchFamily="18" charset="0"/>
-                              </a:rPr>
-                              <m:t>𝑎</m:t>
-                            </m:r>
-                          </m:sup>
-                        </m:sSup>
-                        <m:r>
-                          <a:rPr lang="en-US" b="0" i="1" smtClean="0">
-                            <a:latin typeface="Cambria Math" panose="02040503050406030204" pitchFamily="18" charset="0"/>
-                          </a:rPr>
-                          <m:t>,</m:t>
-                        </m:r>
-                        <m:sSup>
-                          <m:sSupPr>
-                            <m:ctrlPr>
-                              <a:rPr lang="en-US" b="0" i="1" smtClean="0">
-                                <a:latin typeface="Cambria Math" panose="02040503050406030204" pitchFamily="18" charset="0"/>
-                              </a:rPr>
-                            </m:ctrlPr>
-                          </m:sSupPr>
-                          <m:e>
-                            <m:r>
-                              <a:rPr lang="en-US" b="0" i="1" smtClean="0">
-                                <a:latin typeface="Cambria Math" panose="02040503050406030204" pitchFamily="18" charset="0"/>
-                              </a:rPr>
-                              <m:t>𝑔</m:t>
-                            </m:r>
-                          </m:e>
-                          <m:sup>
-                            <m:r>
-                              <a:rPr lang="en-US" b="0" i="1" smtClean="0">
-                                <a:latin typeface="Cambria Math" panose="02040503050406030204" pitchFamily="18" charset="0"/>
-                              </a:rPr>
-                              <m:t>𝑏</m:t>
-                            </m:r>
-                          </m:sup>
-                        </m:sSup>
-                      </m:e>
-                    </m:d>
-                    <m:r>
-                      <a:rPr lang="en-US" b="0" i="1" smtClean="0">
-                        <a:latin typeface="Cambria Math" panose="02040503050406030204" pitchFamily="18" charset="0"/>
-                      </a:rPr>
-                      <m:t>=</m:t>
-                    </m:r>
-                    <m:sSup>
-                      <m:sSupPr>
-                        <m:ctrlPr>
-                          <a:rPr lang="en-US" b="0" i="1" smtClean="0">
-                            <a:latin typeface="Cambria Math" panose="02040503050406030204" pitchFamily="18" charset="0"/>
-                          </a:rPr>
-                        </m:ctrlPr>
-                      </m:sSupPr>
-                      <m:e>
-                        <m:r>
-                          <a:rPr lang="en-US" b="0" i="1" smtClean="0">
-                            <a:latin typeface="Cambria Math" panose="02040503050406030204" pitchFamily="18" charset="0"/>
-                          </a:rPr>
-                          <m:t>𝑔</m:t>
-                        </m:r>
-                      </m:e>
-                      <m:sup>
-                        <m:r>
-                          <a:rPr lang="en-US" b="0" i="1" smtClean="0">
-                            <a:latin typeface="Cambria Math" panose="02040503050406030204" pitchFamily="18" charset="0"/>
-                          </a:rPr>
-                          <m:t>𝑎𝑏</m:t>
-                        </m:r>
-                      </m:sup>
-                    </m:sSup>
-                  </m:oMath>
-                </a14:m>
-                <a:r>
-                  <a:rPr lang="ru-RU" dirty="0" smtClean="0"/>
-                  <a:t>. Насколько сложно вычисление </a:t>
-                </a:r>
-                <a14:m>
-                  <m:oMath xmlns:m="http://schemas.openxmlformats.org/officeDocument/2006/math">
-                    <m:r>
-                      <a:rPr lang="en-US" b="0" i="1" smtClean="0">
-                        <a:latin typeface="Cambria Math" panose="02040503050406030204" pitchFamily="18" charset="0"/>
-                      </a:rPr>
-                      <m:t>𝐷𝐻</m:t>
-                    </m:r>
-                    <m:r>
-                      <a:rPr lang="ru-RU" b="0" i="0" smtClean="0">
-                        <a:latin typeface="Cambria Math" panose="02040503050406030204" pitchFamily="18" charset="0"/>
-                      </a:rPr>
-                      <m:t>?</m:t>
-                    </m:r>
-                  </m:oMath>
-                </a14:m>
-                <a:endParaRPr lang="ru-RU" dirty="0"/>
-              </a:p>
-              <a:p>
-                <a:pPr marL="0" indent="0">
-                  <a:buNone/>
-                </a:pPr>
-                <a14:m>
-                  <m:oMath xmlns:m="http://schemas.openxmlformats.org/officeDocument/2006/math">
-                    <m:r>
-                      <a:rPr lang="en-US" b="0" i="1" smtClean="0">
-                        <a:latin typeface="Cambria Math" panose="02040503050406030204" pitchFamily="18" charset="0"/>
-                      </a:rPr>
-                      <m:t>𝑇</m:t>
-                    </m:r>
-                    <m:d>
-                      <m:dPr>
-                        <m:ctrlPr>
-                          <a:rPr lang="en-US" b="0" i="1" smtClean="0">
-                            <a:latin typeface="Cambria Math" panose="02040503050406030204" pitchFamily="18" charset="0"/>
-                          </a:rPr>
-                        </m:ctrlPr>
-                      </m:dPr>
-                      <m:e>
-                        <m:r>
-                          <a:rPr lang="en-US" b="0" i="1" smtClean="0">
-                            <a:latin typeface="Cambria Math" panose="02040503050406030204" pitchFamily="18" charset="0"/>
-                          </a:rPr>
-                          <m:t>𝐷𝐻</m:t>
-                        </m:r>
-                      </m:e>
-                    </m:d>
-                    <m:r>
-                      <a:rPr lang="en-US" b="0" i="1" smtClean="0">
-                        <a:latin typeface="Cambria Math" panose="02040503050406030204" pitchFamily="18" charset="0"/>
-                      </a:rPr>
-                      <m:t>=</m:t>
-                    </m:r>
-                    <m:r>
-                      <m:rPr>
-                        <m:sty m:val="p"/>
-                      </m:rPr>
-                      <a:rPr lang="en-US" b="0" i="0" smtClean="0">
-                        <a:latin typeface="Cambria Math" panose="02040503050406030204" pitchFamily="18" charset="0"/>
-                      </a:rPr>
-                      <m:t>exp</m:t>
-                    </m:r>
-                    <m:r>
-                      <a:rPr lang="en-US" b="0" i="1" smtClean="0">
-                        <a:latin typeface="Cambria Math" panose="02040503050406030204" pitchFamily="18" charset="0"/>
-                      </a:rPr>
-                      <m:t>⁡(</m:t>
-                    </m:r>
-                    <m:r>
-                      <a:rPr lang="en-US" b="0" i="1" smtClean="0">
-                        <a:latin typeface="Cambria Math" panose="02040503050406030204" pitchFamily="18" charset="0"/>
-                      </a:rPr>
-                      <m:t>𝑂</m:t>
-                    </m:r>
-                    <m:sSup>
-                      <m:sSupPr>
-                        <m:ctrlPr>
-                          <a:rPr lang="en-US" b="0" i="1" smtClean="0">
-                            <a:latin typeface="Cambria Math" panose="02040503050406030204" pitchFamily="18" charset="0"/>
-                          </a:rPr>
-                        </m:ctrlPr>
-                      </m:sSupPr>
-                      <m:e>
-                        <m:r>
-                          <a:rPr lang="en-US" b="0" i="1" smtClean="0">
-                            <a:latin typeface="Cambria Math" panose="02040503050406030204" pitchFamily="18" charset="0"/>
-                          </a:rPr>
-                          <m:t>(</m:t>
-                        </m:r>
-                        <m:r>
-                          <a:rPr lang="en-US" b="0" i="1" smtClean="0">
-                            <a:latin typeface="Cambria Math" panose="02040503050406030204" pitchFamily="18" charset="0"/>
-                          </a:rPr>
-                          <m:t>𝑛</m:t>
-                        </m:r>
-                      </m:e>
-                      <m:sup>
-                        <m:f>
-                          <m:fPr>
-                            <m:ctrlPr>
-                              <a:rPr lang="en-US" b="0" i="1" smtClean="0">
-                                <a:latin typeface="Cambria Math" panose="02040503050406030204" pitchFamily="18" charset="0"/>
-                              </a:rPr>
-                            </m:ctrlPr>
-                          </m:fPr>
-                          <m:num>
-                            <m:r>
-                              <a:rPr lang="en-US" b="0" i="1" smtClean="0">
-                                <a:latin typeface="Cambria Math" panose="02040503050406030204" pitchFamily="18" charset="0"/>
-                              </a:rPr>
-                              <m:t>1</m:t>
-                            </m:r>
-                          </m:num>
-                          <m:den>
-                            <m:r>
-                              <a:rPr lang="en-US" b="0" i="1" smtClean="0">
-                                <a:latin typeface="Cambria Math" panose="02040503050406030204" pitchFamily="18" charset="0"/>
-                              </a:rPr>
-                              <m:t>3</m:t>
-                            </m:r>
-                          </m:den>
-                        </m:f>
-                      </m:sup>
-                    </m:sSup>
-                    <m:r>
-                      <a:rPr lang="en-US" b="0" i="1" smtClean="0">
-                        <a:latin typeface="Cambria Math" panose="02040503050406030204" pitchFamily="18" charset="0"/>
-                      </a:rPr>
-                      <m:t>))</m:t>
-                    </m:r>
-                  </m:oMath>
-                </a14:m>
-                <a:r>
-                  <a:rPr lang="en-US" dirty="0" smtClean="0"/>
-                  <a:t>.</a:t>
-                </a:r>
-                <a:endParaRPr lang="ru-RU" dirty="0"/>
-              </a:p>
-            </p:txBody>
-          </p:sp>
-        </mc:Choice>
-        <mc:Fallback xmlns="">
-          <p:sp>
-            <p:nvSpPr>
-              <p:cNvPr id="3" name="Объект 2"/>
-              <p:cNvSpPr>
-                <a:spLocks noGrp="1" noRot="1" noChangeAspect="1" noMove="1" noResize="1" noEditPoints="1" noAdjustHandles="1" noChangeArrowheads="1" noChangeShapeType="1" noTextEdit="1"/>
-              </p:cNvSpPr>
-              <p:nvPr>
-                <p:ph idx="1"/>
-              </p:nvPr>
-            </p:nvSpPr>
-            <p:spPr>
-              <a:blipFill>
-                <a:blip r:embed="rId2"/>
-                <a:stretch>
-                  <a:fillRect l="-1043" t="-1821"/>
-                </a:stretch>
-              </a:blipFill>
-            </p:spPr>
-            <p:txBody>
-              <a:bodyPr/>
-              <a:lstStyle/>
-              <a:p>
-                <a:r>
-                  <a:rPr lang="ru-RU">
-                    <a:noFill/>
-                  </a:rPr>
-                  <a:t> </a:t>
-                </a:r>
-              </a:p>
-            </p:txBody>
-          </p:sp>
-        </mc:Fallback>
-      </mc:AlternateContent>
-      <p:sp>
-        <p:nvSpPr>
-          <p:cNvPr id="4" name="Номер слайда 3"/>
-          <p:cNvSpPr>
-            <a:spLocks noGrp="1"/>
-          </p:cNvSpPr>
-          <p:nvPr>
-            <p:ph type="sldNum" sz="quarter" idx="12"/>
-          </p:nvPr>
-        </p:nvSpPr>
-        <p:spPr/>
-        <p:txBody>
-          <a:bodyPr/>
-          <a:lstStyle/>
-          <a:p>
-            <a:fld id="{8253DDDB-F8F7-4D64-A7FD-3F3D61C1949F}" type="slidenum">
-              <a:rPr lang="ru-RU" smtClean="0"/>
-              <a:t>9</a:t>
-            </a:fld>
-            <a:endParaRPr lang="ru-RU"/>
-          </a:p>
-        </p:txBody>
-      </p:sp>
-      <p:pic>
-        <p:nvPicPr>
-          <p:cNvPr id="5" name="Рисунок 4"/>
-          <p:cNvPicPr>
-            <a:picLocks noChangeAspect="1"/>
-          </p:cNvPicPr>
-          <p:nvPr/>
-        </p:nvPicPr>
-        <p:blipFill>
-          <a:blip r:embed="rId3"/>
-          <a:stretch>
-            <a:fillRect/>
-          </a:stretch>
-        </p:blipFill>
-        <p:spPr>
-          <a:xfrm>
-            <a:off x="1778244" y="4001294"/>
-            <a:ext cx="8020050" cy="2647950"/>
-          </a:xfrm>
-          <a:prstGeom prst="rect">
-            <a:avLst/>
-          </a:prstGeom>
-        </p:spPr>
-      </p:pic>
-    </p:spTree>
-    <p:extLst>
-      <p:ext uri="{BB962C8B-B14F-4D97-AF65-F5344CB8AC3E}">
-        <p14:creationId xmlns:p14="http://schemas.microsoft.com/office/powerpoint/2010/main" val="2076431824"/>
-      </p:ext>
-    </p:extLst>
-  </p:cSld>
-  <p:clrMapOvr>
-    <a:masterClrMapping/>
-  </p:clrMapOvr>
-  <p:timing>
-    <p:tnLst>
-      <p:par>
-        <p:cTn id="1" dur="indefinite" restart="never" nodeType="tmRoot"/>
-      </p:par>
-    </p:tnLst>
-  </p:timing>
 </p:sld>
 </file>
 
